--- a/slides/Math130Unit3C.pptx
+++ b/slides/Math130Unit3C.pptx
@@ -4,6 +4,9 @@
   <p:sldMasterIdLst>
     <p:sldMasterId id="2147483648" r:id="rId1"/>
   </p:sldMasterIdLst>
+  <p:notesMasterIdLst>
+    <p:notesMasterId r:id="rId19"/>
+  </p:notesMasterIdLst>
   <p:sldIdLst>
     <p:sldId id="256" r:id="rId2"/>
     <p:sldId id="257" r:id="rId3"/>
@@ -23,10 +26,7 @@
     <p:sldId id="271" r:id="rId17"/>
     <p:sldId id="272" r:id="rId18"/>
   </p:sldIdLst>
-  <p:notesMasterIdLst>
-    <p:notesMasterId r:id="rId19"/>
-  </p:notesMasterIdLst>
-  <p:sldSz cx="9144000" cy="5143500"/>
+  <p:sldSz cx="9144000" cy="5143500" type="screen16x9"/>
   <p:notesSz cx="5143500" cy="9144000"/>
   <p:defaultTextStyle>
     <a:lvl1pPr marL="0" algn="l" defTabSz="914400" rtl="0" eaLnBrk="1" latinLnBrk="0" hangingPunct="1">
@@ -120,7 +120,102 @@
       </a:defRPr>
     </a:lvl9pPr>
   </p:defaultTextStyle>
+  <p:extLst>
+    <p:ext uri="{EFAFB233-063F-42B5-8137-9DF3F51BA10A}">
+      <p15:sldGuideLst xmlns:p15="http://schemas.microsoft.com/office/powerpoint/2012/main"/>
+    </p:ext>
+  </p:extLst>
 </p:presentation>
+</file>
+
+<file path=ppt/revisionInfo.xml><?xml version="1.0" encoding="utf-8"?>
+<p1510:revInfo xmlns:a="http://schemas.openxmlformats.org/drawingml/2006/main" xmlns:r="http://schemas.openxmlformats.org/officeDocument/2006/relationships" xmlns:p1510="http://schemas.microsoft.com/office/powerpoint/2015/10/main">
+  <p1510:revLst>
+    <p1510:client id="{C35CE9CF-3D04-4E3A-BFCC-DE1F19C2B57D}" v="2" dt="2026-04-15T19:10:35.220"/>
+  </p1510:revLst>
+</p1510:revInfo>
+</file>
+
+<file path=ppt/changesInfos/changesInfo1.xml><?xml version="1.0" encoding="utf-8"?>
+<pc:chgInfo xmlns:a="http://schemas.openxmlformats.org/drawingml/2006/main" xmlns:r="http://schemas.openxmlformats.org/officeDocument/2006/relationships" xmlns:ac="http://schemas.microsoft.com/office/drawing/2013/main/command" xmlns:pc="http://schemas.microsoft.com/office/powerpoint/2013/main/command">
+  <pc:docChgLst>
+    <pc:chgData name="Volk, Andrew Harrison (General Math and Science)" userId="d2898ccd-3028-4ee4-8f2f-5598df4c43dc" providerId="ADAL" clId="{D0EF2AF6-1D9C-4815-94DD-A346A16C3C87}"/>
+    <pc:docChg chg="undo custSel modSld">
+      <pc:chgData name="Volk, Andrew Harrison (General Math and Science)" userId="d2898ccd-3028-4ee4-8f2f-5598df4c43dc" providerId="ADAL" clId="{D0EF2AF6-1D9C-4815-94DD-A346A16C3C87}" dt="2026-04-15T19:12:55.913" v="11" actId="1076"/>
+      <pc:docMkLst>
+        <pc:docMk/>
+      </pc:docMkLst>
+      <pc:sldChg chg="modSp mod">
+        <pc:chgData name="Volk, Andrew Harrison (General Math and Science)" userId="d2898ccd-3028-4ee4-8f2f-5598df4c43dc" providerId="ADAL" clId="{D0EF2AF6-1D9C-4815-94DD-A346A16C3C87}" dt="2026-04-15T19:09:51.547" v="1" actId="1076"/>
+        <pc:sldMkLst>
+          <pc:docMk/>
+          <pc:sldMk cId="0" sldId="258"/>
+        </pc:sldMkLst>
+        <pc:spChg chg="mod">
+          <ac:chgData name="Volk, Andrew Harrison (General Math and Science)" userId="d2898ccd-3028-4ee4-8f2f-5598df4c43dc" providerId="ADAL" clId="{D0EF2AF6-1D9C-4815-94DD-A346A16C3C87}" dt="2026-04-15T19:09:51.547" v="1" actId="1076"/>
+          <ac:spMkLst>
+            <pc:docMk/>
+            <pc:sldMk cId="0" sldId="258"/>
+            <ac:spMk id="24" creationId="{00000000-0000-0000-0000-000000000000}"/>
+          </ac:spMkLst>
+        </pc:spChg>
+      </pc:sldChg>
+      <pc:sldChg chg="modSp mod modAnim">
+        <pc:chgData name="Volk, Andrew Harrison (General Math and Science)" userId="d2898ccd-3028-4ee4-8f2f-5598df4c43dc" providerId="ADAL" clId="{D0EF2AF6-1D9C-4815-94DD-A346A16C3C87}" dt="2026-04-15T19:10:53.752" v="8" actId="1076"/>
+        <pc:sldMkLst>
+          <pc:docMk/>
+          <pc:sldMk cId="0" sldId="260"/>
+        </pc:sldMkLst>
+        <pc:spChg chg="mod">
+          <ac:chgData name="Volk, Andrew Harrison (General Math and Science)" userId="d2898ccd-3028-4ee4-8f2f-5598df4c43dc" providerId="ADAL" clId="{D0EF2AF6-1D9C-4815-94DD-A346A16C3C87}" dt="2026-04-15T19:10:24.149" v="4" actId="14100"/>
+          <ac:spMkLst>
+            <pc:docMk/>
+            <pc:sldMk cId="0" sldId="260"/>
+            <ac:spMk id="5" creationId="{00000000-0000-0000-0000-000000000000}"/>
+          </ac:spMkLst>
+        </pc:spChg>
+        <pc:spChg chg="mod">
+          <ac:chgData name="Volk, Andrew Harrison (General Math and Science)" userId="d2898ccd-3028-4ee4-8f2f-5598df4c43dc" providerId="ADAL" clId="{D0EF2AF6-1D9C-4815-94DD-A346A16C3C87}" dt="2026-04-15T19:10:53.752" v="8" actId="1076"/>
+          <ac:spMkLst>
+            <pc:docMk/>
+            <pc:sldMk cId="0" sldId="260"/>
+            <ac:spMk id="6" creationId="{00000000-0000-0000-0000-000000000000}"/>
+          </ac:spMkLst>
+        </pc:spChg>
+      </pc:sldChg>
+      <pc:sldChg chg="modSp mod">
+        <pc:chgData name="Volk, Andrew Harrison (General Math and Science)" userId="d2898ccd-3028-4ee4-8f2f-5598df4c43dc" providerId="ADAL" clId="{D0EF2AF6-1D9C-4815-94DD-A346A16C3C87}" dt="2026-04-15T19:11:39.954" v="9" actId="14100"/>
+        <pc:sldMkLst>
+          <pc:docMk/>
+          <pc:sldMk cId="0" sldId="265"/>
+        </pc:sldMkLst>
+        <pc:picChg chg="mod">
+          <ac:chgData name="Volk, Andrew Harrison (General Math and Science)" userId="d2898ccd-3028-4ee4-8f2f-5598df4c43dc" providerId="ADAL" clId="{D0EF2AF6-1D9C-4815-94DD-A346A16C3C87}" dt="2026-04-15T19:11:39.954" v="9" actId="14100"/>
+          <ac:picMkLst>
+            <pc:docMk/>
+            <pc:sldMk cId="0" sldId="265"/>
+            <ac:picMk id="5" creationId="{00000000-0000-0000-0000-000000000000}"/>
+          </ac:picMkLst>
+        </pc:picChg>
+      </pc:sldChg>
+      <pc:sldChg chg="modSp mod">
+        <pc:chgData name="Volk, Andrew Harrison (General Math and Science)" userId="d2898ccd-3028-4ee4-8f2f-5598df4c43dc" providerId="ADAL" clId="{D0EF2AF6-1D9C-4815-94DD-A346A16C3C87}" dt="2026-04-15T19:12:55.913" v="11" actId="1076"/>
+        <pc:sldMkLst>
+          <pc:docMk/>
+          <pc:sldMk cId="0" sldId="266"/>
+        </pc:sldMkLst>
+        <pc:picChg chg="mod">
+          <ac:chgData name="Volk, Andrew Harrison (General Math and Science)" userId="d2898ccd-3028-4ee4-8f2f-5598df4c43dc" providerId="ADAL" clId="{D0EF2AF6-1D9C-4815-94DD-A346A16C3C87}" dt="2026-04-15T19:12:55.913" v="11" actId="1076"/>
+          <ac:picMkLst>
+            <pc:docMk/>
+            <pc:sldMk cId="0" sldId="266"/>
+            <ac:picMk id="5" creationId="{00000000-0000-0000-0000-000000000000}"/>
+          </ac:picMkLst>
+        </pc:picChg>
+      </pc:sldChg>
+    </pc:docChg>
+  </pc:docChgLst>
+</pc:chgInfo>
 </file>
 
 <file path=ppt/notesMasters/notesMaster1.xml><?xml version="1.0" encoding="utf-8"?>
@@ -145,234 +240,10 @@
           <a:chExt cx="0" cy="0"/>
         </a:xfrm>
       </p:grpSpPr>
-      <p:sp>
-        <p:nvSpPr>
-          <p:cNvPr id="2" name="Header Placeholder 1"/>
-          <p:cNvSpPr>
-            <a:spLocks noGrp="1"/>
-          </p:cNvSpPr>
-          <p:nvPr>
-            <p:ph type="hdr" sz="quarter"/>
-          </p:nvPr>
-        </p:nvSpPr>
-        <p:spPr>
-          <a:xfrm>
-            <a:off x="0" y="0"/>
-            <a:ext cx="2971800" cy="458788"/>
-          </a:xfrm>
-          <a:prstGeom prst="rect">
-            <a:avLst/>
-          </a:prstGeom>
-        </p:spPr>
-        <p:txBody>
-          <a:bodyPr vert="horz" lIns="91440" tIns="45720" rIns="91440" bIns="45720" rtlCol="0"/>
-          <a:lstStyle>
-            <a:lvl1pPr algn="l">
-              <a:defRPr sz="1200"/>
-            </a:lvl1pPr>
-          </a:lstStyle>
-          <a:p>
-            <a:endParaRPr lang="en-US"/>
-          </a:p>
-        </p:txBody>
-      </p:sp>
-      <p:sp>
-        <p:nvSpPr>
-          <p:cNvPr id="3" name="Date Placeholder 2"/>
-          <p:cNvSpPr>
-            <a:spLocks noGrp="1"/>
-          </p:cNvSpPr>
-          <p:nvPr>
-            <p:ph type="dt" idx="1"/>
-          </p:nvPr>
-        </p:nvSpPr>
-        <p:spPr>
-          <a:xfrm>
-            <a:off x="3884613" y="0"/>
-            <a:ext cx="2971800" cy="458788"/>
-          </a:xfrm>
-          <a:prstGeom prst="rect">
-            <a:avLst/>
-          </a:prstGeom>
-        </p:spPr>
-        <p:txBody>
-          <a:bodyPr vert="horz" lIns="91440" tIns="45720" rIns="91440" bIns="45720" rtlCol="0"/>
-          <a:lstStyle>
-            <a:lvl1pPr algn="r">
-              <a:defRPr sz="1200"/>
-            </a:lvl1pPr>
-          </a:lstStyle>
-          <a:p>
-            <a:fld id="{5282F153-3F37-0F45-9E97-73ACFA13230C}" type="datetimeFigureOut">
-              <a:rPr lang="en-US"/>
-              <a:t>7/23/19</a:t>
-            </a:fld>
-            <a:endParaRPr lang="en-US"/>
-          </a:p>
-        </p:txBody>
-      </p:sp>
-      <p:sp>
-        <p:nvSpPr>
-          <p:cNvPr id="4" name="Slide Image Placeholder 3"/>
-          <p:cNvSpPr>
-            <a:spLocks noGrp="1" noRot="1" noChangeAspect="1"/>
-          </p:cNvSpPr>
-          <p:nvPr>
-            <p:ph type="sldImg" idx="2"/>
-          </p:nvPr>
-        </p:nvSpPr>
-        <p:spPr>
-          <a:xfrm>
-            <a:off x="685800" y="1143000"/>
-            <a:ext cx="5486400" cy="3086100"/>
-          </a:xfrm>
-          <a:prstGeom prst="rect">
-            <a:avLst/>
-          </a:prstGeom>
-          <a:noFill/>
-          <a:ln w="12700">
-            <a:solidFill>
-              <a:prstClr val="black"/>
-            </a:solidFill>
-          </a:ln>
-        </p:spPr>
-        <p:txBody>
-          <a:bodyPr vert="horz" lIns="91440" tIns="45720" rIns="91440" bIns="45720" rtlCol="0" anchor="ctr"/>
-          <a:lstStyle/>
-          <a:p>
-            <a:endParaRPr lang="en-US"/>
-          </a:p>
-        </p:txBody>
-      </p:sp>
-      <p:sp>
-        <p:nvSpPr>
-          <p:cNvPr id="5" name="Notes Placeholder 4"/>
-          <p:cNvSpPr>
-            <a:spLocks noGrp="1"/>
-          </p:cNvSpPr>
-          <p:nvPr>
-            <p:ph type="body" sz="quarter" idx="3"/>
-          </p:nvPr>
-        </p:nvSpPr>
-        <p:spPr>
-          <a:xfrm>
-            <a:off x="685800" y="4400550"/>
-            <a:ext cx="5486400" cy="3600450"/>
-          </a:xfrm>
-          <a:prstGeom prst="rect">
-            <a:avLst/>
-          </a:prstGeom>
-        </p:spPr>
-        <p:txBody>
-          <a:bodyPr vert="horz" lIns="91440" tIns="45720" rIns="91440" bIns="45720" rtlCol="0"/>
-          <a:lstStyle/>
-          <a:p>
-            <a:pPr lvl="0"/>
-            <a:r>
-              <a:rPr lang="en-US"/>
-              <a:t>Click to edit Master text styles</a:t>
-            </a:r>
-          </a:p>
-          <a:p>
-            <a:pPr lvl="1"/>
-            <a:r>
-              <a:rPr lang="en-US"/>
-              <a:t>Second level</a:t>
-            </a:r>
-          </a:p>
-          <a:p>
-            <a:pPr lvl="2"/>
-            <a:r>
-              <a:rPr lang="en-US"/>
-              <a:t>Third level</a:t>
-            </a:r>
-          </a:p>
-          <a:p>
-            <a:pPr lvl="3"/>
-            <a:r>
-              <a:rPr lang="en-US"/>
-              <a:t>Fourth level</a:t>
-            </a:r>
-          </a:p>
-          <a:p>
-            <a:pPr lvl="4"/>
-            <a:r>
-              <a:rPr lang="en-US"/>
-              <a:t>Fifth level</a:t>
-            </a:r>
-          </a:p>
-        </p:txBody>
-      </p:sp>
-      <p:sp>
-        <p:nvSpPr>
-          <p:cNvPr id="6" name="Footer Placeholder 5"/>
-          <p:cNvSpPr>
-            <a:spLocks noGrp="1"/>
-          </p:cNvSpPr>
-          <p:nvPr>
-            <p:ph type="ftr" sz="quarter" idx="4"/>
-          </p:nvPr>
-        </p:nvSpPr>
-        <p:spPr>
-          <a:xfrm>
-            <a:off x="0" y="8685213"/>
-            <a:ext cx="2971800" cy="458787"/>
-          </a:xfrm>
-          <a:prstGeom prst="rect">
-            <a:avLst/>
-          </a:prstGeom>
-        </p:spPr>
-        <p:txBody>
-          <a:bodyPr vert="horz" lIns="91440" tIns="45720" rIns="91440" bIns="45720" rtlCol="0" anchor="b"/>
-          <a:lstStyle>
-            <a:lvl1pPr algn="l">
-              <a:defRPr sz="1200"/>
-            </a:lvl1pPr>
-          </a:lstStyle>
-          <a:p>
-            <a:endParaRPr lang="en-US"/>
-          </a:p>
-        </p:txBody>
-      </p:sp>
-      <p:sp>
-        <p:nvSpPr>
-          <p:cNvPr id="7" name="Slide Number Placeholder 6"/>
-          <p:cNvSpPr>
-            <a:spLocks noGrp="1"/>
-          </p:cNvSpPr>
-          <p:nvPr>
-            <p:ph type="sldNum" sz="quarter" idx="5"/>
-          </p:nvPr>
-        </p:nvSpPr>
-        <p:spPr>
-          <a:xfrm>
-            <a:off x="3884613" y="8685213"/>
-            <a:ext cx="2971800" cy="458787"/>
-          </a:xfrm>
-          <a:prstGeom prst="rect">
-            <a:avLst/>
-          </a:prstGeom>
-        </p:spPr>
-        <p:txBody>
-          <a:bodyPr vert="horz" lIns="91440" tIns="45720" rIns="91440" bIns="45720" rtlCol="0" anchor="b"/>
-          <a:lstStyle>
-            <a:lvl1pPr algn="r">
-              <a:defRPr sz="1200"/>
-            </a:lvl1pPr>
-          </a:lstStyle>
-          <a:p>
-            <a:fld id="{CE5E9CC1-C706-0F49-92D6-E571CC5EEA8F}" type="slidenum">
-              <a:rPr lang="en-US"/>
-              <a:t>‹#›</a:t>
-            </a:fld>
-            <a:endParaRPr lang="en-US"/>
-          </a:p>
-        </p:txBody>
-      </p:sp>
     </p:spTree>
     <p:extLst>
       <p:ext uri="{BB962C8B-B14F-4D97-AF65-F5344CB8AC3E}">
-        <p14:creationId xmlns:p14="http://schemas.microsoft.com/office/powerpoint/2010/main" val="1024086991"/>
+        <p14:creationId xmlns:p14="http://schemas.microsoft.com/office/powerpoint/2010/main" val="2931954226"/>
       </p:ext>
     </p:extLst>
   </p:cSld>
@@ -516,10 +387,6 @@
           <a:bodyPr/>
           <a:lstStyle/>
           <a:p>
-            <a:r>
-              <a:rPr lang="en-US" dirty="0"/>
-              <a:t/>
-            </a:r>
             <a:endParaRPr lang="en-US" dirty="0"/>
           </a:p>
         </p:txBody>
@@ -604,10 +471,6 @@
           <a:bodyPr/>
           <a:lstStyle/>
           <a:p>
-            <a:r>
-              <a:rPr lang="en-US" dirty="0"/>
-              <a:t/>
-            </a:r>
             <a:endParaRPr lang="en-US" dirty="0"/>
           </a:p>
         </p:txBody>
@@ -692,10 +555,6 @@
           <a:bodyPr/>
           <a:lstStyle/>
           <a:p>
-            <a:r>
-              <a:rPr lang="en-US" dirty="0"/>
-              <a:t/>
-            </a:r>
             <a:endParaRPr lang="en-US" dirty="0"/>
           </a:p>
         </p:txBody>
@@ -780,10 +639,6 @@
           <a:bodyPr/>
           <a:lstStyle/>
           <a:p>
-            <a:r>
-              <a:rPr lang="en-US" dirty="0"/>
-              <a:t/>
-            </a:r>
             <a:endParaRPr lang="en-US" dirty="0"/>
           </a:p>
         </p:txBody>
@@ -868,10 +723,6 @@
           <a:bodyPr/>
           <a:lstStyle/>
           <a:p>
-            <a:r>
-              <a:rPr lang="en-US" dirty="0"/>
-              <a:t/>
-            </a:r>
             <a:endParaRPr lang="en-US" dirty="0"/>
           </a:p>
         </p:txBody>
@@ -956,10 +807,6 @@
           <a:bodyPr/>
           <a:lstStyle/>
           <a:p>
-            <a:r>
-              <a:rPr lang="en-US" dirty="0"/>
-              <a:t/>
-            </a:r>
             <a:endParaRPr lang="en-US" dirty="0"/>
           </a:p>
         </p:txBody>
@@ -1044,10 +891,6 @@
           <a:bodyPr/>
           <a:lstStyle/>
           <a:p>
-            <a:r>
-              <a:rPr lang="en-US" dirty="0"/>
-              <a:t/>
-            </a:r>
             <a:endParaRPr lang="en-US" dirty="0"/>
           </a:p>
         </p:txBody>
@@ -1132,10 +975,6 @@
           <a:bodyPr/>
           <a:lstStyle/>
           <a:p>
-            <a:r>
-              <a:rPr lang="en-US" dirty="0"/>
-              <a:t/>
-            </a:r>
             <a:endParaRPr lang="en-US" dirty="0"/>
           </a:p>
         </p:txBody>
@@ -1220,10 +1059,6 @@
           <a:bodyPr/>
           <a:lstStyle/>
           <a:p>
-            <a:r>
-              <a:rPr lang="en-US" dirty="0"/>
-              <a:t/>
-            </a:r>
             <a:endParaRPr lang="en-US" dirty="0"/>
           </a:p>
         </p:txBody>
@@ -1308,10 +1143,6 @@
           <a:bodyPr/>
           <a:lstStyle/>
           <a:p>
-            <a:r>
-              <a:rPr lang="en-US" dirty="0"/>
-              <a:t/>
-            </a:r>
             <a:endParaRPr lang="en-US" dirty="0"/>
           </a:p>
         </p:txBody>
@@ -1396,10 +1227,6 @@
           <a:bodyPr/>
           <a:lstStyle/>
           <a:p>
-            <a:r>
-              <a:rPr lang="en-US" dirty="0"/>
-              <a:t/>
-            </a:r>
             <a:endParaRPr lang="en-US" dirty="0"/>
           </a:p>
         </p:txBody>
@@ -1484,10 +1311,6 @@
           <a:bodyPr/>
           <a:lstStyle/>
           <a:p>
-            <a:r>
-              <a:rPr lang="en-US" dirty="0"/>
-              <a:t/>
-            </a:r>
             <a:endParaRPr lang="en-US" dirty="0"/>
           </a:p>
         </p:txBody>
@@ -1572,10 +1395,6 @@
           <a:bodyPr/>
           <a:lstStyle/>
           <a:p>
-            <a:r>
-              <a:rPr lang="en-US" dirty="0"/>
-              <a:t/>
-            </a:r>
             <a:endParaRPr lang="en-US" dirty="0"/>
           </a:p>
         </p:txBody>
@@ -1660,10 +1479,6 @@
           <a:bodyPr/>
           <a:lstStyle/>
           <a:p>
-            <a:r>
-              <a:rPr lang="en-US" dirty="0"/>
-              <a:t/>
-            </a:r>
             <a:endParaRPr lang="en-US" dirty="0"/>
           </a:p>
         </p:txBody>
@@ -1748,10 +1563,6 @@
           <a:bodyPr/>
           <a:lstStyle/>
           <a:p>
-            <a:r>
-              <a:rPr lang="en-US" dirty="0"/>
-              <a:t/>
-            </a:r>
             <a:endParaRPr lang="en-US" dirty="0"/>
           </a:p>
         </p:txBody>
@@ -1836,10 +1647,6 @@
           <a:bodyPr/>
           <a:lstStyle/>
           <a:p>
-            <a:r>
-              <a:rPr lang="en-US" dirty="0"/>
-              <a:t/>
-            </a:r>
             <a:endParaRPr lang="en-US" dirty="0"/>
           </a:p>
         </p:txBody>
@@ -1924,10 +1731,6 @@
           <a:bodyPr/>
           <a:lstStyle/>
           <a:p>
-            <a:r>
-              <a:rPr lang="en-US" dirty="0"/>
-              <a:t/>
-            </a:r>
             <a:endParaRPr lang="en-US" dirty="0"/>
           </a:p>
         </p:txBody>
@@ -2001,6 +1804,11 @@
 <file path=ppt/slideMasters/slideMaster1.xml><?xml version="1.0" encoding="utf-8"?>
 <p:sldMaster xmlns:a="http://schemas.openxmlformats.org/drawingml/2006/main" xmlns:r="http://schemas.openxmlformats.org/officeDocument/2006/relationships" xmlns:p="http://schemas.openxmlformats.org/presentationml/2006/main">
   <p:cSld>
+    <p:bg>
+      <p:bgRef idx="1001">
+        <a:schemeClr val="bg1"/>
+      </p:bgRef>
+    </p:bg>
     <p:spTree>
       <p:nvGrpSpPr>
         <p:cNvPr id="1" name=""/>
@@ -2283,6 +2091,7 @@
         <a:solidFill>
           <a:srgbClr val="0F2B46"/>
         </a:solidFill>
+        <a:effectLst/>
       </p:bgPr>
     </p:bg>
     <p:spTree>
@@ -2320,6 +2129,13 @@
           </a:solidFill>
           <a:ln/>
         </p:spPr>
+        <p:txBody>
+          <a:bodyPr/>
+          <a:lstStyle/>
+          <a:p>
+            <a:endParaRPr lang="en-US"/>
+          </a:p>
+        </p:txBody>
       </p:sp>
       <p:sp>
         <p:nvSpPr>
@@ -2342,6 +2158,13 @@
           </a:solidFill>
           <a:ln/>
         </p:spPr>
+        <p:txBody>
+          <a:bodyPr/>
+          <a:lstStyle/>
+          <a:p>
+            <a:endParaRPr lang="en-US"/>
+          </a:p>
+        </p:txBody>
       </p:sp>
       <p:sp>
         <p:nvSpPr>
@@ -2364,7 +2187,7 @@
           <a:bodyPr wrap="square" lIns="0" tIns="0" rIns="0" bIns="0" rtlCol="0" anchor="ctr"/>
           <a:lstStyle/>
           <a:p>
-            <a:pPr indent="0" marL="0">
+            <a:pPr marL="0" indent="0">
               <a:buNone/>
             </a:pPr>
             <a:r>
@@ -2403,7 +2226,7 @@
           <a:bodyPr wrap="square" lIns="0" tIns="0" rIns="0" bIns="0" rtlCol="0" anchor="ctr"/>
           <a:lstStyle/>
           <a:p>
-            <a:pPr indent="0" marL="0">
+            <a:pPr marL="0" indent="0">
               <a:buNone/>
             </a:pPr>
             <a:r>
@@ -2442,7 +2265,7 @@
           <a:bodyPr wrap="square" lIns="0" tIns="0" rIns="0" bIns="0" rtlCol="0" anchor="ctr"/>
           <a:lstStyle/>
           <a:p>
-            <a:pPr indent="0" marL="0">
+            <a:pPr marL="0" indent="0">
               <a:buNone/>
             </a:pPr>
             <a:r>
@@ -2481,7 +2304,7 @@
           <a:bodyPr wrap="square" lIns="0" tIns="0" rIns="0" bIns="0" rtlCol="0" anchor="ctr"/>
           <a:lstStyle/>
           <a:p>
-            <a:pPr indent="0" marL="0">
+            <a:pPr marL="0" indent="0">
               <a:buNone/>
             </a:pPr>
             <a:r>
@@ -2515,6 +2338,7 @@
         <a:solidFill>
           <a:srgbClr val="F8FAFC"/>
         </a:solidFill>
+        <a:effectLst/>
       </p:bgPr>
     </p:bg>
     <p:spTree>
@@ -2552,7 +2376,7 @@
           <a:bodyPr wrap="square" lIns="0" tIns="0" rIns="0" bIns="0" rtlCol="0" anchor="ctr"/>
           <a:lstStyle/>
           <a:p>
-            <a:pPr indent="0" marL="0">
+            <a:pPr marL="0" indent="0">
               <a:buNone/>
             </a:pPr>
             <a:r>
@@ -2589,6 +2413,13 @@
           </a:solidFill>
           <a:ln/>
         </p:spPr>
+        <p:txBody>
+          <a:bodyPr/>
+          <a:lstStyle/>
+          <a:p>
+            <a:endParaRPr lang="en-US"/>
+          </a:p>
+        </p:txBody>
       </p:sp>
       <p:sp>
         <p:nvSpPr>
@@ -2611,7 +2442,7 @@
           <a:bodyPr wrap="square" lIns="0" tIns="0" rIns="0" bIns="0" rtlCol="0" anchor="ctr"/>
           <a:lstStyle/>
           <a:p>
-            <a:pPr indent="0" marL="0">
+            <a:pPr marL="0" indent="0">
               <a:buNone/>
             </a:pPr>
             <a:r>
@@ -2631,14 +2462,14 @@
       </p:sp>
       <p:pic>
         <p:nvPicPr>
-          <p:cNvPr id="5" name="Image 0" descr="preencoded.png">    </p:cNvPr>
+          <p:cNvPr id="5" name="Image 0" descr="preencoded.png"/>
           <p:cNvPicPr>
             <a:picLocks noChangeAspect="1"/>
           </p:cNvPicPr>
           <p:nvPr/>
         </p:nvPicPr>
         <p:blipFill>
-          <a:blip r:embed="rId1"/>
+          <a:blip r:embed="rId3"/>
           <a:stretch>
             <a:fillRect/>
           </a:stretch>
@@ -2672,13 +2503,20 @@
           </a:solidFill>
           <a:ln/>
           <a:effectLst>
-            <a:outerShdw sx="100000" sy="100000" kx="0" ky="0" algn="bl" rotWithShape="0" blurRad="76200" dist="25400" dir="8100000">
+            <a:outerShdw blurRad="76200" dist="25400" dir="8100000" algn="bl" rotWithShape="0">
               <a:srgbClr val="000000">
                 <a:alpha val="10000"/>
               </a:srgbClr>
             </a:outerShdw>
           </a:effectLst>
         </p:spPr>
+        <p:txBody>
+          <a:bodyPr/>
+          <a:lstStyle/>
+          <a:p>
+            <a:endParaRPr lang="en-US"/>
+          </a:p>
+        </p:txBody>
       </p:sp>
       <p:sp>
         <p:nvSpPr>
@@ -2701,7 +2539,7 @@
           <a:bodyPr wrap="square" rtlCol="0" anchor="ctr"/>
           <a:lstStyle/>
           <a:p>
-            <a:pPr indent="0" marL="0">
+            <a:pPr marL="0" indent="0">
               <a:spcAft>
                 <a:spcPts val="200"/>
               </a:spcAft>
@@ -2721,7 +2559,7 @@
             <a:endParaRPr lang="en-US" sz="1400" dirty="0"/>
           </a:p>
           <a:p>
-            <a:pPr indent="0" marL="0">
+            <a:pPr marL="0" indent="0">
               <a:spcAft>
                 <a:spcPts val="200"/>
               </a:spcAft>
@@ -2741,7 +2579,7 @@
             <a:endParaRPr lang="en-US" sz="1400" dirty="0"/>
           </a:p>
           <a:p>
-            <a:pPr indent="0" marL="0">
+            <a:pPr marL="0" indent="0">
               <a:spcAft>
                 <a:spcPts val="200"/>
               </a:spcAft>
@@ -2750,7 +2588,7 @@
             <a:endParaRPr lang="en-US" sz="1400" dirty="0"/>
           </a:p>
           <a:p>
-            <a:pPr indent="0" marL="0">
+            <a:pPr marL="0" indent="0">
               <a:spcAft>
                 <a:spcPts val="200"/>
               </a:spcAft>
@@ -2770,7 +2608,7 @@
             <a:endParaRPr lang="en-US" sz="1400" dirty="0"/>
           </a:p>
           <a:p>
-            <a:pPr indent="0" marL="0">
+            <a:pPr marL="0" indent="0">
               <a:spcAft>
                 <a:spcPts val="200"/>
               </a:spcAft>
@@ -2790,7 +2628,7 @@
             <a:endParaRPr lang="en-US" sz="1400" dirty="0"/>
           </a:p>
           <a:p>
-            <a:pPr indent="0" marL="0">
+            <a:pPr marL="0" indent="0">
               <a:spcAft>
                 <a:spcPts val="200"/>
               </a:spcAft>
@@ -2799,7 +2637,7 @@
             <a:endParaRPr lang="en-US" sz="1400" dirty="0"/>
           </a:p>
           <a:p>
-            <a:pPr indent="0" marL="0">
+            <a:pPr marL="0" indent="0">
               <a:spcAft>
                 <a:spcPts val="200"/>
               </a:spcAft>
@@ -2819,7 +2657,7 @@
             <a:endParaRPr lang="en-US" sz="1400" dirty="0"/>
           </a:p>
           <a:p>
-            <a:pPr indent="0" marL="0">
+            <a:pPr marL="0" indent="0">
               <a:spcAft>
                 <a:spcPts val="200"/>
               </a:spcAft>
@@ -2839,7 +2677,7 @@
             <a:endParaRPr lang="en-US" sz="1400" dirty="0"/>
           </a:p>
           <a:p>
-            <a:pPr indent="0" marL="0">
+            <a:pPr marL="0" indent="0">
               <a:spcAft>
                 <a:spcPts val="200"/>
               </a:spcAft>
@@ -2848,7 +2686,7 @@
             <a:endParaRPr lang="en-US" sz="1400" dirty="0"/>
           </a:p>
           <a:p>
-            <a:pPr indent="0" marL="0">
+            <a:pPr marL="0" indent="0">
               <a:spcAft>
                 <a:spcPts val="200"/>
               </a:spcAft>
@@ -2885,6 +2723,7 @@
         <a:solidFill>
           <a:srgbClr val="F8FAFC"/>
         </a:solidFill>
+        <a:effectLst/>
       </p:bgPr>
     </p:bg>
     <p:spTree>
@@ -2922,7 +2761,7 @@
           <a:bodyPr wrap="square" lIns="0" tIns="0" rIns="0" bIns="0" rtlCol="0" anchor="ctr"/>
           <a:lstStyle/>
           <a:p>
-            <a:pPr indent="0" marL="0">
+            <a:pPr marL="0" indent="0">
               <a:buNone/>
             </a:pPr>
             <a:r>
@@ -2959,13 +2798,20 @@
           </a:solidFill>
           <a:ln/>
           <a:effectLst>
-            <a:outerShdw sx="100000" sy="100000" kx="0" ky="0" algn="bl" rotWithShape="0" blurRad="76200" dist="25400" dir="8100000">
+            <a:outerShdw blurRad="76200" dist="25400" dir="8100000" algn="bl" rotWithShape="0">
               <a:srgbClr val="000000">
                 <a:alpha val="10000"/>
               </a:srgbClr>
             </a:outerShdw>
           </a:effectLst>
         </p:spPr>
+        <p:txBody>
+          <a:bodyPr/>
+          <a:lstStyle/>
+          <a:p>
+            <a:endParaRPr lang="en-US"/>
+          </a:p>
+        </p:txBody>
       </p:sp>
       <p:sp>
         <p:nvSpPr>
@@ -2988,7 +2834,7 @@
           <a:bodyPr wrap="square" rtlCol="0" anchor="ctr"/>
           <a:lstStyle/>
           <a:p>
-            <a:pPr indent="0" marL="0">
+            <a:pPr marL="0" indent="0">
               <a:buNone/>
             </a:pPr>
             <a:r>
@@ -3002,9 +2848,6 @@
               </a:rPr>
               <a:t>"Solve" a triangle:  </a:t>
             </a:r>
-            <a:pPr indent="0" marL="0">
-              <a:buNone/>
-            </a:pPr>
             <a:r>
               <a:rPr lang="en-US" sz="1300" dirty="0">
                 <a:solidFill>
@@ -3022,21 +2865,21 @@
       </p:sp>
       <p:pic>
         <p:nvPicPr>
-          <p:cNvPr id="5" name="Image 0" descr="preencoded.png">    </p:cNvPr>
+          <p:cNvPr id="5" name="Image 0" descr="preencoded.png"/>
           <p:cNvPicPr>
             <a:picLocks noChangeAspect="1"/>
           </p:cNvPicPr>
           <p:nvPr/>
         </p:nvPicPr>
         <p:blipFill>
-          <a:blip r:embed="rId1"/>
+          <a:blip r:embed="rId3"/>
           <a:stretch>
             <a:fillRect/>
           </a:stretch>
         </p:blipFill>
         <p:spPr>
           <a:xfrm>
-            <a:off x="5303520" y="731520"/>
+            <a:off x="5303520" y="816138"/>
             <a:ext cx="3474720" cy="2926080"/>
           </a:xfrm>
           <a:prstGeom prst="rect">
@@ -3063,6 +2906,13 @@
           </a:solidFill>
           <a:ln/>
         </p:spPr>
+        <p:txBody>
+          <a:bodyPr/>
+          <a:lstStyle/>
+          <a:p>
+            <a:endParaRPr lang="en-US"/>
+          </a:p>
+        </p:txBody>
       </p:sp>
       <p:sp>
         <p:nvSpPr>
@@ -3085,7 +2935,7 @@
           <a:bodyPr wrap="square" lIns="0" tIns="0" rIns="0" bIns="0" rtlCol="0" anchor="ctr"/>
           <a:lstStyle/>
           <a:p>
-            <a:pPr algn="ctr" indent="0" marL="0">
+            <a:pPr marL="0" indent="0" algn="ctr">
               <a:buNone/>
             </a:pPr>
             <a:r>
@@ -3124,7 +2974,7 @@
           <a:bodyPr wrap="square" lIns="0" tIns="0" rIns="0" bIns="0" rtlCol="0" anchor="ctr"/>
           <a:lstStyle/>
           <a:p>
-            <a:pPr indent="0" marL="0">
+            <a:pPr marL="0" indent="0">
               <a:buNone/>
             </a:pPr>
             <a:r>
@@ -3161,6 +3011,13 @@
           </a:solidFill>
           <a:ln/>
         </p:spPr>
+        <p:txBody>
+          <a:bodyPr/>
+          <a:lstStyle/>
+          <a:p>
+            <a:endParaRPr lang="en-US"/>
+          </a:p>
+        </p:txBody>
       </p:sp>
       <p:sp>
         <p:nvSpPr>
@@ -3183,7 +3040,7 @@
           <a:bodyPr wrap="square" lIns="0" tIns="0" rIns="0" bIns="0" rtlCol="0" anchor="ctr"/>
           <a:lstStyle/>
           <a:p>
-            <a:pPr algn="ctr" indent="0" marL="0">
+            <a:pPr marL="0" indent="0" algn="ctr">
               <a:buNone/>
             </a:pPr>
             <a:r>
@@ -3222,7 +3079,7 @@
           <a:bodyPr wrap="square" lIns="0" tIns="0" rIns="0" bIns="0" rtlCol="0" anchor="ctr"/>
           <a:lstStyle/>
           <a:p>
-            <a:pPr indent="0" marL="0">
+            <a:pPr marL="0" indent="0">
               <a:buNone/>
             </a:pPr>
             <a:r>
@@ -3259,6 +3116,13 @@
           </a:solidFill>
           <a:ln/>
         </p:spPr>
+        <p:txBody>
+          <a:bodyPr/>
+          <a:lstStyle/>
+          <a:p>
+            <a:endParaRPr lang="en-US"/>
+          </a:p>
+        </p:txBody>
       </p:sp>
       <p:sp>
         <p:nvSpPr>
@@ -3281,7 +3145,7 @@
           <a:bodyPr wrap="square" lIns="0" tIns="0" rIns="0" bIns="0" rtlCol="0" anchor="ctr"/>
           <a:lstStyle/>
           <a:p>
-            <a:pPr algn="ctr" indent="0" marL="0">
+            <a:pPr marL="0" indent="0" algn="ctr">
               <a:buNone/>
             </a:pPr>
             <a:r>
@@ -3320,7 +3184,7 @@
           <a:bodyPr wrap="square" lIns="0" tIns="0" rIns="0" bIns="0" rtlCol="0" anchor="ctr"/>
           <a:lstStyle/>
           <a:p>
-            <a:pPr indent="0" marL="0">
+            <a:pPr marL="0" indent="0">
               <a:buNone/>
             </a:pPr>
             <a:r>
@@ -3354,6 +3218,7 @@
         <a:solidFill>
           <a:srgbClr val="F8FAFC"/>
         </a:solidFill>
+        <a:effectLst/>
       </p:bgPr>
     </p:bg>
     <p:spTree>
@@ -3391,7 +3256,7 @@
           <a:bodyPr wrap="square" lIns="0" tIns="0" rIns="0" bIns="0" rtlCol="0" anchor="ctr"/>
           <a:lstStyle/>
           <a:p>
-            <a:pPr indent="0" marL="0">
+            <a:pPr marL="0" indent="0">
               <a:buNone/>
             </a:pPr>
             <a:r>
@@ -3428,6 +3293,13 @@
           </a:solidFill>
           <a:ln/>
         </p:spPr>
+        <p:txBody>
+          <a:bodyPr/>
+          <a:lstStyle/>
+          <a:p>
+            <a:endParaRPr lang="en-US"/>
+          </a:p>
+        </p:txBody>
       </p:sp>
       <p:sp>
         <p:nvSpPr>
@@ -3450,7 +3322,7 @@
           <a:bodyPr wrap="square" lIns="0" tIns="0" rIns="0" bIns="0" rtlCol="0" anchor="ctr"/>
           <a:lstStyle/>
           <a:p>
-            <a:pPr indent="0" marL="0">
+            <a:pPr marL="0" indent="0">
               <a:buNone/>
             </a:pPr>
             <a:r>
@@ -3487,13 +3359,20 @@
           </a:solidFill>
           <a:ln/>
           <a:effectLst>
-            <a:outerShdw sx="100000" sy="100000" kx="0" ky="0" algn="bl" rotWithShape="0" blurRad="76200" dist="25400" dir="8100000">
+            <a:outerShdw blurRad="76200" dist="25400" dir="8100000" algn="bl" rotWithShape="0">
               <a:srgbClr val="000000">
                 <a:alpha val="10000"/>
               </a:srgbClr>
             </a:outerShdw>
           </a:effectLst>
         </p:spPr>
+        <p:txBody>
+          <a:bodyPr/>
+          <a:lstStyle/>
+          <a:p>
+            <a:endParaRPr lang="en-US"/>
+          </a:p>
+        </p:txBody>
       </p:sp>
       <p:sp>
         <p:nvSpPr>
@@ -3516,7 +3395,7 @@
           <a:bodyPr wrap="square" rtlCol="0" anchor="ctr"/>
           <a:lstStyle/>
           <a:p>
-            <a:pPr indent="0" marL="0">
+            <a:pPr marL="0" indent="0">
               <a:spcAft>
                 <a:spcPts val="300"/>
               </a:spcAft>
@@ -3536,7 +3415,7 @@
             <a:endParaRPr lang="en-US" sz="1500" dirty="0"/>
           </a:p>
           <a:p>
-            <a:pPr indent="0" marL="0">
+            <a:pPr marL="0" indent="0">
               <a:spcAft>
                 <a:spcPts val="300"/>
               </a:spcAft>
@@ -3556,7 +3435,7 @@
             <a:endParaRPr lang="en-US" sz="1500" dirty="0"/>
           </a:p>
           <a:p>
-            <a:pPr indent="0" marL="0">
+            <a:pPr marL="0" indent="0">
               <a:spcAft>
                 <a:spcPts val="300"/>
               </a:spcAft>
@@ -3565,7 +3444,7 @@
             <a:endParaRPr lang="en-US" sz="1500" dirty="0"/>
           </a:p>
           <a:p>
-            <a:pPr indent="0" marL="0">
+            <a:pPr marL="0" indent="0">
               <a:spcAft>
                 <a:spcPts val="300"/>
               </a:spcAft>
@@ -3585,7 +3464,7 @@
             <a:endParaRPr lang="en-US" sz="1500" dirty="0"/>
           </a:p>
           <a:p>
-            <a:pPr indent="0" marL="0">
+            <a:pPr marL="0" indent="0">
               <a:spcAft>
                 <a:spcPts val="300"/>
               </a:spcAft>
@@ -3605,7 +3484,7 @@
             <a:endParaRPr lang="en-US" sz="1500" dirty="0"/>
           </a:p>
           <a:p>
-            <a:pPr indent="0" marL="0">
+            <a:pPr marL="0" indent="0">
               <a:spcAft>
                 <a:spcPts val="300"/>
               </a:spcAft>
@@ -3614,7 +3493,7 @@
             <a:endParaRPr lang="en-US" sz="1500" dirty="0"/>
           </a:p>
           <a:p>
-            <a:pPr indent="0" marL="0">
+            <a:pPr marL="0" indent="0">
               <a:spcAft>
                 <a:spcPts val="300"/>
               </a:spcAft>
@@ -3634,7 +3513,7 @@
             <a:endParaRPr lang="en-US" sz="1500" dirty="0"/>
           </a:p>
           <a:p>
-            <a:pPr indent="0" marL="0">
+            <a:pPr marL="0" indent="0">
               <a:spcAft>
                 <a:spcPts val="300"/>
               </a:spcAft>
@@ -3654,7 +3533,7 @@
             <a:endParaRPr lang="en-US" sz="1500" dirty="0"/>
           </a:p>
           <a:p>
-            <a:pPr indent="0" marL="0">
+            <a:pPr marL="0" indent="0">
               <a:spcAft>
                 <a:spcPts val="300"/>
               </a:spcAft>
@@ -3663,7 +3542,7 @@
             <a:endParaRPr lang="en-US" sz="1500" dirty="0"/>
           </a:p>
           <a:p>
-            <a:pPr indent="0" marL="0">
+            <a:pPr marL="0" indent="0">
               <a:spcAft>
                 <a:spcPts val="300"/>
               </a:spcAft>
@@ -3703,6 +3582,13 @@
           </a:solidFill>
           <a:ln/>
         </p:spPr>
+        <p:txBody>
+          <a:bodyPr/>
+          <a:lstStyle/>
+          <a:p>
+            <a:endParaRPr lang="en-US"/>
+          </a:p>
+        </p:txBody>
       </p:sp>
       <p:sp>
         <p:nvSpPr>
@@ -3725,7 +3611,7 @@
           <a:bodyPr wrap="square" lIns="0" tIns="0" rIns="0" bIns="0" rtlCol="0" anchor="ctr"/>
           <a:lstStyle/>
           <a:p>
-            <a:pPr indent="0" marL="0">
+            <a:pPr marL="0" indent="0">
               <a:buNone/>
             </a:pPr>
             <a:r>
@@ -3759,6 +3645,7 @@
         <a:solidFill>
           <a:srgbClr val="F8FAFC"/>
         </a:solidFill>
+        <a:effectLst/>
       </p:bgPr>
     </p:bg>
     <p:spTree>
@@ -3796,7 +3683,7 @@
           <a:bodyPr wrap="square" lIns="0" tIns="0" rIns="0" bIns="0" rtlCol="0" anchor="ctr"/>
           <a:lstStyle/>
           <a:p>
-            <a:pPr indent="0" marL="0">
+            <a:pPr marL="0" indent="0">
               <a:buNone/>
             </a:pPr>
             <a:r>
@@ -3833,6 +3720,13 @@
           </a:solidFill>
           <a:ln/>
         </p:spPr>
+        <p:txBody>
+          <a:bodyPr/>
+          <a:lstStyle/>
+          <a:p>
+            <a:endParaRPr lang="en-US"/>
+          </a:p>
+        </p:txBody>
       </p:sp>
       <p:sp>
         <p:nvSpPr>
@@ -3855,7 +3749,7 @@
           <a:bodyPr wrap="square" lIns="0" tIns="0" rIns="0" bIns="0" rtlCol="0" anchor="ctr"/>
           <a:lstStyle/>
           <a:p>
-            <a:pPr indent="0" marL="0">
+            <a:pPr marL="0" indent="0">
               <a:buNone/>
             </a:pPr>
             <a:r>
@@ -3875,14 +3769,14 @@
       </p:sp>
       <p:pic>
         <p:nvPicPr>
-          <p:cNvPr id="5" name="Image 0" descr="preencoded.png">    </p:cNvPr>
+          <p:cNvPr id="5" name="Image 0" descr="preencoded.png"/>
           <p:cNvPicPr>
             <a:picLocks noChangeAspect="1"/>
           </p:cNvPicPr>
           <p:nvPr/>
         </p:nvPicPr>
         <p:blipFill>
-          <a:blip r:embed="rId1"/>
+          <a:blip r:embed="rId3"/>
           <a:stretch>
             <a:fillRect/>
           </a:stretch>
@@ -3916,13 +3810,20 @@
           </a:solidFill>
           <a:ln/>
           <a:effectLst>
-            <a:outerShdw sx="100000" sy="100000" kx="0" ky="0" algn="bl" rotWithShape="0" blurRad="76200" dist="25400" dir="8100000">
+            <a:outerShdw blurRad="76200" dist="25400" dir="8100000" algn="bl" rotWithShape="0">
               <a:srgbClr val="000000">
                 <a:alpha val="10000"/>
               </a:srgbClr>
             </a:outerShdw>
           </a:effectLst>
         </p:spPr>
+        <p:txBody>
+          <a:bodyPr/>
+          <a:lstStyle/>
+          <a:p>
+            <a:endParaRPr lang="en-US"/>
+          </a:p>
+        </p:txBody>
       </p:sp>
       <p:sp>
         <p:nvSpPr>
@@ -3945,7 +3846,7 @@
           <a:bodyPr wrap="square" rtlCol="0" anchor="ctr"/>
           <a:lstStyle/>
           <a:p>
-            <a:pPr indent="0" marL="0">
+            <a:pPr marL="0" indent="0">
               <a:spcAft>
                 <a:spcPts val="100"/>
               </a:spcAft>
@@ -3965,7 +3866,7 @@
             <a:endParaRPr lang="en-US" sz="1300" dirty="0"/>
           </a:p>
           <a:p>
-            <a:pPr indent="0" marL="0">
+            <a:pPr marL="0" indent="0">
               <a:spcAft>
                 <a:spcPts val="100"/>
               </a:spcAft>
@@ -3985,7 +3886,7 @@
             <a:endParaRPr lang="en-US" sz="1300" dirty="0"/>
           </a:p>
           <a:p>
-            <a:pPr indent="0" marL="0">
+            <a:pPr marL="0" indent="0">
               <a:spcAft>
                 <a:spcPts val="100"/>
               </a:spcAft>
@@ -4005,7 +3906,7 @@
             <a:endParaRPr lang="en-US" sz="1300" dirty="0"/>
           </a:p>
           <a:p>
-            <a:pPr indent="0" marL="0">
+            <a:pPr marL="0" indent="0">
               <a:spcAft>
                 <a:spcPts val="100"/>
               </a:spcAft>
@@ -4014,7 +3915,7 @@
             <a:endParaRPr lang="en-US" sz="1300" dirty="0"/>
           </a:p>
           <a:p>
-            <a:pPr indent="0" marL="0">
+            <a:pPr marL="0" indent="0">
               <a:spcAft>
                 <a:spcPts val="100"/>
               </a:spcAft>
@@ -4034,7 +3935,7 @@
             <a:endParaRPr lang="en-US" sz="1300" dirty="0"/>
           </a:p>
           <a:p>
-            <a:pPr indent="0" marL="0">
+            <a:pPr marL="0" indent="0">
               <a:spcAft>
                 <a:spcPts val="100"/>
               </a:spcAft>
@@ -4054,7 +3955,7 @@
             <a:endParaRPr lang="en-US" sz="1300" dirty="0"/>
           </a:p>
           <a:p>
-            <a:pPr indent="0" marL="0">
+            <a:pPr marL="0" indent="0">
               <a:spcAft>
                 <a:spcPts val="100"/>
               </a:spcAft>
@@ -4074,7 +3975,7 @@
             <a:endParaRPr lang="en-US" sz="1300" dirty="0"/>
           </a:p>
           <a:p>
-            <a:pPr indent="0" marL="0">
+            <a:pPr marL="0" indent="0">
               <a:spcAft>
                 <a:spcPts val="100"/>
               </a:spcAft>
@@ -4094,7 +3995,7 @@
             <a:endParaRPr lang="en-US" sz="1300" dirty="0"/>
           </a:p>
           <a:p>
-            <a:pPr indent="0" marL="0">
+            <a:pPr marL="0" indent="0">
               <a:spcAft>
                 <a:spcPts val="100"/>
               </a:spcAft>
@@ -4103,7 +4004,7 @@
             <a:endParaRPr lang="en-US" sz="1300" dirty="0"/>
           </a:p>
           <a:p>
-            <a:pPr indent="0" marL="0">
+            <a:pPr marL="0" indent="0">
               <a:spcAft>
                 <a:spcPts val="100"/>
               </a:spcAft>
@@ -4123,7 +4024,7 @@
             <a:endParaRPr lang="en-US" sz="1300" dirty="0"/>
           </a:p>
           <a:p>
-            <a:pPr indent="0" marL="0">
+            <a:pPr marL="0" indent="0">
               <a:spcAft>
                 <a:spcPts val="100"/>
               </a:spcAft>
@@ -4160,6 +4061,7 @@
         <a:solidFill>
           <a:srgbClr val="F8FAFC"/>
         </a:solidFill>
+        <a:effectLst/>
       </p:bgPr>
     </p:bg>
     <p:spTree>
@@ -4197,7 +4099,7 @@
           <a:bodyPr wrap="square" lIns="0" tIns="0" rIns="0" bIns="0" rtlCol="0" anchor="ctr"/>
           <a:lstStyle/>
           <a:p>
-            <a:pPr indent="0" marL="0">
+            <a:pPr marL="0" indent="0">
               <a:buNone/>
             </a:pPr>
             <a:r>
@@ -4236,6 +4138,13 @@
           </a:solidFill>
           <a:ln/>
         </p:spPr>
+        <p:txBody>
+          <a:bodyPr/>
+          <a:lstStyle/>
+          <a:p>
+            <a:endParaRPr lang="en-US"/>
+          </a:p>
+        </p:txBody>
       </p:sp>
       <p:sp>
         <p:nvSpPr>
@@ -4258,7 +4167,7 @@
           <a:bodyPr wrap="square" rtlCol="0" anchor="ctr"/>
           <a:lstStyle/>
           <a:p>
-            <a:pPr indent="0" marL="0">
+            <a:pPr marL="0" indent="0">
               <a:buNone/>
             </a:pPr>
             <a:r>
@@ -4272,9 +4181,6 @@
               </a:rPr>
               <a:t>Test 3, Problem 5:  </a:t>
             </a:r>
-            <a:pPr indent="0" marL="0">
-              <a:buNone/>
-            </a:pPr>
             <a:r>
               <a:rPr lang="en-US" sz="1400" dirty="0">
                 <a:solidFill>
@@ -4309,13 +4215,20 @@
           </a:solidFill>
           <a:ln/>
           <a:effectLst>
-            <a:outerShdw sx="100000" sy="100000" kx="0" ky="0" algn="bl" rotWithShape="0" blurRad="76200" dist="25400" dir="8100000">
+            <a:outerShdw blurRad="76200" dist="25400" dir="8100000" algn="bl" rotWithShape="0">
               <a:srgbClr val="000000">
                 <a:alpha val="10000"/>
               </a:srgbClr>
             </a:outerShdw>
           </a:effectLst>
         </p:spPr>
+        <p:txBody>
+          <a:bodyPr/>
+          <a:lstStyle/>
+          <a:p>
+            <a:endParaRPr lang="en-US"/>
+          </a:p>
+        </p:txBody>
       </p:sp>
       <p:sp>
         <p:nvSpPr>
@@ -4336,6 +4249,13 @@
           </a:solidFill>
           <a:ln/>
         </p:spPr>
+        <p:txBody>
+          <a:bodyPr/>
+          <a:lstStyle/>
+          <a:p>
+            <a:endParaRPr lang="en-US"/>
+          </a:p>
+        </p:txBody>
       </p:sp>
       <p:sp>
         <p:nvSpPr>
@@ -4358,7 +4278,7 @@
           <a:bodyPr wrap="square" lIns="0" tIns="0" rIns="0" bIns="0" rtlCol="0" anchor="ctr"/>
           <a:lstStyle/>
           <a:p>
-            <a:pPr indent="0" marL="0">
+            <a:pPr marL="0" indent="0">
               <a:buNone/>
             </a:pPr>
             <a:r>
@@ -4397,7 +4317,7 @@
           <a:bodyPr wrap="square" rtlCol="0" anchor="ctr"/>
           <a:lstStyle/>
           <a:p>
-            <a:pPr indent="0" marL="0">
+            <a:pPr marL="0" indent="0">
               <a:spcAft>
                 <a:spcPts val="200"/>
               </a:spcAft>
@@ -4417,7 +4337,7 @@
             <a:endParaRPr lang="en-US" sz="1400" dirty="0"/>
           </a:p>
           <a:p>
-            <a:pPr indent="0" marL="0">
+            <a:pPr marL="0" indent="0">
               <a:spcAft>
                 <a:spcPts val="200"/>
               </a:spcAft>
@@ -4437,7 +4357,7 @@
             <a:endParaRPr lang="en-US" sz="1400" dirty="0"/>
           </a:p>
           <a:p>
-            <a:pPr indent="0" marL="0">
+            <a:pPr marL="0" indent="0">
               <a:spcAft>
                 <a:spcPts val="200"/>
               </a:spcAft>
@@ -4446,7 +4366,7 @@
             <a:endParaRPr lang="en-US" sz="1400" dirty="0"/>
           </a:p>
           <a:p>
-            <a:pPr indent="0" marL="0">
+            <a:pPr marL="0" indent="0">
               <a:spcAft>
                 <a:spcPts val="200"/>
               </a:spcAft>
@@ -4466,7 +4386,7 @@
             <a:endParaRPr lang="en-US" sz="1400" dirty="0"/>
           </a:p>
           <a:p>
-            <a:pPr indent="0" marL="0">
+            <a:pPr marL="0" indent="0">
               <a:spcAft>
                 <a:spcPts val="200"/>
               </a:spcAft>
@@ -4486,7 +4406,7 @@
             <a:endParaRPr lang="en-US" sz="1400" dirty="0"/>
           </a:p>
           <a:p>
-            <a:pPr indent="0" marL="0">
+            <a:pPr marL="0" indent="0">
               <a:spcAft>
                 <a:spcPts val="200"/>
               </a:spcAft>
@@ -4495,7 +4415,7 @@
             <a:endParaRPr lang="en-US" sz="1400" dirty="0"/>
           </a:p>
           <a:p>
-            <a:pPr indent="0" marL="0">
+            <a:pPr marL="0" indent="0">
               <a:spcAft>
                 <a:spcPts val="200"/>
               </a:spcAft>
@@ -4515,7 +4435,7 @@
             <a:endParaRPr lang="en-US" sz="1400" dirty="0"/>
           </a:p>
           <a:p>
-            <a:pPr indent="0" marL="0">
+            <a:pPr marL="0" indent="0">
               <a:spcAft>
                 <a:spcPts val="200"/>
               </a:spcAft>
@@ -4555,13 +4475,20 @@
           </a:solidFill>
           <a:ln/>
           <a:effectLst>
-            <a:outerShdw sx="100000" sy="100000" kx="0" ky="0" algn="bl" rotWithShape="0" blurRad="76200" dist="25400" dir="8100000">
+            <a:outerShdw blurRad="76200" dist="25400" dir="8100000" algn="bl" rotWithShape="0">
               <a:srgbClr val="000000">
                 <a:alpha val="10000"/>
               </a:srgbClr>
             </a:outerShdw>
           </a:effectLst>
         </p:spPr>
+        <p:txBody>
+          <a:bodyPr/>
+          <a:lstStyle/>
+          <a:p>
+            <a:endParaRPr lang="en-US"/>
+          </a:p>
+        </p:txBody>
       </p:sp>
       <p:sp>
         <p:nvSpPr>
@@ -4582,6 +4509,13 @@
           </a:solidFill>
           <a:ln/>
         </p:spPr>
+        <p:txBody>
+          <a:bodyPr/>
+          <a:lstStyle/>
+          <a:p>
+            <a:endParaRPr lang="en-US"/>
+          </a:p>
+        </p:txBody>
       </p:sp>
       <p:sp>
         <p:nvSpPr>
@@ -4604,7 +4538,7 @@
           <a:bodyPr wrap="square" lIns="0" tIns="0" rIns="0" bIns="0" rtlCol="0" anchor="ctr"/>
           <a:lstStyle/>
           <a:p>
-            <a:pPr indent="0" marL="0">
+            <a:pPr marL="0" indent="0">
               <a:buNone/>
             </a:pPr>
             <a:r>
@@ -4643,7 +4577,7 @@
           <a:bodyPr wrap="square" rtlCol="0" anchor="ctr"/>
           <a:lstStyle/>
           <a:p>
-            <a:pPr indent="0" marL="0">
+            <a:pPr marL="0" indent="0">
               <a:spcAft>
                 <a:spcPts val="200"/>
               </a:spcAft>
@@ -4663,7 +4597,7 @@
             <a:endParaRPr lang="en-US" sz="1400" dirty="0"/>
           </a:p>
           <a:p>
-            <a:pPr indent="0" marL="0">
+            <a:pPr marL="0" indent="0">
               <a:spcAft>
                 <a:spcPts val="200"/>
               </a:spcAft>
@@ -4683,7 +4617,7 @@
             <a:endParaRPr lang="en-US" sz="1400" dirty="0"/>
           </a:p>
           <a:p>
-            <a:pPr indent="0" marL="0">
+            <a:pPr marL="0" indent="0">
               <a:spcAft>
                 <a:spcPts val="200"/>
               </a:spcAft>
@@ -4692,7 +4626,7 @@
             <a:endParaRPr lang="en-US" sz="1400" dirty="0"/>
           </a:p>
           <a:p>
-            <a:pPr indent="0" marL="0">
+            <a:pPr marL="0" indent="0">
               <a:spcAft>
                 <a:spcPts val="200"/>
               </a:spcAft>
@@ -4712,7 +4646,7 @@
             <a:endParaRPr lang="en-US" sz="1400" dirty="0"/>
           </a:p>
           <a:p>
-            <a:pPr indent="0" marL="0">
+            <a:pPr marL="0" indent="0">
               <a:spcAft>
                 <a:spcPts val="200"/>
               </a:spcAft>
@@ -4732,7 +4666,7 @@
             <a:endParaRPr lang="en-US" sz="1400" dirty="0"/>
           </a:p>
           <a:p>
-            <a:pPr indent="0" marL="0">
+            <a:pPr marL="0" indent="0">
               <a:spcAft>
                 <a:spcPts val="200"/>
               </a:spcAft>
@@ -4741,7 +4675,7 @@
             <a:endParaRPr lang="en-US" sz="1400" dirty="0"/>
           </a:p>
           <a:p>
-            <a:pPr indent="0" marL="0">
+            <a:pPr marL="0" indent="0">
               <a:spcAft>
                 <a:spcPts val="200"/>
               </a:spcAft>
@@ -4761,7 +4695,7 @@
             <a:endParaRPr lang="en-US" sz="1400" dirty="0"/>
           </a:p>
           <a:p>
-            <a:pPr indent="0" marL="0">
+            <a:pPr marL="0" indent="0">
               <a:spcAft>
                 <a:spcPts val="200"/>
               </a:spcAft>
@@ -4798,6 +4732,7 @@
         <a:solidFill>
           <a:srgbClr val="F8FAFC"/>
         </a:solidFill>
+        <a:effectLst/>
       </p:bgPr>
     </p:bg>
     <p:spTree>
@@ -4835,7 +4770,7 @@
           <a:bodyPr wrap="square" lIns="0" tIns="0" rIns="0" bIns="0" rtlCol="0" anchor="ctr"/>
           <a:lstStyle/>
           <a:p>
-            <a:pPr indent="0" marL="0">
+            <a:pPr marL="0" indent="0">
               <a:buNone/>
             </a:pPr>
             <a:r>
@@ -4874,6 +4809,13 @@
           </a:solidFill>
           <a:ln/>
         </p:spPr>
+        <p:txBody>
+          <a:bodyPr/>
+          <a:lstStyle/>
+          <a:p>
+            <a:endParaRPr lang="en-US"/>
+          </a:p>
+        </p:txBody>
       </p:sp>
       <p:sp>
         <p:nvSpPr>
@@ -4896,7 +4838,7 @@
           <a:bodyPr wrap="square" rtlCol="0" anchor="ctr"/>
           <a:lstStyle/>
           <a:p>
-            <a:pPr indent="0" marL="0">
+            <a:pPr marL="0" indent="0">
               <a:buNone/>
             </a:pPr>
             <a:r>
@@ -4910,9 +4852,6 @@
               </a:rPr>
               <a:t>Test 3, Problem 6:  </a:t>
             </a:r>
-            <a:pPr indent="0" marL="0">
-              <a:buNone/>
-            </a:pPr>
             <a:r>
               <a:rPr lang="en-US" sz="1400" dirty="0">
                 <a:solidFill>
@@ -4947,13 +4886,20 @@
           </a:solidFill>
           <a:ln/>
           <a:effectLst>
-            <a:outerShdw sx="100000" sy="100000" kx="0" ky="0" algn="bl" rotWithShape="0" blurRad="76200" dist="25400" dir="8100000">
+            <a:outerShdw blurRad="76200" dist="25400" dir="8100000" algn="bl" rotWithShape="0">
               <a:srgbClr val="000000">
                 <a:alpha val="10000"/>
               </a:srgbClr>
             </a:outerShdw>
           </a:effectLst>
         </p:spPr>
+        <p:txBody>
+          <a:bodyPr/>
+          <a:lstStyle/>
+          <a:p>
+            <a:endParaRPr lang="en-US"/>
+          </a:p>
+        </p:txBody>
       </p:sp>
       <p:sp>
         <p:nvSpPr>
@@ -4976,7 +4922,7 @@
           <a:bodyPr wrap="square" rtlCol="0" anchor="ctr"/>
           <a:lstStyle/>
           <a:p>
-            <a:pPr indent="0" marL="0">
+            <a:pPr marL="0" indent="0">
               <a:spcAft>
                 <a:spcPts val="200"/>
               </a:spcAft>
@@ -4996,7 +4942,7 @@
             <a:endParaRPr lang="en-US" sz="1500" dirty="0"/>
           </a:p>
           <a:p>
-            <a:pPr indent="0" marL="0">
+            <a:pPr marL="0" indent="0">
               <a:spcAft>
                 <a:spcPts val="200"/>
               </a:spcAft>
@@ -5016,7 +4962,7 @@
             <a:endParaRPr lang="en-US" sz="1500" dirty="0"/>
           </a:p>
           <a:p>
-            <a:pPr indent="0" marL="0">
+            <a:pPr marL="0" indent="0">
               <a:spcAft>
                 <a:spcPts val="200"/>
               </a:spcAft>
@@ -5036,7 +4982,7 @@
             <a:endParaRPr lang="en-US" sz="1500" dirty="0"/>
           </a:p>
           <a:p>
-            <a:pPr indent="0" marL="0">
+            <a:pPr marL="0" indent="0">
               <a:spcAft>
                 <a:spcPts val="200"/>
               </a:spcAft>
@@ -5045,7 +4991,7 @@
             <a:endParaRPr lang="en-US" sz="1500" dirty="0"/>
           </a:p>
           <a:p>
-            <a:pPr indent="0" marL="0">
+            <a:pPr marL="0" indent="0">
               <a:spcAft>
                 <a:spcPts val="200"/>
               </a:spcAft>
@@ -5065,7 +5011,7 @@
             <a:endParaRPr lang="en-US" sz="1500" dirty="0"/>
           </a:p>
           <a:p>
-            <a:pPr indent="0" marL="0">
+            <a:pPr marL="0" indent="0">
               <a:spcAft>
                 <a:spcPts val="200"/>
               </a:spcAft>
@@ -5085,7 +5031,7 @@
             <a:endParaRPr lang="en-US" sz="1500" dirty="0"/>
           </a:p>
           <a:p>
-            <a:pPr indent="0" marL="0">
+            <a:pPr marL="0" indent="0">
               <a:spcAft>
                 <a:spcPts val="200"/>
               </a:spcAft>
@@ -5094,7 +5040,7 @@
             <a:endParaRPr lang="en-US" sz="1500" dirty="0"/>
           </a:p>
           <a:p>
-            <a:pPr indent="0" marL="0">
+            <a:pPr marL="0" indent="0">
               <a:spcAft>
                 <a:spcPts val="200"/>
               </a:spcAft>
@@ -5114,7 +5060,7 @@
             <a:endParaRPr lang="en-US" sz="1500" dirty="0"/>
           </a:p>
           <a:p>
-            <a:pPr indent="0" marL="0">
+            <a:pPr marL="0" indent="0">
               <a:spcAft>
                 <a:spcPts val="200"/>
               </a:spcAft>
@@ -5134,7 +5080,7 @@
             <a:endParaRPr lang="en-US" sz="1500" dirty="0"/>
           </a:p>
           <a:p>
-            <a:pPr indent="0" marL="0">
+            <a:pPr marL="0" indent="0">
               <a:spcAft>
                 <a:spcPts val="200"/>
               </a:spcAft>
@@ -5143,7 +5089,7 @@
             <a:endParaRPr lang="en-US" sz="1500" dirty="0"/>
           </a:p>
           <a:p>
-            <a:pPr indent="0" marL="0">
+            <a:pPr marL="0" indent="0">
               <a:spcAft>
                 <a:spcPts val="200"/>
               </a:spcAft>
@@ -5180,6 +5126,7 @@
         <a:solidFill>
           <a:srgbClr val="F8FAFC"/>
         </a:solidFill>
+        <a:effectLst/>
       </p:bgPr>
     </p:bg>
     <p:spTree>
@@ -5217,7 +5164,7 @@
           <a:bodyPr wrap="square" lIns="0" tIns="0" rIns="0" bIns="0" rtlCol="0" anchor="ctr"/>
           <a:lstStyle/>
           <a:p>
-            <a:pPr indent="0" marL="0">
+            <a:pPr marL="0" indent="0">
               <a:buNone/>
             </a:pPr>
             <a:r>
@@ -5256,6 +5203,13 @@
           </a:solidFill>
           <a:ln/>
         </p:spPr>
+        <p:txBody>
+          <a:bodyPr/>
+          <a:lstStyle/>
+          <a:p>
+            <a:endParaRPr lang="en-US"/>
+          </a:p>
+        </p:txBody>
       </p:sp>
       <p:sp>
         <p:nvSpPr>
@@ -5278,7 +5232,7 @@
           <a:bodyPr wrap="square" rtlCol="0" anchor="ctr"/>
           <a:lstStyle/>
           <a:p>
-            <a:pPr indent="0" marL="0">
+            <a:pPr marL="0" indent="0">
               <a:buNone/>
             </a:pPr>
             <a:r>
@@ -5292,9 +5246,6 @@
               </a:rPr>
               <a:t>Test 3, Problem 8:  </a:t>
             </a:r>
-            <a:pPr indent="0" marL="0">
-              <a:buNone/>
-            </a:pPr>
             <a:r>
               <a:rPr lang="en-US" sz="1400" dirty="0">
                 <a:solidFill>
@@ -5329,13 +5280,20 @@
           </a:solidFill>
           <a:ln/>
           <a:effectLst>
-            <a:outerShdw sx="100000" sy="100000" kx="0" ky="0" algn="bl" rotWithShape="0" blurRad="76200" dist="25400" dir="8100000">
+            <a:outerShdw blurRad="76200" dist="25400" dir="8100000" algn="bl" rotWithShape="0">
               <a:srgbClr val="000000">
                 <a:alpha val="10000"/>
               </a:srgbClr>
             </a:outerShdw>
           </a:effectLst>
         </p:spPr>
+        <p:txBody>
+          <a:bodyPr/>
+          <a:lstStyle/>
+          <a:p>
+            <a:endParaRPr lang="en-US"/>
+          </a:p>
+        </p:txBody>
       </p:sp>
       <p:sp>
         <p:nvSpPr>
@@ -5358,7 +5316,7 @@
           <a:bodyPr wrap="square" rtlCol="0" anchor="ctr"/>
           <a:lstStyle/>
           <a:p>
-            <a:pPr indent="0" marL="0">
+            <a:pPr marL="0" indent="0">
               <a:spcAft>
                 <a:spcPts val="300"/>
               </a:spcAft>
@@ -5378,7 +5336,7 @@
             <a:endParaRPr lang="en-US" sz="1500" dirty="0"/>
           </a:p>
           <a:p>
-            <a:pPr indent="0" marL="0">
+            <a:pPr marL="0" indent="0">
               <a:spcAft>
                 <a:spcPts val="300"/>
               </a:spcAft>
@@ -5387,7 +5345,7 @@
             <a:endParaRPr lang="en-US" sz="1500" dirty="0"/>
           </a:p>
           <a:p>
-            <a:pPr indent="0" marL="0">
+            <a:pPr marL="0" indent="0">
               <a:spcAft>
                 <a:spcPts val="300"/>
               </a:spcAft>
@@ -5407,7 +5365,7 @@
             <a:endParaRPr lang="en-US" sz="1500" dirty="0"/>
           </a:p>
           <a:p>
-            <a:pPr indent="0" marL="0">
+            <a:pPr marL="0" indent="0">
               <a:spcAft>
                 <a:spcPts val="300"/>
               </a:spcAft>
@@ -5427,7 +5385,7 @@
             <a:endParaRPr lang="en-US" sz="1500" dirty="0"/>
           </a:p>
           <a:p>
-            <a:pPr indent="0" marL="0">
+            <a:pPr marL="0" indent="0">
               <a:spcAft>
                 <a:spcPts val="300"/>
               </a:spcAft>
@@ -5447,7 +5405,7 @@
             <a:endParaRPr lang="en-US" sz="1500" dirty="0"/>
           </a:p>
           <a:p>
-            <a:pPr indent="0" marL="0">
+            <a:pPr marL="0" indent="0">
               <a:spcAft>
                 <a:spcPts val="300"/>
               </a:spcAft>
@@ -5467,7 +5425,7 @@
             <a:endParaRPr lang="en-US" sz="1500" dirty="0"/>
           </a:p>
           <a:p>
-            <a:pPr indent="0" marL="0">
+            <a:pPr marL="0" indent="0">
               <a:spcAft>
                 <a:spcPts val="300"/>
               </a:spcAft>
@@ -5487,7 +5445,7 @@
             <a:endParaRPr lang="en-US" sz="1500" dirty="0"/>
           </a:p>
           <a:p>
-            <a:pPr indent="0" marL="0">
+            <a:pPr marL="0" indent="0">
               <a:spcAft>
                 <a:spcPts val="300"/>
               </a:spcAft>
@@ -5507,7 +5465,7 @@
             <a:endParaRPr lang="en-US" sz="1500" dirty="0"/>
           </a:p>
           <a:p>
-            <a:pPr indent="0" marL="0">
+            <a:pPr marL="0" indent="0">
               <a:spcAft>
                 <a:spcPts val="300"/>
               </a:spcAft>
@@ -5516,7 +5474,7 @@
             <a:endParaRPr lang="en-US" sz="1500" dirty="0"/>
           </a:p>
           <a:p>
-            <a:pPr indent="0" marL="0">
+            <a:pPr marL="0" indent="0">
               <a:spcAft>
                 <a:spcPts val="300"/>
               </a:spcAft>
@@ -5553,6 +5511,7 @@
         <a:solidFill>
           <a:srgbClr val="0F2B46"/>
         </a:solidFill>
+        <a:effectLst/>
       </p:bgPr>
     </p:bg>
     <p:spTree>
@@ -5590,6 +5549,13 @@
           </a:solidFill>
           <a:ln/>
         </p:spPr>
+        <p:txBody>
+          <a:bodyPr/>
+          <a:lstStyle/>
+          <a:p>
+            <a:endParaRPr lang="en-US"/>
+          </a:p>
+        </p:txBody>
       </p:sp>
       <p:sp>
         <p:nvSpPr>
@@ -5612,6 +5578,13 @@
           </a:solidFill>
           <a:ln/>
         </p:spPr>
+        <p:txBody>
+          <a:bodyPr/>
+          <a:lstStyle/>
+          <a:p>
+            <a:endParaRPr lang="en-US"/>
+          </a:p>
+        </p:txBody>
       </p:sp>
       <p:sp>
         <p:nvSpPr>
@@ -5634,7 +5607,7 @@
           <a:bodyPr wrap="square" lIns="0" tIns="0" rIns="0" bIns="0" rtlCol="0" anchor="ctr"/>
           <a:lstStyle/>
           <a:p>
-            <a:pPr indent="0" marL="0">
+            <a:pPr marL="0" indent="0">
               <a:buNone/>
             </a:pPr>
             <a:r>
@@ -5673,7 +5646,7 @@
           <a:bodyPr wrap="square" lIns="0" tIns="0" rIns="0" bIns="0" rtlCol="0" anchor="ctr"/>
           <a:lstStyle/>
           <a:p>
-            <a:pPr indent="0" marL="0">
+            <a:pPr marL="0" indent="0">
               <a:buNone/>
             </a:pPr>
             <a:r>
@@ -5712,6 +5685,13 @@
           </a:solidFill>
           <a:ln/>
         </p:spPr>
+        <p:txBody>
+          <a:bodyPr/>
+          <a:lstStyle/>
+          <a:p>
+            <a:endParaRPr lang="en-US"/>
+          </a:p>
+        </p:txBody>
       </p:sp>
       <p:sp>
         <p:nvSpPr>
@@ -5734,7 +5714,7 @@
           <a:bodyPr wrap="square" lIns="0" tIns="0" rIns="0" bIns="0" rtlCol="0" anchor="ctr"/>
           <a:lstStyle/>
           <a:p>
-            <a:pPr indent="0" marL="0">
+            <a:pPr marL="0" indent="0">
               <a:buNone/>
             </a:pPr>
             <a:r>
@@ -5773,7 +5753,7 @@
           <a:bodyPr wrap="square" lIns="0" tIns="0" rIns="0" bIns="0" rtlCol="0" anchor="ctr"/>
           <a:lstStyle/>
           <a:p>
-            <a:pPr indent="0" marL="0">
+            <a:pPr marL="0" indent="0">
               <a:buNone/>
             </a:pPr>
             <a:r>
@@ -5812,6 +5792,13 @@
           </a:solidFill>
           <a:ln/>
         </p:spPr>
+        <p:txBody>
+          <a:bodyPr/>
+          <a:lstStyle/>
+          <a:p>
+            <a:endParaRPr lang="en-US"/>
+          </a:p>
+        </p:txBody>
       </p:sp>
       <p:sp>
         <p:nvSpPr>
@@ -5834,7 +5821,7 @@
           <a:bodyPr wrap="square" lIns="0" tIns="0" rIns="0" bIns="0" rtlCol="0" anchor="ctr"/>
           <a:lstStyle/>
           <a:p>
-            <a:pPr indent="0" marL="0">
+            <a:pPr marL="0" indent="0">
               <a:buNone/>
             </a:pPr>
             <a:r>
@@ -5873,7 +5860,7 @@
           <a:bodyPr wrap="square" lIns="0" tIns="0" rIns="0" bIns="0" rtlCol="0" anchor="ctr"/>
           <a:lstStyle/>
           <a:p>
-            <a:pPr indent="0" marL="0">
+            <a:pPr marL="0" indent="0">
               <a:buNone/>
             </a:pPr>
             <a:r>
@@ -5912,6 +5899,13 @@
           </a:solidFill>
           <a:ln/>
         </p:spPr>
+        <p:txBody>
+          <a:bodyPr/>
+          <a:lstStyle/>
+          <a:p>
+            <a:endParaRPr lang="en-US"/>
+          </a:p>
+        </p:txBody>
       </p:sp>
       <p:sp>
         <p:nvSpPr>
@@ -5934,7 +5928,7 @@
           <a:bodyPr wrap="square" lIns="0" tIns="0" rIns="0" bIns="0" rtlCol="0" anchor="ctr"/>
           <a:lstStyle/>
           <a:p>
-            <a:pPr indent="0" marL="0">
+            <a:pPr marL="0" indent="0">
               <a:buNone/>
             </a:pPr>
             <a:r>
@@ -5973,7 +5967,7 @@
           <a:bodyPr wrap="square" lIns="0" tIns="0" rIns="0" bIns="0" rtlCol="0" anchor="ctr"/>
           <a:lstStyle/>
           <a:p>
-            <a:pPr indent="0" marL="0">
+            <a:pPr marL="0" indent="0">
               <a:buNone/>
             </a:pPr>
             <a:r>
@@ -6012,7 +6006,7 @@
           <a:bodyPr wrap="square" lIns="0" tIns="0" rIns="0" bIns="0" rtlCol="0" anchor="ctr"/>
           <a:lstStyle/>
           <a:p>
-            <a:pPr indent="0" marL="0">
+            <a:pPr marL="0" indent="0">
               <a:buNone/>
             </a:pPr>
             <a:r>
@@ -6046,6 +6040,7 @@
         <a:solidFill>
           <a:srgbClr val="0F2B46"/>
         </a:solidFill>
+        <a:effectLst/>
       </p:bgPr>
     </p:bg>
     <p:spTree>
@@ -6081,6 +6076,13 @@
           </a:solidFill>
           <a:ln/>
         </p:spPr>
+        <p:txBody>
+          <a:bodyPr/>
+          <a:lstStyle/>
+          <a:p>
+            <a:endParaRPr lang="en-US"/>
+          </a:p>
+        </p:txBody>
       </p:sp>
       <p:sp>
         <p:nvSpPr>
@@ -6103,7 +6105,7 @@
           <a:bodyPr wrap="square" lIns="0" tIns="0" rIns="0" bIns="0" rtlCol="0" anchor="ctr"/>
           <a:lstStyle/>
           <a:p>
-            <a:pPr indent="0" marL="0">
+            <a:pPr marL="0" indent="0">
               <a:buNone/>
             </a:pPr>
             <a:r>
@@ -6142,7 +6144,7 @@
           <a:bodyPr wrap="square" lIns="0" tIns="0" rIns="0" bIns="0" rtlCol="0" anchor="ctr"/>
           <a:lstStyle/>
           <a:p>
-            <a:pPr indent="0" marL="0">
+            <a:pPr marL="0" indent="0">
               <a:buNone/>
             </a:pPr>
             <a:r>
@@ -6181,7 +6183,7 @@
           <a:bodyPr wrap="square" lIns="0" tIns="0" rIns="0" bIns="0" rtlCol="0" anchor="ctr"/>
           <a:lstStyle/>
           <a:p>
-            <a:pPr indent="0" marL="0">
+            <a:pPr marL="0" indent="0">
               <a:buNone/>
             </a:pPr>
             <a:r>
@@ -6215,6 +6217,7 @@
         <a:solidFill>
           <a:srgbClr val="F8FAFC"/>
         </a:solidFill>
+        <a:effectLst/>
       </p:bgPr>
     </p:bg>
     <p:spTree>
@@ -6252,7 +6255,7 @@
           <a:bodyPr wrap="square" lIns="0" tIns="0" rIns="0" bIns="0" rtlCol="0" anchor="ctr"/>
           <a:lstStyle/>
           <a:p>
-            <a:pPr indent="0" marL="0">
+            <a:pPr marL="0" indent="0">
               <a:buNone/>
             </a:pPr>
             <a:r>
@@ -6289,6 +6292,13 @@
           </a:solidFill>
           <a:ln/>
         </p:spPr>
+        <p:txBody>
+          <a:bodyPr/>
+          <a:lstStyle/>
+          <a:p>
+            <a:endParaRPr lang="en-US"/>
+          </a:p>
+        </p:txBody>
       </p:sp>
       <p:sp>
         <p:nvSpPr>
@@ -6311,7 +6321,7 @@
           <a:bodyPr wrap="square" lIns="0" tIns="0" rIns="0" bIns="0" rtlCol="0" anchor="ctr"/>
           <a:lstStyle/>
           <a:p>
-            <a:pPr algn="ctr" indent="0" marL="0">
+            <a:pPr marL="0" indent="0" algn="ctr">
               <a:buNone/>
             </a:pPr>
             <a:r>
@@ -6350,7 +6360,7 @@
           <a:bodyPr wrap="square" lIns="0" tIns="0" rIns="0" bIns="0" rtlCol="0" anchor="ctr"/>
           <a:lstStyle/>
           <a:p>
-            <a:pPr indent="0" marL="0">
+            <a:pPr marL="0" indent="0">
               <a:buNone/>
             </a:pPr>
             <a:r>
@@ -6387,6 +6397,13 @@
           </a:solidFill>
           <a:ln/>
         </p:spPr>
+        <p:txBody>
+          <a:bodyPr/>
+          <a:lstStyle/>
+          <a:p>
+            <a:endParaRPr lang="en-US"/>
+          </a:p>
+        </p:txBody>
       </p:sp>
       <p:sp>
         <p:nvSpPr>
@@ -6409,7 +6426,7 @@
           <a:bodyPr wrap="square" lIns="0" tIns="0" rIns="0" bIns="0" rtlCol="0" anchor="ctr"/>
           <a:lstStyle/>
           <a:p>
-            <a:pPr algn="ctr" indent="0" marL="0">
+            <a:pPr marL="0" indent="0" algn="ctr">
               <a:buNone/>
             </a:pPr>
             <a:r>
@@ -6448,7 +6465,7 @@
           <a:bodyPr wrap="square" lIns="0" tIns="0" rIns="0" bIns="0" rtlCol="0" anchor="ctr"/>
           <a:lstStyle/>
           <a:p>
-            <a:pPr indent="0" marL="0">
+            <a:pPr marL="0" indent="0">
               <a:buNone/>
             </a:pPr>
             <a:r>
@@ -6485,6 +6502,13 @@
           </a:solidFill>
           <a:ln/>
         </p:spPr>
+        <p:txBody>
+          <a:bodyPr/>
+          <a:lstStyle/>
+          <a:p>
+            <a:endParaRPr lang="en-US"/>
+          </a:p>
+        </p:txBody>
       </p:sp>
       <p:sp>
         <p:nvSpPr>
@@ -6507,7 +6531,7 @@
           <a:bodyPr wrap="square" lIns="0" tIns="0" rIns="0" bIns="0" rtlCol="0" anchor="ctr"/>
           <a:lstStyle/>
           <a:p>
-            <a:pPr algn="ctr" indent="0" marL="0">
+            <a:pPr marL="0" indent="0" algn="ctr">
               <a:buNone/>
             </a:pPr>
             <a:r>
@@ -6546,7 +6570,7 @@
           <a:bodyPr wrap="square" lIns="0" tIns="0" rIns="0" bIns="0" rtlCol="0" anchor="ctr"/>
           <a:lstStyle/>
           <a:p>
-            <a:pPr indent="0" marL="0">
+            <a:pPr marL="0" indent="0">
               <a:buNone/>
             </a:pPr>
             <a:r>
@@ -6583,6 +6607,13 @@
           </a:solidFill>
           <a:ln/>
         </p:spPr>
+        <p:txBody>
+          <a:bodyPr/>
+          <a:lstStyle/>
+          <a:p>
+            <a:endParaRPr lang="en-US"/>
+          </a:p>
+        </p:txBody>
       </p:sp>
       <p:sp>
         <p:nvSpPr>
@@ -6605,7 +6636,7 @@
           <a:bodyPr wrap="square" lIns="0" tIns="0" rIns="0" bIns="0" rtlCol="0" anchor="ctr"/>
           <a:lstStyle/>
           <a:p>
-            <a:pPr algn="ctr" indent="0" marL="0">
+            <a:pPr marL="0" indent="0" algn="ctr">
               <a:buNone/>
             </a:pPr>
             <a:r>
@@ -6644,7 +6675,7 @@
           <a:bodyPr wrap="square" lIns="0" tIns="0" rIns="0" bIns="0" rtlCol="0" anchor="ctr"/>
           <a:lstStyle/>
           <a:p>
-            <a:pPr indent="0" marL="0">
+            <a:pPr marL="0" indent="0">
               <a:buNone/>
             </a:pPr>
             <a:r>
@@ -6681,6 +6712,13 @@
           </a:solidFill>
           <a:ln/>
         </p:spPr>
+        <p:txBody>
+          <a:bodyPr/>
+          <a:lstStyle/>
+          <a:p>
+            <a:endParaRPr lang="en-US"/>
+          </a:p>
+        </p:txBody>
       </p:sp>
       <p:sp>
         <p:nvSpPr>
@@ -6703,7 +6741,7 @@
           <a:bodyPr wrap="square" lIns="0" tIns="0" rIns="0" bIns="0" rtlCol="0" anchor="ctr"/>
           <a:lstStyle/>
           <a:p>
-            <a:pPr algn="ctr" indent="0" marL="0">
+            <a:pPr marL="0" indent="0" algn="ctr">
               <a:buNone/>
             </a:pPr>
             <a:r>
@@ -6742,7 +6780,7 @@
           <a:bodyPr wrap="square" lIns="0" tIns="0" rIns="0" bIns="0" rtlCol="0" anchor="ctr"/>
           <a:lstStyle/>
           <a:p>
-            <a:pPr indent="0" marL="0">
+            <a:pPr marL="0" indent="0">
               <a:buNone/>
             </a:pPr>
             <a:r>
@@ -6779,6 +6817,13 @@
           </a:solidFill>
           <a:ln/>
         </p:spPr>
+        <p:txBody>
+          <a:bodyPr/>
+          <a:lstStyle/>
+          <a:p>
+            <a:endParaRPr lang="en-US"/>
+          </a:p>
+        </p:txBody>
       </p:sp>
       <p:sp>
         <p:nvSpPr>
@@ -6801,7 +6846,7 @@
           <a:bodyPr wrap="square" lIns="0" tIns="0" rIns="0" bIns="0" rtlCol="0" anchor="ctr"/>
           <a:lstStyle/>
           <a:p>
-            <a:pPr algn="ctr" indent="0" marL="0">
+            <a:pPr marL="0" indent="0" algn="ctr">
               <a:buNone/>
             </a:pPr>
             <a:r>
@@ -6840,7 +6885,7 @@
           <a:bodyPr wrap="square" lIns="0" tIns="0" rIns="0" bIns="0" rtlCol="0" anchor="ctr"/>
           <a:lstStyle/>
           <a:p>
-            <a:pPr indent="0" marL="0">
+            <a:pPr marL="0" indent="0">
               <a:buNone/>
             </a:pPr>
             <a:r>
@@ -6877,6 +6922,13 @@
           </a:solidFill>
           <a:ln/>
         </p:spPr>
+        <p:txBody>
+          <a:bodyPr/>
+          <a:lstStyle/>
+          <a:p>
+            <a:endParaRPr lang="en-US"/>
+          </a:p>
+        </p:txBody>
       </p:sp>
       <p:sp>
         <p:nvSpPr>
@@ -6899,7 +6951,7 @@
           <a:bodyPr wrap="square" lIns="0" tIns="0" rIns="0" bIns="0" rtlCol="0" anchor="ctr"/>
           <a:lstStyle/>
           <a:p>
-            <a:pPr algn="ctr" indent="0" marL="0">
+            <a:pPr marL="0" indent="0" algn="ctr">
               <a:buNone/>
             </a:pPr>
             <a:r>
@@ -6938,7 +6990,7 @@
           <a:bodyPr wrap="square" lIns="0" tIns="0" rIns="0" bIns="0" rtlCol="0" anchor="ctr"/>
           <a:lstStyle/>
           <a:p>
-            <a:pPr indent="0" marL="0">
+            <a:pPr marL="0" indent="0">
               <a:buNone/>
             </a:pPr>
             <a:r>
@@ -6964,7 +7016,7 @@
         </p:nvSpPr>
         <p:spPr>
           <a:xfrm>
-            <a:off x="457200" y="4572000"/>
+            <a:off x="457200" y="4653715"/>
             <a:ext cx="8229600" cy="411480"/>
           </a:xfrm>
           <a:prstGeom prst="rect">
@@ -6975,6 +7027,13 @@
           </a:solidFill>
           <a:ln/>
         </p:spPr>
+        <p:txBody>
+          <a:bodyPr/>
+          <a:lstStyle/>
+          <a:p>
+            <a:endParaRPr lang="en-US"/>
+          </a:p>
+        </p:txBody>
       </p:sp>
       <p:sp>
         <p:nvSpPr>
@@ -6997,7 +7056,7 @@
           <a:bodyPr wrap="square" lIns="0" tIns="0" rIns="0" bIns="0" rtlCol="0" anchor="ctr"/>
           <a:lstStyle/>
           <a:p>
-            <a:pPr indent="0" marL="0">
+            <a:pPr marL="0" indent="0">
               <a:buNone/>
             </a:pPr>
             <a:r>
@@ -7031,6 +7090,7 @@
         <a:solidFill>
           <a:srgbClr val="F8FAFC"/>
         </a:solidFill>
+        <a:effectLst/>
       </p:bgPr>
     </p:bg>
     <p:spTree>
@@ -7068,7 +7128,7 @@
           <a:bodyPr wrap="square" lIns="0" tIns="0" rIns="0" bIns="0" rtlCol="0" anchor="ctr"/>
           <a:lstStyle/>
           <a:p>
-            <a:pPr indent="0" marL="0">
+            <a:pPr marL="0" indent="0">
               <a:buNone/>
             </a:pPr>
             <a:r>
@@ -7105,6 +7165,13 @@
           </a:solidFill>
           <a:ln/>
         </p:spPr>
+        <p:txBody>
+          <a:bodyPr/>
+          <a:lstStyle/>
+          <a:p>
+            <a:endParaRPr lang="en-US"/>
+          </a:p>
+        </p:txBody>
       </p:sp>
       <p:sp>
         <p:nvSpPr>
@@ -7127,7 +7194,7 @@
           <a:bodyPr wrap="square" lIns="0" tIns="0" rIns="0" bIns="0" rtlCol="0" anchor="ctr"/>
           <a:lstStyle/>
           <a:p>
-            <a:pPr algn="ctr" indent="0" marL="0">
+            <a:pPr marL="0" indent="0" algn="ctr">
               <a:buNone/>
             </a:pPr>
             <a:r>
@@ -7166,7 +7233,7 @@
           <a:bodyPr wrap="square" lIns="0" tIns="0" rIns="0" bIns="0" rtlCol="0" anchor="ctr"/>
           <a:lstStyle/>
           <a:p>
-            <a:pPr indent="0" marL="0">
+            <a:pPr marL="0" indent="0">
               <a:buNone/>
             </a:pPr>
             <a:r>
@@ -7203,6 +7270,13 @@
           </a:solidFill>
           <a:ln/>
         </p:spPr>
+        <p:txBody>
+          <a:bodyPr/>
+          <a:lstStyle/>
+          <a:p>
+            <a:endParaRPr lang="en-US"/>
+          </a:p>
+        </p:txBody>
       </p:sp>
       <p:sp>
         <p:nvSpPr>
@@ -7225,7 +7299,7 @@
           <a:bodyPr wrap="square" lIns="0" tIns="0" rIns="0" bIns="0" rtlCol="0" anchor="ctr"/>
           <a:lstStyle/>
           <a:p>
-            <a:pPr algn="ctr" indent="0" marL="0">
+            <a:pPr marL="0" indent="0" algn="ctr">
               <a:buNone/>
             </a:pPr>
             <a:r>
@@ -7264,7 +7338,7 @@
           <a:bodyPr wrap="square" lIns="0" tIns="0" rIns="0" bIns="0" rtlCol="0" anchor="ctr"/>
           <a:lstStyle/>
           <a:p>
-            <a:pPr indent="0" marL="0">
+            <a:pPr marL="0" indent="0">
               <a:buNone/>
             </a:pPr>
             <a:r>
@@ -7301,6 +7375,13 @@
           </a:solidFill>
           <a:ln/>
         </p:spPr>
+        <p:txBody>
+          <a:bodyPr/>
+          <a:lstStyle/>
+          <a:p>
+            <a:endParaRPr lang="en-US"/>
+          </a:p>
+        </p:txBody>
       </p:sp>
       <p:sp>
         <p:nvSpPr>
@@ -7323,7 +7404,7 @@
           <a:bodyPr wrap="square" lIns="0" tIns="0" rIns="0" bIns="0" rtlCol="0" anchor="ctr"/>
           <a:lstStyle/>
           <a:p>
-            <a:pPr algn="ctr" indent="0" marL="0">
+            <a:pPr marL="0" indent="0" algn="ctr">
               <a:buNone/>
             </a:pPr>
             <a:r>
@@ -7362,7 +7443,7 @@
           <a:bodyPr wrap="square" lIns="0" tIns="0" rIns="0" bIns="0" rtlCol="0" anchor="ctr"/>
           <a:lstStyle/>
           <a:p>
-            <a:pPr indent="0" marL="0">
+            <a:pPr marL="0" indent="0">
               <a:buNone/>
             </a:pPr>
             <a:r>
@@ -7399,6 +7480,13 @@
           </a:solidFill>
           <a:ln/>
         </p:spPr>
+        <p:txBody>
+          <a:bodyPr/>
+          <a:lstStyle/>
+          <a:p>
+            <a:endParaRPr lang="en-US"/>
+          </a:p>
+        </p:txBody>
       </p:sp>
       <p:sp>
         <p:nvSpPr>
@@ -7421,7 +7509,7 @@
           <a:bodyPr wrap="square" lIns="0" tIns="0" rIns="0" bIns="0" rtlCol="0" anchor="ctr"/>
           <a:lstStyle/>
           <a:p>
-            <a:pPr algn="ctr" indent="0" marL="0">
+            <a:pPr marL="0" indent="0" algn="ctr">
               <a:buNone/>
             </a:pPr>
             <a:r>
@@ -7460,7 +7548,7 @@
           <a:bodyPr wrap="square" lIns="0" tIns="0" rIns="0" bIns="0" rtlCol="0" anchor="ctr"/>
           <a:lstStyle/>
           <a:p>
-            <a:pPr indent="0" marL="0">
+            <a:pPr marL="0" indent="0">
               <a:buNone/>
             </a:pPr>
             <a:r>
@@ -7497,6 +7585,13 @@
           </a:solidFill>
           <a:ln/>
         </p:spPr>
+        <p:txBody>
+          <a:bodyPr/>
+          <a:lstStyle/>
+          <a:p>
+            <a:endParaRPr lang="en-US"/>
+          </a:p>
+        </p:txBody>
       </p:sp>
       <p:sp>
         <p:nvSpPr>
@@ -7519,7 +7614,7 @@
           <a:bodyPr wrap="square" lIns="0" tIns="0" rIns="0" bIns="0" rtlCol="0" anchor="ctr"/>
           <a:lstStyle/>
           <a:p>
-            <a:pPr algn="ctr" indent="0" marL="0">
+            <a:pPr marL="0" indent="0" algn="ctr">
               <a:buNone/>
             </a:pPr>
             <a:r>
@@ -7558,7 +7653,7 @@
           <a:bodyPr wrap="square" lIns="0" tIns="0" rIns="0" bIns="0" rtlCol="0" anchor="ctr"/>
           <a:lstStyle/>
           <a:p>
-            <a:pPr indent="0" marL="0">
+            <a:pPr marL="0" indent="0">
               <a:buNone/>
             </a:pPr>
             <a:r>
@@ -7595,6 +7690,13 @@
           </a:solidFill>
           <a:ln/>
         </p:spPr>
+        <p:txBody>
+          <a:bodyPr/>
+          <a:lstStyle/>
+          <a:p>
+            <a:endParaRPr lang="en-US"/>
+          </a:p>
+        </p:txBody>
       </p:sp>
       <p:sp>
         <p:nvSpPr>
@@ -7617,7 +7719,7 @@
           <a:bodyPr wrap="square" lIns="0" tIns="0" rIns="0" bIns="0" rtlCol="0" anchor="ctr"/>
           <a:lstStyle/>
           <a:p>
-            <a:pPr algn="ctr" indent="0" marL="0">
+            <a:pPr marL="0" indent="0" algn="ctr">
               <a:buNone/>
             </a:pPr>
             <a:r>
@@ -7656,7 +7758,7 @@
           <a:bodyPr wrap="square" lIns="0" tIns="0" rIns="0" bIns="0" rtlCol="0" anchor="ctr"/>
           <a:lstStyle/>
           <a:p>
-            <a:pPr indent="0" marL="0">
+            <a:pPr marL="0" indent="0">
               <a:buNone/>
             </a:pPr>
             <a:r>
@@ -7690,6 +7792,7 @@
         <a:solidFill>
           <a:srgbClr val="F8FAFC"/>
         </a:solidFill>
+        <a:effectLst/>
       </p:bgPr>
     </p:bg>
     <p:spTree>
@@ -7727,7 +7830,7 @@
           <a:bodyPr wrap="square" lIns="0" tIns="0" rIns="0" bIns="0" rtlCol="0" anchor="ctr"/>
           <a:lstStyle/>
           <a:p>
-            <a:pPr indent="0" marL="0">
+            <a:pPr marL="0" indent="0">
               <a:buNone/>
             </a:pPr>
             <a:r>
@@ -7764,6 +7867,13 @@
           </a:solidFill>
           <a:ln/>
         </p:spPr>
+        <p:txBody>
+          <a:bodyPr/>
+          <a:lstStyle/>
+          <a:p>
+            <a:endParaRPr lang="en-US"/>
+          </a:p>
+        </p:txBody>
       </p:sp>
       <p:sp>
         <p:nvSpPr>
@@ -7786,7 +7896,7 @@
           <a:bodyPr wrap="square" lIns="0" tIns="0" rIns="0" bIns="0" rtlCol="0" anchor="ctr"/>
           <a:lstStyle/>
           <a:p>
-            <a:pPr indent="0" marL="0">
+            <a:pPr marL="0" indent="0">
               <a:buNone/>
             </a:pPr>
             <a:r>
@@ -7812,8 +7922,8 @@
         </p:nvSpPr>
         <p:spPr>
           <a:xfrm>
-            <a:off x="457200" y="1600200"/>
-            <a:ext cx="8229600" cy="2560320"/>
+            <a:off x="457200" y="1417321"/>
+            <a:ext cx="8229600" cy="3031308"/>
           </a:xfrm>
           <a:prstGeom prst="rect">
             <a:avLst/>
@@ -7823,13 +7933,20 @@
           </a:solidFill>
           <a:ln/>
           <a:effectLst>
-            <a:outerShdw sx="100000" sy="100000" kx="0" ky="0" algn="bl" rotWithShape="0" blurRad="76200" dist="25400" dir="8100000">
+            <a:outerShdw blurRad="76200" dist="25400" dir="8100000" algn="bl" rotWithShape="0">
               <a:srgbClr val="000000">
                 <a:alpha val="10000"/>
               </a:srgbClr>
             </a:outerShdw>
           </a:effectLst>
         </p:spPr>
+        <p:txBody>
+          <a:bodyPr/>
+          <a:lstStyle/>
+          <a:p>
+            <a:endParaRPr lang="en-US"/>
+          </a:p>
+        </p:txBody>
       </p:sp>
       <p:sp>
         <p:nvSpPr>
@@ -7852,7 +7969,7 @@
           <a:bodyPr wrap="square" rtlCol="0" anchor="ctr"/>
           <a:lstStyle/>
           <a:p>
-            <a:pPr indent="0" marL="0">
+            <a:pPr marL="0" indent="0">
               <a:spcAft>
                 <a:spcPts val="300"/>
               </a:spcAft>
@@ -7872,7 +7989,7 @@
             <a:endParaRPr lang="en-US" sz="1500" dirty="0"/>
           </a:p>
           <a:p>
-            <a:pPr indent="0" marL="0">
+            <a:pPr marL="0" indent="0">
               <a:spcAft>
                 <a:spcPts val="300"/>
               </a:spcAft>
@@ -7892,7 +8009,7 @@
             <a:endParaRPr lang="en-US" sz="1500" dirty="0"/>
           </a:p>
           <a:p>
-            <a:pPr indent="0" marL="0">
+            <a:pPr marL="0" indent="0">
               <a:spcAft>
                 <a:spcPts val="300"/>
               </a:spcAft>
@@ -7901,7 +8018,7 @@
             <a:endParaRPr lang="en-US" sz="1500" dirty="0"/>
           </a:p>
           <a:p>
-            <a:pPr indent="0" marL="0">
+            <a:pPr marL="0" indent="0">
               <a:spcAft>
                 <a:spcPts val="300"/>
               </a:spcAft>
@@ -7921,7 +8038,7 @@
             <a:endParaRPr lang="en-US" sz="1500" dirty="0"/>
           </a:p>
           <a:p>
-            <a:pPr indent="0" marL="0">
+            <a:pPr marL="0" indent="0">
               <a:spcAft>
                 <a:spcPts val="300"/>
               </a:spcAft>
@@ -7941,7 +8058,7 @@
             <a:endParaRPr lang="en-US" sz="1500" dirty="0"/>
           </a:p>
           <a:p>
-            <a:pPr indent="0" marL="0">
+            <a:pPr marL="0" indent="0">
               <a:spcAft>
                 <a:spcPts val="300"/>
               </a:spcAft>
@@ -7950,7 +8067,7 @@
             <a:endParaRPr lang="en-US" sz="1500" dirty="0"/>
           </a:p>
           <a:p>
-            <a:pPr indent="0" marL="0">
+            <a:pPr marL="0" indent="0">
               <a:spcAft>
                 <a:spcPts val="300"/>
               </a:spcAft>
@@ -7970,7 +8087,7 @@
             <a:endParaRPr lang="en-US" sz="1500" dirty="0"/>
           </a:p>
           <a:p>
-            <a:pPr indent="0" marL="0">
+            <a:pPr marL="0" indent="0">
               <a:spcAft>
                 <a:spcPts val="300"/>
               </a:spcAft>
@@ -7990,7 +8107,7 @@
             <a:endParaRPr lang="en-US" sz="1500" dirty="0"/>
           </a:p>
           <a:p>
-            <a:pPr indent="0" marL="0">
+            <a:pPr marL="0" indent="0">
               <a:spcAft>
                 <a:spcPts val="300"/>
               </a:spcAft>
@@ -7999,7 +8116,7 @@
             <a:endParaRPr lang="en-US" sz="1500" dirty="0"/>
           </a:p>
           <a:p>
-            <a:pPr indent="0" marL="0">
+            <a:pPr marL="0" indent="0">
               <a:spcAft>
                 <a:spcPts val="300"/>
               </a:spcAft>
@@ -8025,6 +8142,429 @@
   <p:clrMapOvr>
     <a:masterClrMapping/>
   </p:clrMapOvr>
+  <p:timing>
+    <p:tnLst>
+      <p:par>
+        <p:cTn id="1" dur="indefinite" restart="never" nodeType="tmRoot">
+          <p:childTnLst>
+            <p:seq concurrent="1" nextAc="seek">
+              <p:cTn id="2" dur="indefinite" nodeType="mainSeq">
+                <p:childTnLst>
+                  <p:par>
+                    <p:cTn id="3" fill="hold">
+                      <p:stCondLst>
+                        <p:cond delay="indefinite"/>
+                      </p:stCondLst>
+                      <p:childTnLst>
+                        <p:par>
+                          <p:cTn id="4" fill="hold">
+                            <p:stCondLst>
+                              <p:cond delay="0"/>
+                            </p:stCondLst>
+                            <p:childTnLst>
+                              <p:par>
+                                <p:cTn id="5" presetID="1" presetClass="entr" presetSubtype="0" fill="hold" grpId="0" nodeType="clickEffect">
+                                  <p:stCondLst>
+                                    <p:cond delay="0"/>
+                                  </p:stCondLst>
+                                  <p:childTnLst>
+                                    <p:set>
+                                      <p:cBhvr>
+                                        <p:cTn id="6" dur="1" fill="hold">
+                                          <p:stCondLst>
+                                            <p:cond delay="0"/>
+                                          </p:stCondLst>
+                                        </p:cTn>
+                                        <p:tgtEl>
+                                          <p:spTgt spid="6">
+                                            <p:bg/>
+                                          </p:spTgt>
+                                        </p:tgtEl>
+                                        <p:attrNameLst>
+                                          <p:attrName>style.visibility</p:attrName>
+                                        </p:attrNameLst>
+                                      </p:cBhvr>
+                                      <p:to>
+                                        <p:strVal val="visible"/>
+                                      </p:to>
+                                    </p:set>
+                                  </p:childTnLst>
+                                </p:cTn>
+                              </p:par>
+                            </p:childTnLst>
+                          </p:cTn>
+                        </p:par>
+                      </p:childTnLst>
+                    </p:cTn>
+                  </p:par>
+                  <p:par>
+                    <p:cTn id="7" fill="hold">
+                      <p:stCondLst>
+                        <p:cond delay="indefinite"/>
+                      </p:stCondLst>
+                      <p:childTnLst>
+                        <p:par>
+                          <p:cTn id="8" fill="hold">
+                            <p:stCondLst>
+                              <p:cond delay="0"/>
+                            </p:stCondLst>
+                            <p:childTnLst>
+                              <p:par>
+                                <p:cTn id="9" presetID="1" presetClass="entr" presetSubtype="0" fill="hold" grpId="0" nodeType="clickEffect">
+                                  <p:stCondLst>
+                                    <p:cond delay="0"/>
+                                  </p:stCondLst>
+                                  <p:childTnLst>
+                                    <p:set>
+                                      <p:cBhvr>
+                                        <p:cTn id="10" dur="1" fill="hold">
+                                          <p:stCondLst>
+                                            <p:cond delay="0"/>
+                                          </p:stCondLst>
+                                        </p:cTn>
+                                        <p:tgtEl>
+                                          <p:spTgt spid="6">
+                                            <p:txEl>
+                                              <p:pRg st="0" end="0"/>
+                                            </p:txEl>
+                                          </p:spTgt>
+                                        </p:tgtEl>
+                                        <p:attrNameLst>
+                                          <p:attrName>style.visibility</p:attrName>
+                                        </p:attrNameLst>
+                                      </p:cBhvr>
+                                      <p:to>
+                                        <p:strVal val="visible"/>
+                                      </p:to>
+                                    </p:set>
+                                  </p:childTnLst>
+                                </p:cTn>
+                              </p:par>
+                            </p:childTnLst>
+                          </p:cTn>
+                        </p:par>
+                      </p:childTnLst>
+                    </p:cTn>
+                  </p:par>
+                  <p:par>
+                    <p:cTn id="11" fill="hold">
+                      <p:stCondLst>
+                        <p:cond delay="indefinite"/>
+                      </p:stCondLst>
+                      <p:childTnLst>
+                        <p:par>
+                          <p:cTn id="12" fill="hold">
+                            <p:stCondLst>
+                              <p:cond delay="0"/>
+                            </p:stCondLst>
+                            <p:childTnLst>
+                              <p:par>
+                                <p:cTn id="13" presetID="1" presetClass="entr" presetSubtype="0" fill="hold" grpId="0" nodeType="clickEffect">
+                                  <p:stCondLst>
+                                    <p:cond delay="0"/>
+                                  </p:stCondLst>
+                                  <p:childTnLst>
+                                    <p:set>
+                                      <p:cBhvr>
+                                        <p:cTn id="14" dur="1" fill="hold">
+                                          <p:stCondLst>
+                                            <p:cond delay="0"/>
+                                          </p:stCondLst>
+                                        </p:cTn>
+                                        <p:tgtEl>
+                                          <p:spTgt spid="6">
+                                            <p:txEl>
+                                              <p:pRg st="1" end="1"/>
+                                            </p:txEl>
+                                          </p:spTgt>
+                                        </p:tgtEl>
+                                        <p:attrNameLst>
+                                          <p:attrName>style.visibility</p:attrName>
+                                        </p:attrNameLst>
+                                      </p:cBhvr>
+                                      <p:to>
+                                        <p:strVal val="visible"/>
+                                      </p:to>
+                                    </p:set>
+                                  </p:childTnLst>
+                                </p:cTn>
+                              </p:par>
+                            </p:childTnLst>
+                          </p:cTn>
+                        </p:par>
+                      </p:childTnLst>
+                    </p:cTn>
+                  </p:par>
+                  <p:par>
+                    <p:cTn id="15" fill="hold">
+                      <p:stCondLst>
+                        <p:cond delay="indefinite"/>
+                      </p:stCondLst>
+                      <p:childTnLst>
+                        <p:par>
+                          <p:cTn id="16" fill="hold">
+                            <p:stCondLst>
+                              <p:cond delay="0"/>
+                            </p:stCondLst>
+                            <p:childTnLst>
+                              <p:par>
+                                <p:cTn id="17" presetID="1" presetClass="entr" presetSubtype="0" fill="hold" grpId="0" nodeType="clickEffect">
+                                  <p:stCondLst>
+                                    <p:cond delay="0"/>
+                                  </p:stCondLst>
+                                  <p:childTnLst>
+                                    <p:set>
+                                      <p:cBhvr>
+                                        <p:cTn id="18" dur="1" fill="hold">
+                                          <p:stCondLst>
+                                            <p:cond delay="0"/>
+                                          </p:stCondLst>
+                                        </p:cTn>
+                                        <p:tgtEl>
+                                          <p:spTgt spid="6">
+                                            <p:txEl>
+                                              <p:pRg st="3" end="3"/>
+                                            </p:txEl>
+                                          </p:spTgt>
+                                        </p:tgtEl>
+                                        <p:attrNameLst>
+                                          <p:attrName>style.visibility</p:attrName>
+                                        </p:attrNameLst>
+                                      </p:cBhvr>
+                                      <p:to>
+                                        <p:strVal val="visible"/>
+                                      </p:to>
+                                    </p:set>
+                                  </p:childTnLst>
+                                </p:cTn>
+                              </p:par>
+                            </p:childTnLst>
+                          </p:cTn>
+                        </p:par>
+                      </p:childTnLst>
+                    </p:cTn>
+                  </p:par>
+                  <p:par>
+                    <p:cTn id="19" fill="hold">
+                      <p:stCondLst>
+                        <p:cond delay="indefinite"/>
+                      </p:stCondLst>
+                      <p:childTnLst>
+                        <p:par>
+                          <p:cTn id="20" fill="hold">
+                            <p:stCondLst>
+                              <p:cond delay="0"/>
+                            </p:stCondLst>
+                            <p:childTnLst>
+                              <p:par>
+                                <p:cTn id="21" presetID="1" presetClass="entr" presetSubtype="0" fill="hold" grpId="0" nodeType="clickEffect">
+                                  <p:stCondLst>
+                                    <p:cond delay="0"/>
+                                  </p:stCondLst>
+                                  <p:childTnLst>
+                                    <p:set>
+                                      <p:cBhvr>
+                                        <p:cTn id="22" dur="1" fill="hold">
+                                          <p:stCondLst>
+                                            <p:cond delay="0"/>
+                                          </p:stCondLst>
+                                        </p:cTn>
+                                        <p:tgtEl>
+                                          <p:spTgt spid="6">
+                                            <p:txEl>
+                                              <p:pRg st="4" end="4"/>
+                                            </p:txEl>
+                                          </p:spTgt>
+                                        </p:tgtEl>
+                                        <p:attrNameLst>
+                                          <p:attrName>style.visibility</p:attrName>
+                                        </p:attrNameLst>
+                                      </p:cBhvr>
+                                      <p:to>
+                                        <p:strVal val="visible"/>
+                                      </p:to>
+                                    </p:set>
+                                  </p:childTnLst>
+                                </p:cTn>
+                              </p:par>
+                            </p:childTnLst>
+                          </p:cTn>
+                        </p:par>
+                      </p:childTnLst>
+                    </p:cTn>
+                  </p:par>
+                  <p:par>
+                    <p:cTn id="23" fill="hold">
+                      <p:stCondLst>
+                        <p:cond delay="indefinite"/>
+                      </p:stCondLst>
+                      <p:childTnLst>
+                        <p:par>
+                          <p:cTn id="24" fill="hold">
+                            <p:stCondLst>
+                              <p:cond delay="0"/>
+                            </p:stCondLst>
+                            <p:childTnLst>
+                              <p:par>
+                                <p:cTn id="25" presetID="1" presetClass="entr" presetSubtype="0" fill="hold" grpId="0" nodeType="clickEffect">
+                                  <p:stCondLst>
+                                    <p:cond delay="0"/>
+                                  </p:stCondLst>
+                                  <p:childTnLst>
+                                    <p:set>
+                                      <p:cBhvr>
+                                        <p:cTn id="26" dur="1" fill="hold">
+                                          <p:stCondLst>
+                                            <p:cond delay="0"/>
+                                          </p:stCondLst>
+                                        </p:cTn>
+                                        <p:tgtEl>
+                                          <p:spTgt spid="6">
+                                            <p:txEl>
+                                              <p:pRg st="6" end="6"/>
+                                            </p:txEl>
+                                          </p:spTgt>
+                                        </p:tgtEl>
+                                        <p:attrNameLst>
+                                          <p:attrName>style.visibility</p:attrName>
+                                        </p:attrNameLst>
+                                      </p:cBhvr>
+                                      <p:to>
+                                        <p:strVal val="visible"/>
+                                      </p:to>
+                                    </p:set>
+                                  </p:childTnLst>
+                                </p:cTn>
+                              </p:par>
+                            </p:childTnLst>
+                          </p:cTn>
+                        </p:par>
+                      </p:childTnLst>
+                    </p:cTn>
+                  </p:par>
+                  <p:par>
+                    <p:cTn id="27" fill="hold">
+                      <p:stCondLst>
+                        <p:cond delay="indefinite"/>
+                      </p:stCondLst>
+                      <p:childTnLst>
+                        <p:par>
+                          <p:cTn id="28" fill="hold">
+                            <p:stCondLst>
+                              <p:cond delay="0"/>
+                            </p:stCondLst>
+                            <p:childTnLst>
+                              <p:par>
+                                <p:cTn id="29" presetID="1" presetClass="entr" presetSubtype="0" fill="hold" grpId="0" nodeType="clickEffect">
+                                  <p:stCondLst>
+                                    <p:cond delay="0"/>
+                                  </p:stCondLst>
+                                  <p:childTnLst>
+                                    <p:set>
+                                      <p:cBhvr>
+                                        <p:cTn id="30" dur="1" fill="hold">
+                                          <p:stCondLst>
+                                            <p:cond delay="0"/>
+                                          </p:stCondLst>
+                                        </p:cTn>
+                                        <p:tgtEl>
+                                          <p:spTgt spid="6">
+                                            <p:txEl>
+                                              <p:pRg st="7" end="7"/>
+                                            </p:txEl>
+                                          </p:spTgt>
+                                        </p:tgtEl>
+                                        <p:attrNameLst>
+                                          <p:attrName>style.visibility</p:attrName>
+                                        </p:attrNameLst>
+                                      </p:cBhvr>
+                                      <p:to>
+                                        <p:strVal val="visible"/>
+                                      </p:to>
+                                    </p:set>
+                                  </p:childTnLst>
+                                </p:cTn>
+                              </p:par>
+                            </p:childTnLst>
+                          </p:cTn>
+                        </p:par>
+                      </p:childTnLst>
+                    </p:cTn>
+                  </p:par>
+                  <p:par>
+                    <p:cTn id="31" fill="hold">
+                      <p:stCondLst>
+                        <p:cond delay="indefinite"/>
+                      </p:stCondLst>
+                      <p:childTnLst>
+                        <p:par>
+                          <p:cTn id="32" fill="hold">
+                            <p:stCondLst>
+                              <p:cond delay="0"/>
+                            </p:stCondLst>
+                            <p:childTnLst>
+                              <p:par>
+                                <p:cTn id="33" presetID="1" presetClass="entr" presetSubtype="0" fill="hold" grpId="0" nodeType="clickEffect">
+                                  <p:stCondLst>
+                                    <p:cond delay="0"/>
+                                  </p:stCondLst>
+                                  <p:childTnLst>
+                                    <p:set>
+                                      <p:cBhvr>
+                                        <p:cTn id="34" dur="1" fill="hold">
+                                          <p:stCondLst>
+                                            <p:cond delay="0"/>
+                                          </p:stCondLst>
+                                        </p:cTn>
+                                        <p:tgtEl>
+                                          <p:spTgt spid="6">
+                                            <p:txEl>
+                                              <p:pRg st="9" end="9"/>
+                                            </p:txEl>
+                                          </p:spTgt>
+                                        </p:tgtEl>
+                                        <p:attrNameLst>
+                                          <p:attrName>style.visibility</p:attrName>
+                                        </p:attrNameLst>
+                                      </p:cBhvr>
+                                      <p:to>
+                                        <p:strVal val="visible"/>
+                                      </p:to>
+                                    </p:set>
+                                  </p:childTnLst>
+                                </p:cTn>
+                              </p:par>
+                            </p:childTnLst>
+                          </p:cTn>
+                        </p:par>
+                      </p:childTnLst>
+                    </p:cTn>
+                  </p:par>
+                </p:childTnLst>
+              </p:cTn>
+              <p:prevCondLst>
+                <p:cond evt="onPrev" delay="0">
+                  <p:tgtEl>
+                    <p:sldTgt/>
+                  </p:tgtEl>
+                </p:cond>
+              </p:prevCondLst>
+              <p:nextCondLst>
+                <p:cond evt="onNext" delay="0">
+                  <p:tgtEl>
+                    <p:sldTgt/>
+                  </p:tgtEl>
+                </p:cond>
+              </p:nextCondLst>
+            </p:seq>
+          </p:childTnLst>
+        </p:cTn>
+      </p:par>
+    </p:tnLst>
+    <p:bldLst>
+      <p:bldP spid="6" grpId="0" build="p" animBg="1"/>
+    </p:bldLst>
+  </p:timing>
 </p:sld>
 </file>
 
@@ -8036,6 +8576,7 @@
         <a:solidFill>
           <a:srgbClr val="F8FAFC"/>
         </a:solidFill>
+        <a:effectLst/>
       </p:bgPr>
     </p:bg>
     <p:spTree>
@@ -8073,7 +8614,7 @@
           <a:bodyPr wrap="square" lIns="0" tIns="0" rIns="0" bIns="0" rtlCol="0" anchor="ctr"/>
           <a:lstStyle/>
           <a:p>
-            <a:pPr indent="0" marL="0">
+            <a:pPr marL="0" indent="0">
               <a:buNone/>
             </a:pPr>
             <a:r>
@@ -8110,6 +8651,13 @@
           </a:solidFill>
           <a:ln/>
         </p:spPr>
+        <p:txBody>
+          <a:bodyPr/>
+          <a:lstStyle/>
+          <a:p>
+            <a:endParaRPr lang="en-US"/>
+          </a:p>
+        </p:txBody>
       </p:sp>
       <p:sp>
         <p:nvSpPr>
@@ -8132,7 +8680,7 @@
           <a:bodyPr wrap="square" lIns="0" tIns="0" rIns="0" bIns="0" rtlCol="0" anchor="ctr"/>
           <a:lstStyle/>
           <a:p>
-            <a:pPr indent="0" marL="0">
+            <a:pPr marL="0" indent="0">
               <a:buNone/>
             </a:pPr>
             <a:r>
@@ -8152,14 +8700,14 @@
       </p:sp>
       <p:pic>
         <p:nvPicPr>
-          <p:cNvPr id="5" name="Image 0" descr="preencoded.png">    </p:cNvPr>
+          <p:cNvPr id="5" name="Image 0" descr="preencoded.png"/>
           <p:cNvPicPr>
             <a:picLocks noChangeAspect="1"/>
           </p:cNvPicPr>
           <p:nvPr/>
         </p:nvPicPr>
         <p:blipFill>
-          <a:blip r:embed="rId1"/>
+          <a:blip r:embed="rId3"/>
           <a:stretch>
             <a:fillRect/>
           </a:stretch>
@@ -8193,13 +8741,20 @@
           </a:solidFill>
           <a:ln/>
           <a:effectLst>
-            <a:outerShdw sx="100000" sy="100000" kx="0" ky="0" algn="bl" rotWithShape="0" blurRad="76200" dist="25400" dir="8100000">
+            <a:outerShdw blurRad="76200" dist="25400" dir="8100000" algn="bl" rotWithShape="0">
               <a:srgbClr val="000000">
                 <a:alpha val="10000"/>
               </a:srgbClr>
             </a:outerShdw>
           </a:effectLst>
         </p:spPr>
+        <p:txBody>
+          <a:bodyPr/>
+          <a:lstStyle/>
+          <a:p>
+            <a:endParaRPr lang="en-US"/>
+          </a:p>
+        </p:txBody>
       </p:sp>
       <p:sp>
         <p:nvSpPr>
@@ -8222,7 +8777,7 @@
           <a:bodyPr wrap="square" rtlCol="0" anchor="ctr"/>
           <a:lstStyle/>
           <a:p>
-            <a:pPr indent="0" marL="0">
+            <a:pPr marL="0" indent="0">
               <a:spcAft>
                 <a:spcPts val="300"/>
               </a:spcAft>
@@ -8242,7 +8797,7 @@
             <a:endParaRPr lang="en-US" sz="1500" dirty="0"/>
           </a:p>
           <a:p>
-            <a:pPr indent="0" marL="0">
+            <a:pPr marL="0" indent="0">
               <a:spcAft>
                 <a:spcPts val="300"/>
               </a:spcAft>
@@ -8251,7 +8806,7 @@
             <a:endParaRPr lang="en-US" sz="1500" dirty="0"/>
           </a:p>
           <a:p>
-            <a:pPr indent="0" marL="0">
+            <a:pPr marL="0" indent="0">
               <a:spcAft>
                 <a:spcPts val="300"/>
               </a:spcAft>
@@ -8271,7 +8826,7 @@
             <a:endParaRPr lang="en-US" sz="1500" dirty="0"/>
           </a:p>
           <a:p>
-            <a:pPr indent="0" marL="0">
+            <a:pPr marL="0" indent="0">
               <a:spcAft>
                 <a:spcPts val="300"/>
               </a:spcAft>
@@ -8291,7 +8846,7 @@
             <a:endParaRPr lang="en-US" sz="1500" dirty="0"/>
           </a:p>
           <a:p>
-            <a:pPr indent="0" marL="0">
+            <a:pPr marL="0" indent="0">
               <a:spcAft>
                 <a:spcPts val="300"/>
               </a:spcAft>
@@ -8300,7 +8855,7 @@
             <a:endParaRPr lang="en-US" sz="1500" dirty="0"/>
           </a:p>
           <a:p>
-            <a:pPr indent="0" marL="0">
+            <a:pPr marL="0" indent="0">
               <a:spcAft>
                 <a:spcPts val="300"/>
               </a:spcAft>
@@ -8320,7 +8875,7 @@
             <a:endParaRPr lang="en-US" sz="1500" dirty="0"/>
           </a:p>
           <a:p>
-            <a:pPr indent="0" marL="0">
+            <a:pPr marL="0" indent="0">
               <a:spcAft>
                 <a:spcPts val="300"/>
               </a:spcAft>
@@ -8357,6 +8912,7 @@
         <a:solidFill>
           <a:srgbClr val="F8FAFC"/>
         </a:solidFill>
+        <a:effectLst/>
       </p:bgPr>
     </p:bg>
     <p:spTree>
@@ -8394,7 +8950,7 @@
           <a:bodyPr wrap="square" lIns="0" tIns="0" rIns="0" bIns="0" rtlCol="0" anchor="ctr"/>
           <a:lstStyle/>
           <a:p>
-            <a:pPr indent="0" marL="0">
+            <a:pPr marL="0" indent="0">
               <a:buNone/>
             </a:pPr>
             <a:r>
@@ -8414,14 +8970,14 @@
       </p:sp>
       <p:pic>
         <p:nvPicPr>
-          <p:cNvPr id="3" name="Image 0" descr="preencoded.png">    </p:cNvPr>
+          <p:cNvPr id="3" name="Image 0" descr="preencoded.png"/>
           <p:cNvPicPr>
             <a:picLocks noChangeAspect="1"/>
           </p:cNvPicPr>
           <p:nvPr/>
         </p:nvPicPr>
         <p:blipFill>
-          <a:blip r:embed="rId1"/>
+          <a:blip r:embed="rId3"/>
           <a:stretch>
             <a:fillRect/>
           </a:stretch>
@@ -8455,13 +9011,20 @@
           </a:solidFill>
           <a:ln/>
           <a:effectLst>
-            <a:outerShdw sx="100000" sy="100000" kx="0" ky="0" algn="bl" rotWithShape="0" blurRad="76200" dist="25400" dir="8100000">
+            <a:outerShdw blurRad="76200" dist="25400" dir="8100000" algn="bl" rotWithShape="0">
               <a:srgbClr val="000000">
                 <a:alpha val="10000"/>
               </a:srgbClr>
             </a:outerShdw>
           </a:effectLst>
         </p:spPr>
+        <p:txBody>
+          <a:bodyPr/>
+          <a:lstStyle/>
+          <a:p>
+            <a:endParaRPr lang="en-US"/>
+          </a:p>
+        </p:txBody>
       </p:sp>
       <p:sp>
         <p:nvSpPr>
@@ -8484,7 +9047,7 @@
           <a:bodyPr wrap="square" lIns="0" tIns="0" rIns="0" bIns="0" rtlCol="0" anchor="ctr"/>
           <a:lstStyle/>
           <a:p>
-            <a:pPr indent="0" marL="0">
+            <a:pPr marL="0" indent="0">
               <a:buNone/>
             </a:pPr>
             <a:r>
@@ -8523,7 +9086,7 @@
           <a:bodyPr wrap="square" rtlCol="0" anchor="ctr"/>
           <a:lstStyle/>
           <a:p>
-            <a:pPr indent="0" marL="0">
+            <a:pPr marL="0" indent="0">
               <a:spcAft>
                 <a:spcPts val="200"/>
               </a:spcAft>
@@ -8543,7 +9106,7 @@
             <a:endParaRPr lang="en-US" sz="1400" dirty="0"/>
           </a:p>
           <a:p>
-            <a:pPr indent="0" marL="0">
+            <a:pPr marL="0" indent="0">
               <a:spcAft>
                 <a:spcPts val="200"/>
               </a:spcAft>
@@ -8552,7 +9115,7 @@
             <a:endParaRPr lang="en-US" sz="1400" dirty="0"/>
           </a:p>
           <a:p>
-            <a:pPr indent="0" marL="0">
+            <a:pPr marL="0" indent="0">
               <a:spcAft>
                 <a:spcPts val="200"/>
               </a:spcAft>
@@ -8572,7 +9135,7 @@
             <a:endParaRPr lang="en-US" sz="1400" dirty="0"/>
           </a:p>
           <a:p>
-            <a:pPr indent="0" marL="0">
+            <a:pPr marL="0" indent="0">
               <a:spcAft>
                 <a:spcPts val="200"/>
               </a:spcAft>
@@ -8581,7 +9144,7 @@
             <a:endParaRPr lang="en-US" sz="1400" dirty="0"/>
           </a:p>
           <a:p>
-            <a:pPr indent="0" marL="0">
+            <a:pPr marL="0" indent="0">
               <a:spcAft>
                 <a:spcPts val="200"/>
               </a:spcAft>
@@ -8601,7 +9164,7 @@
             <a:endParaRPr lang="en-US" sz="1400" dirty="0"/>
           </a:p>
           <a:p>
-            <a:pPr indent="0" marL="0">
+            <a:pPr marL="0" indent="0">
               <a:spcAft>
                 <a:spcPts val="200"/>
               </a:spcAft>
@@ -8610,7 +9173,7 @@
             <a:endParaRPr lang="en-US" sz="1400" dirty="0"/>
           </a:p>
           <a:p>
-            <a:pPr indent="0" marL="0">
+            <a:pPr marL="0" indent="0">
               <a:spcAft>
                 <a:spcPts val="200"/>
               </a:spcAft>
@@ -8630,7 +9193,7 @@
             <a:endParaRPr lang="en-US" sz="1400" dirty="0"/>
           </a:p>
           <a:p>
-            <a:pPr indent="0" marL="0">
+            <a:pPr marL="0" indent="0">
               <a:spcAft>
                 <a:spcPts val="200"/>
               </a:spcAft>
@@ -8639,7 +9202,7 @@
             <a:endParaRPr lang="en-US" sz="1400" dirty="0"/>
           </a:p>
           <a:p>
-            <a:pPr indent="0" marL="0">
+            <a:pPr marL="0" indent="0">
               <a:spcAft>
                 <a:spcPts val="200"/>
               </a:spcAft>
@@ -8676,6 +9239,7 @@
         <a:solidFill>
           <a:srgbClr val="F8FAFC"/>
         </a:solidFill>
+        <a:effectLst/>
       </p:bgPr>
     </p:bg>
     <p:spTree>
@@ -8713,7 +9277,7 @@
           <a:bodyPr wrap="square" lIns="0" tIns="0" rIns="0" bIns="0" rtlCol="0" anchor="ctr"/>
           <a:lstStyle/>
           <a:p>
-            <a:pPr indent="0" marL="0">
+            <a:pPr marL="0" indent="0">
               <a:buNone/>
             </a:pPr>
             <a:r>
@@ -8750,6 +9314,13 @@
           </a:solidFill>
           <a:ln/>
         </p:spPr>
+        <p:txBody>
+          <a:bodyPr/>
+          <a:lstStyle/>
+          <a:p>
+            <a:endParaRPr lang="en-US"/>
+          </a:p>
+        </p:txBody>
       </p:sp>
       <p:sp>
         <p:nvSpPr>
@@ -8772,7 +9343,7 @@
           <a:bodyPr wrap="square" lIns="0" tIns="0" rIns="0" bIns="0" rtlCol="0" anchor="ctr"/>
           <a:lstStyle/>
           <a:p>
-            <a:pPr indent="0" marL="0">
+            <a:pPr marL="0" indent="0">
               <a:buNone/>
             </a:pPr>
             <a:r>
@@ -8792,14 +9363,14 @@
       </p:sp>
       <p:pic>
         <p:nvPicPr>
-          <p:cNvPr id="5" name="Image 0" descr="preencoded.png">    </p:cNvPr>
+          <p:cNvPr id="5" name="Image 0" descr="preencoded.png"/>
           <p:cNvPicPr>
             <a:picLocks noChangeAspect="1"/>
           </p:cNvPicPr>
           <p:nvPr/>
         </p:nvPicPr>
         <p:blipFill>
-          <a:blip r:embed="rId1"/>
+          <a:blip r:embed="rId3"/>
           <a:stretch>
             <a:fillRect/>
           </a:stretch>
@@ -8833,13 +9404,20 @@
           </a:solidFill>
           <a:ln/>
           <a:effectLst>
-            <a:outerShdw sx="100000" sy="100000" kx="0" ky="0" algn="bl" rotWithShape="0" blurRad="76200" dist="25400" dir="8100000">
+            <a:outerShdw blurRad="76200" dist="25400" dir="8100000" algn="bl" rotWithShape="0">
               <a:srgbClr val="000000">
                 <a:alpha val="10000"/>
               </a:srgbClr>
             </a:outerShdw>
           </a:effectLst>
         </p:spPr>
+        <p:txBody>
+          <a:bodyPr/>
+          <a:lstStyle/>
+          <a:p>
+            <a:endParaRPr lang="en-US"/>
+          </a:p>
+        </p:txBody>
       </p:sp>
       <p:sp>
         <p:nvSpPr>
@@ -8862,7 +9440,7 @@
           <a:bodyPr wrap="square" rtlCol="0" anchor="ctr"/>
           <a:lstStyle/>
           <a:p>
-            <a:pPr indent="0" marL="0">
+            <a:pPr marL="0" indent="0">
               <a:spcAft>
                 <a:spcPts val="200"/>
               </a:spcAft>
@@ -8882,7 +9460,7 @@
             <a:endParaRPr lang="en-US" sz="1300" dirty="0"/>
           </a:p>
           <a:p>
-            <a:pPr indent="0" marL="0">
+            <a:pPr marL="0" indent="0">
               <a:spcAft>
                 <a:spcPts val="200"/>
               </a:spcAft>
@@ -8891,7 +9469,7 @@
             <a:endParaRPr lang="en-US" sz="1300" dirty="0"/>
           </a:p>
           <a:p>
-            <a:pPr indent="0" marL="0">
+            <a:pPr marL="0" indent="0">
               <a:spcAft>
                 <a:spcPts val="200"/>
               </a:spcAft>
@@ -8911,7 +9489,7 @@
             <a:endParaRPr lang="en-US" sz="1300" dirty="0"/>
           </a:p>
           <a:p>
-            <a:pPr indent="0" marL="0">
+            <a:pPr marL="0" indent="0">
               <a:spcAft>
                 <a:spcPts val="200"/>
               </a:spcAft>
@@ -8931,7 +9509,7 @@
             <a:endParaRPr lang="en-US" sz="1300" dirty="0"/>
           </a:p>
           <a:p>
-            <a:pPr indent="0" marL="0">
+            <a:pPr marL="0" indent="0">
               <a:spcAft>
                 <a:spcPts val="200"/>
               </a:spcAft>
@@ -8940,7 +9518,7 @@
             <a:endParaRPr lang="en-US" sz="1300" dirty="0"/>
           </a:p>
           <a:p>
-            <a:pPr indent="0" marL="0">
+            <a:pPr marL="0" indent="0">
               <a:spcAft>
                 <a:spcPts val="200"/>
               </a:spcAft>
@@ -8960,7 +9538,7 @@
             <a:endParaRPr lang="en-US" sz="1300" dirty="0"/>
           </a:p>
           <a:p>
-            <a:pPr indent="0" marL="0">
+            <a:pPr marL="0" indent="0">
               <a:spcAft>
                 <a:spcPts val="200"/>
               </a:spcAft>
@@ -8980,7 +9558,7 @@
             <a:endParaRPr lang="en-US" sz="1300" dirty="0"/>
           </a:p>
           <a:p>
-            <a:pPr indent="0" marL="0">
+            <a:pPr marL="0" indent="0">
               <a:spcAft>
                 <a:spcPts val="200"/>
               </a:spcAft>
@@ -9000,7 +9578,7 @@
             <a:endParaRPr lang="en-US" sz="1300" dirty="0"/>
           </a:p>
           <a:p>
-            <a:pPr indent="0" marL="0">
+            <a:pPr marL="0" indent="0">
               <a:spcAft>
                 <a:spcPts val="200"/>
               </a:spcAft>
@@ -9037,6 +9615,7 @@
         <a:solidFill>
           <a:srgbClr val="F8FAFC"/>
         </a:solidFill>
+        <a:effectLst/>
       </p:bgPr>
     </p:bg>
     <p:spTree>
@@ -9074,7 +9653,7 @@
           <a:bodyPr wrap="square" lIns="0" tIns="0" rIns="0" bIns="0" rtlCol="0" anchor="ctr"/>
           <a:lstStyle/>
           <a:p>
-            <a:pPr indent="0" marL="0">
+            <a:pPr marL="0" indent="0">
               <a:buNone/>
             </a:pPr>
             <a:r>
@@ -9094,14 +9673,14 @@
       </p:sp>
       <p:pic>
         <p:nvPicPr>
-          <p:cNvPr id="3" name="Image 0" descr="preencoded.png">    </p:cNvPr>
+          <p:cNvPr id="3" name="Image 0" descr="preencoded.png"/>
           <p:cNvPicPr>
             <a:picLocks noChangeAspect="1"/>
           </p:cNvPicPr>
           <p:nvPr/>
         </p:nvPicPr>
         <p:blipFill>
-          <a:blip r:embed="rId1"/>
+          <a:blip r:embed="rId3"/>
           <a:stretch>
             <a:fillRect/>
           </a:stretch>
@@ -9135,13 +9714,20 @@
           </a:solidFill>
           <a:ln/>
           <a:effectLst>
-            <a:outerShdw sx="100000" sy="100000" kx="0" ky="0" algn="bl" rotWithShape="0" blurRad="76200" dist="25400" dir="8100000">
+            <a:outerShdw blurRad="76200" dist="25400" dir="8100000" algn="bl" rotWithShape="0">
               <a:srgbClr val="000000">
                 <a:alpha val="10000"/>
               </a:srgbClr>
             </a:outerShdw>
           </a:effectLst>
         </p:spPr>
+        <p:txBody>
+          <a:bodyPr/>
+          <a:lstStyle/>
+          <a:p>
+            <a:endParaRPr lang="en-US"/>
+          </a:p>
+        </p:txBody>
       </p:sp>
       <p:sp>
         <p:nvSpPr>
@@ -9164,7 +9750,7 @@
           <a:bodyPr wrap="square" rtlCol="0" anchor="ctr"/>
           <a:lstStyle/>
           <a:p>
-            <a:pPr indent="0" marL="0">
+            <a:pPr marL="0" indent="0">
               <a:buNone/>
             </a:pPr>
             <a:r>
@@ -9178,9 +9764,6 @@
               </a:rPr>
               <a:t>d = rt  </a:t>
             </a:r>
-            <a:pPr indent="0" marL="0">
-              <a:buNone/>
-            </a:pPr>
             <a:r>
               <a:rPr lang="en-US" sz="1300" dirty="0">
                 <a:solidFill>
@@ -9215,13 +9798,20 @@
           </a:solidFill>
           <a:ln/>
           <a:effectLst>
-            <a:outerShdw sx="100000" sy="100000" kx="0" ky="0" algn="bl" rotWithShape="0" blurRad="76200" dist="25400" dir="8100000">
+            <a:outerShdw blurRad="76200" dist="25400" dir="8100000" algn="bl" rotWithShape="0">
               <a:srgbClr val="000000">
                 <a:alpha val="10000"/>
               </a:srgbClr>
             </a:outerShdw>
           </a:effectLst>
         </p:spPr>
+        <p:txBody>
+          <a:bodyPr/>
+          <a:lstStyle/>
+          <a:p>
+            <a:endParaRPr lang="en-US"/>
+          </a:p>
+        </p:txBody>
       </p:sp>
       <p:sp>
         <p:nvSpPr>
@@ -9242,6 +9832,13 @@
           </a:solidFill>
           <a:ln/>
         </p:spPr>
+        <p:txBody>
+          <a:bodyPr/>
+          <a:lstStyle/>
+          <a:p>
+            <a:endParaRPr lang="en-US"/>
+          </a:p>
+        </p:txBody>
       </p:sp>
       <p:sp>
         <p:nvSpPr>
@@ -9264,7 +9861,7 @@
           <a:bodyPr wrap="square" lIns="0" tIns="0" rIns="0" bIns="0" rtlCol="0" anchor="ctr"/>
           <a:lstStyle/>
           <a:p>
-            <a:pPr indent="0" marL="0">
+            <a:pPr marL="0" indent="0">
               <a:buNone/>
             </a:pPr>
             <a:r>
@@ -9303,7 +9900,7 @@
           <a:bodyPr wrap="square" lIns="0" tIns="0" rIns="0" bIns="0" rtlCol="0" anchor="ctr"/>
           <a:lstStyle/>
           <a:p>
-            <a:pPr indent="0" marL="0">
+            <a:pPr marL="0" indent="0">
               <a:buNone/>
             </a:pPr>
             <a:r>
@@ -9340,13 +9937,20 @@
           </a:solidFill>
           <a:ln/>
           <a:effectLst>
-            <a:outerShdw sx="100000" sy="100000" kx="0" ky="0" algn="bl" rotWithShape="0" blurRad="76200" dist="25400" dir="8100000">
+            <a:outerShdw blurRad="76200" dist="25400" dir="8100000" algn="bl" rotWithShape="0">
               <a:srgbClr val="000000">
                 <a:alpha val="10000"/>
               </a:srgbClr>
             </a:outerShdw>
           </a:effectLst>
         </p:spPr>
+        <p:txBody>
+          <a:bodyPr/>
+          <a:lstStyle/>
+          <a:p>
+            <a:endParaRPr lang="en-US"/>
+          </a:p>
+        </p:txBody>
       </p:sp>
       <p:sp>
         <p:nvSpPr>
@@ -9367,6 +9971,13 @@
           </a:solidFill>
           <a:ln/>
         </p:spPr>
+        <p:txBody>
+          <a:bodyPr/>
+          <a:lstStyle/>
+          <a:p>
+            <a:endParaRPr lang="en-US"/>
+          </a:p>
+        </p:txBody>
       </p:sp>
       <p:sp>
         <p:nvSpPr>
@@ -9389,7 +10000,7 @@
           <a:bodyPr wrap="square" lIns="0" tIns="0" rIns="0" bIns="0" rtlCol="0" anchor="ctr"/>
           <a:lstStyle/>
           <a:p>
-            <a:pPr indent="0" marL="0">
+            <a:pPr marL="0" indent="0">
               <a:buNone/>
             </a:pPr>
             <a:r>
@@ -9428,7 +10039,7 @@
           <a:bodyPr wrap="square" lIns="0" tIns="0" rIns="0" bIns="0" rtlCol="0" anchor="ctr"/>
           <a:lstStyle/>
           <a:p>
-            <a:pPr indent="0" marL="0">
+            <a:pPr marL="0" indent="0">
               <a:buNone/>
             </a:pPr>
             <a:r>
@@ -9747,4 +10358,319 @@
     </a:ext>
   </a:extLst>
 </a:theme>
+</file>
+
+<file path=ppt/theme/theme2.xml><?xml version="1.0" encoding="utf-8"?>
+<a:theme xmlns:a="http://schemas.openxmlformats.org/drawingml/2006/main" name="Office Theme">
+  <a:themeElements>
+    <a:clrScheme name="Office">
+      <a:dk1>
+        <a:sysClr val="windowText" lastClr="000000"/>
+      </a:dk1>
+      <a:lt1>
+        <a:sysClr val="window" lastClr="FFFFFF"/>
+      </a:lt1>
+      <a:dk2>
+        <a:srgbClr val="0E2841"/>
+      </a:dk2>
+      <a:lt2>
+        <a:srgbClr val="E8E8E8"/>
+      </a:lt2>
+      <a:accent1>
+        <a:srgbClr val="156082"/>
+      </a:accent1>
+      <a:accent2>
+        <a:srgbClr val="E97132"/>
+      </a:accent2>
+      <a:accent3>
+        <a:srgbClr val="196B24"/>
+      </a:accent3>
+      <a:accent4>
+        <a:srgbClr val="0F9ED5"/>
+      </a:accent4>
+      <a:accent5>
+        <a:srgbClr val="A02B93"/>
+      </a:accent5>
+      <a:accent6>
+        <a:srgbClr val="4EA72E"/>
+      </a:accent6>
+      <a:hlink>
+        <a:srgbClr val="467886"/>
+      </a:hlink>
+      <a:folHlink>
+        <a:srgbClr val="96607D"/>
+      </a:folHlink>
+    </a:clrScheme>
+    <a:fontScheme name="Office">
+      <a:majorFont>
+        <a:latin typeface="Aptos Display" panose="02110004020202020204"/>
+        <a:ea typeface=""/>
+        <a:cs typeface=""/>
+        <a:font script="Jpan" typeface="游ゴシック Light"/>
+        <a:font script="Hang" typeface="맑은 고딕"/>
+        <a:font script="Hans" typeface="等线 Light"/>
+        <a:font script="Hant" typeface="新細明體"/>
+        <a:font script="Arab" typeface="Times New Roman"/>
+        <a:font script="Hebr" typeface="Times New Roman"/>
+        <a:font script="Thai" typeface="Angsana New"/>
+        <a:font script="Ethi" typeface="Nyala"/>
+        <a:font script="Beng" typeface="Vrinda"/>
+        <a:font script="Gujr" typeface="Shruti"/>
+        <a:font script="Khmr" typeface="MoolBoran"/>
+        <a:font script="Knda" typeface="Tunga"/>
+        <a:font script="Guru" typeface="Raavi"/>
+        <a:font script="Cans" typeface="Euphemia"/>
+        <a:font script="Cher" typeface="Plantagenet Cherokee"/>
+        <a:font script="Yiii" typeface="Microsoft Yi Baiti"/>
+        <a:font script="Tibt" typeface="Microsoft Himalaya"/>
+        <a:font script="Thaa" typeface="MV Boli"/>
+        <a:font script="Deva" typeface="Mangal"/>
+        <a:font script="Telu" typeface="Gautami"/>
+        <a:font script="Taml" typeface="Latha"/>
+        <a:font script="Syrc" typeface="Estrangelo Edessa"/>
+        <a:font script="Orya" typeface="Kalinga"/>
+        <a:font script="Mlym" typeface="Kartika"/>
+        <a:font script="Laoo" typeface="DokChampa"/>
+        <a:font script="Sinh" typeface="Iskoola Pota"/>
+        <a:font script="Mong" typeface="Mongolian Baiti"/>
+        <a:font script="Viet" typeface="Times New Roman"/>
+        <a:font script="Uigh" typeface="Microsoft Uighur"/>
+        <a:font script="Geor" typeface="Sylfaen"/>
+        <a:font script="Armn" typeface="Arial"/>
+        <a:font script="Bugi" typeface="Leelawadee UI"/>
+        <a:font script="Bopo" typeface="Microsoft JhengHei"/>
+        <a:font script="Java" typeface="Javanese Text"/>
+        <a:font script="Lisu" typeface="Segoe UI"/>
+        <a:font script="Mymr" typeface="Myanmar Text"/>
+        <a:font script="Nkoo" typeface="Ebrima"/>
+        <a:font script="Olck" typeface="Nirmala UI"/>
+        <a:font script="Osma" typeface="Ebrima"/>
+        <a:font script="Phag" typeface="Phagspa"/>
+        <a:font script="Syrn" typeface="Estrangelo Edessa"/>
+        <a:font script="Syrj" typeface="Estrangelo Edessa"/>
+        <a:font script="Syre" typeface="Estrangelo Edessa"/>
+        <a:font script="Sora" typeface="Nirmala UI"/>
+        <a:font script="Tale" typeface="Microsoft Tai Le"/>
+        <a:font script="Talu" typeface="Microsoft New Tai Lue"/>
+        <a:font script="Tfng" typeface="Ebrima"/>
+      </a:majorFont>
+      <a:minorFont>
+        <a:latin typeface="Aptos" panose="02110004020202020204"/>
+        <a:ea typeface=""/>
+        <a:cs typeface=""/>
+        <a:font script="Jpan" typeface="游ゴシック"/>
+        <a:font script="Hang" typeface="맑은 고딕"/>
+        <a:font script="Hans" typeface="等线"/>
+        <a:font script="Hant" typeface="新細明體"/>
+        <a:font script="Arab" typeface="Arial"/>
+        <a:font script="Hebr" typeface="Arial"/>
+        <a:font script="Thai" typeface="Cordia New"/>
+        <a:font script="Ethi" typeface="Nyala"/>
+        <a:font script="Beng" typeface="Vrinda"/>
+        <a:font script="Gujr" typeface="Shruti"/>
+        <a:font script="Khmr" typeface="DaunPenh"/>
+        <a:font script="Knda" typeface="Tunga"/>
+        <a:font script="Guru" typeface="Raavi"/>
+        <a:font script="Cans" typeface="Euphemia"/>
+        <a:font script="Cher" typeface="Plantagenet Cherokee"/>
+        <a:font script="Yiii" typeface="Microsoft Yi Baiti"/>
+        <a:font script="Tibt" typeface="Microsoft Himalaya"/>
+        <a:font script="Thaa" typeface="MV Boli"/>
+        <a:font script="Deva" typeface="Mangal"/>
+        <a:font script="Telu" typeface="Gautami"/>
+        <a:font script="Taml" typeface="Latha"/>
+        <a:font script="Syrc" typeface="Estrangelo Edessa"/>
+        <a:font script="Orya" typeface="Kalinga"/>
+        <a:font script="Mlym" typeface="Kartika"/>
+        <a:font script="Laoo" typeface="DokChampa"/>
+        <a:font script="Sinh" typeface="Iskoola Pota"/>
+        <a:font script="Mong" typeface="Mongolian Baiti"/>
+        <a:font script="Viet" typeface="Arial"/>
+        <a:font script="Uigh" typeface="Microsoft Uighur"/>
+        <a:font script="Geor" typeface="Sylfaen"/>
+        <a:font script="Armn" typeface="Arial"/>
+        <a:font script="Bugi" typeface="Leelawadee UI"/>
+        <a:font script="Bopo" typeface="Microsoft JhengHei"/>
+        <a:font script="Java" typeface="Javanese Text"/>
+        <a:font script="Lisu" typeface="Segoe UI"/>
+        <a:font script="Mymr" typeface="Myanmar Text"/>
+        <a:font script="Nkoo" typeface="Ebrima"/>
+        <a:font script="Olck" typeface="Nirmala UI"/>
+        <a:font script="Osma" typeface="Ebrima"/>
+        <a:font script="Phag" typeface="Phagspa"/>
+        <a:font script="Syrn" typeface="Estrangelo Edessa"/>
+        <a:font script="Syrj" typeface="Estrangelo Edessa"/>
+        <a:font script="Syre" typeface="Estrangelo Edessa"/>
+        <a:font script="Sora" typeface="Nirmala UI"/>
+        <a:font script="Tale" typeface="Microsoft Tai Le"/>
+        <a:font script="Talu" typeface="Microsoft New Tai Lue"/>
+        <a:font script="Tfng" typeface="Ebrima"/>
+      </a:minorFont>
+    </a:fontScheme>
+    <a:fmtScheme name="Office">
+      <a:fillStyleLst>
+        <a:solidFill>
+          <a:schemeClr val="phClr"/>
+        </a:solidFill>
+        <a:gradFill rotWithShape="1">
+          <a:gsLst>
+            <a:gs pos="0">
+              <a:schemeClr val="phClr">
+                <a:lumMod val="110000"/>
+                <a:satMod val="105000"/>
+                <a:tint val="67000"/>
+              </a:schemeClr>
+            </a:gs>
+            <a:gs pos="50000">
+              <a:schemeClr val="phClr">
+                <a:lumMod val="105000"/>
+                <a:satMod val="103000"/>
+                <a:tint val="73000"/>
+              </a:schemeClr>
+            </a:gs>
+            <a:gs pos="100000">
+              <a:schemeClr val="phClr">
+                <a:lumMod val="105000"/>
+                <a:satMod val="109000"/>
+                <a:tint val="81000"/>
+              </a:schemeClr>
+            </a:gs>
+          </a:gsLst>
+          <a:lin ang="5400000" scaled="0"/>
+        </a:gradFill>
+        <a:gradFill rotWithShape="1">
+          <a:gsLst>
+            <a:gs pos="0">
+              <a:schemeClr val="phClr">
+                <a:satMod val="103000"/>
+                <a:lumMod val="102000"/>
+                <a:tint val="94000"/>
+              </a:schemeClr>
+            </a:gs>
+            <a:gs pos="50000">
+              <a:schemeClr val="phClr">
+                <a:satMod val="110000"/>
+                <a:lumMod val="100000"/>
+                <a:shade val="100000"/>
+              </a:schemeClr>
+            </a:gs>
+            <a:gs pos="100000">
+              <a:schemeClr val="phClr">
+                <a:lumMod val="99000"/>
+                <a:satMod val="120000"/>
+                <a:shade val="78000"/>
+              </a:schemeClr>
+            </a:gs>
+          </a:gsLst>
+          <a:lin ang="5400000" scaled="0"/>
+        </a:gradFill>
+      </a:fillStyleLst>
+      <a:lnStyleLst>
+        <a:ln w="12700" cap="flat" cmpd="sng" algn="ctr">
+          <a:solidFill>
+            <a:schemeClr val="phClr"/>
+          </a:solidFill>
+          <a:prstDash val="solid"/>
+          <a:miter lim="800000"/>
+        </a:ln>
+        <a:ln w="19050" cap="flat" cmpd="sng" algn="ctr">
+          <a:solidFill>
+            <a:schemeClr val="phClr"/>
+          </a:solidFill>
+          <a:prstDash val="solid"/>
+          <a:miter lim="800000"/>
+        </a:ln>
+        <a:ln w="25400" cap="flat" cmpd="sng" algn="ctr">
+          <a:solidFill>
+            <a:schemeClr val="phClr"/>
+          </a:solidFill>
+          <a:prstDash val="solid"/>
+          <a:miter lim="800000"/>
+        </a:ln>
+      </a:lnStyleLst>
+      <a:effectStyleLst>
+        <a:effectStyle>
+          <a:effectLst/>
+        </a:effectStyle>
+        <a:effectStyle>
+          <a:effectLst/>
+        </a:effectStyle>
+        <a:effectStyle>
+          <a:effectLst>
+            <a:outerShdw blurRad="57150" dist="19050" dir="5400000" algn="ctr" rotWithShape="0">
+              <a:srgbClr val="000000">
+                <a:alpha val="63000"/>
+              </a:srgbClr>
+            </a:outerShdw>
+          </a:effectLst>
+        </a:effectStyle>
+      </a:effectStyleLst>
+      <a:bgFillStyleLst>
+        <a:solidFill>
+          <a:schemeClr val="phClr"/>
+        </a:solidFill>
+        <a:solidFill>
+          <a:schemeClr val="phClr">
+            <a:tint val="95000"/>
+            <a:satMod val="170000"/>
+          </a:schemeClr>
+        </a:solidFill>
+        <a:gradFill rotWithShape="1">
+          <a:gsLst>
+            <a:gs pos="0">
+              <a:schemeClr val="phClr">
+                <a:tint val="93000"/>
+                <a:satMod val="150000"/>
+                <a:shade val="98000"/>
+                <a:lumMod val="102000"/>
+              </a:schemeClr>
+            </a:gs>
+            <a:gs pos="50000">
+              <a:schemeClr val="phClr">
+                <a:tint val="98000"/>
+                <a:satMod val="130000"/>
+                <a:shade val="90000"/>
+                <a:lumMod val="103000"/>
+              </a:schemeClr>
+            </a:gs>
+            <a:gs pos="100000">
+              <a:schemeClr val="phClr">
+                <a:shade val="63000"/>
+                <a:satMod val="120000"/>
+              </a:schemeClr>
+            </a:gs>
+          </a:gsLst>
+          <a:lin ang="5400000" scaled="0"/>
+        </a:gradFill>
+      </a:bgFillStyleLst>
+    </a:fmtScheme>
+  </a:themeElements>
+  <a:objectDefaults>
+    <a:lnDef>
+      <a:spPr/>
+      <a:bodyPr/>
+      <a:lstStyle/>
+      <a:style>
+        <a:lnRef idx="2">
+          <a:schemeClr val="accent1"/>
+        </a:lnRef>
+        <a:fillRef idx="0">
+          <a:schemeClr val="accent1"/>
+        </a:fillRef>
+        <a:effectRef idx="1">
+          <a:schemeClr val="accent1"/>
+        </a:effectRef>
+        <a:fontRef idx="minor">
+          <a:schemeClr val="tx1"/>
+        </a:fontRef>
+      </a:style>
+    </a:lnDef>
+  </a:objectDefaults>
+  <a:extraClrSchemeLst/>
+  <a:extLst>
+    <a:ext uri="{05A4C25C-085E-4340-85A3-A5531E510DB2}">
+      <thm15:themeFamily xmlns:thm15="http://schemas.microsoft.com/office/thememl/2012/main" name="Office Theme" id="{2E142A2C-CD16-42D6-873A-C26D2A0506FA}" vid="{1BDDFF52-6CD6-40A5-AB3C-68EB2F1E4D0A}"/>
+    </a:ext>
+  </a:extLst>
+</a:theme>
 </file>
--- a/slides/Math130Unit3C.pptx
+++ b/slides/Math130Unit3C.pptx
@@ -13,6 +13,7 @@
     <p:sldId id="258" r:id="rId4"/>
     <p:sldId id="259" r:id="rId5"/>
     <p:sldId id="260" r:id="rId6"/>
+    <p:sldId id="273" r:id="rId26"/>
     <p:sldId id="261" r:id="rId7"/>
     <p:sldId id="262" r:id="rId8"/>
     <p:sldId id="263" r:id="rId9"/>
@@ -21,6 +22,7 @@
     <p:sldId id="266" r:id="rId12"/>
     <p:sldId id="267" r:id="rId13"/>
     <p:sldId id="268" r:id="rId14"/>
+    <p:sldId id="274" r:id="rId27"/>
     <p:sldId id="269" r:id="rId15"/>
     <p:sldId id="270" r:id="rId16"/>
     <p:sldId id="271" r:id="rId17"/>
@@ -3853,195 +3855,107 @@
               <a:buNone/>
             </a:pPr>
             <a:r>
-              <a:rPr lang="en-US" sz="1300" b="1" dirty="0">
+              <a:rPr sz="1650" b="1">
                 <a:solidFill>
                   <a:srgbClr val="0891B2"/>
                 </a:solidFill>
-                <a:latin typeface="Georgia" pitchFamily="34" charset="0"/>
-                <a:ea typeface="Georgia" pitchFamily="34" charset="-122"/>
-                <a:cs typeface="Georgia" pitchFamily="34" charset="-120"/>
+                <a:latin typeface="Calibri"/>
               </a:rPr>
               <a:t>Set up two equations:</a:t>
             </a:r>
             <a:endParaRPr lang="en-US" sz="1300" dirty="0"/>
           </a:p>
           <a:p>
-            <a:pPr marL="0" indent="0">
-              <a:spcAft>
-                <a:spcPts val="100"/>
-              </a:spcAft>
-              <a:buNone/>
-            </a:pPr>
-            <a:r>
-              <a:rPr lang="en-US" sz="1300" dirty="0">
+            <a:r>
+              <a:rPr sz="1650" b="0">
                 <a:solidFill>
                   <a:srgbClr val="0891B2"/>
                 </a:solidFill>
-                <a:latin typeface="Calibri" pitchFamily="34" charset="0"/>
-                <a:ea typeface="Calibri" pitchFamily="34" charset="-122"/>
-                <a:cs typeface="Calibri" pitchFamily="34" charset="-120"/>
+                <a:latin typeface="Calibri"/>
               </a:rPr>
               <a:t>Closer: tan 53° = h / d</a:t>
             </a:r>
-            <a:endParaRPr lang="en-US" sz="1300" dirty="0"/>
-          </a:p>
-          <a:p>
-            <a:pPr marL="0" indent="0">
-              <a:spcAft>
-                <a:spcPts val="100"/>
-              </a:spcAft>
-              <a:buNone/>
-            </a:pPr>
-            <a:r>
-              <a:rPr lang="en-US" sz="1300" dirty="0">
+          </a:p>
+          <a:p>
+            <a:r>
+              <a:rPr sz="1650" b="0">
                 <a:solidFill>
                   <a:srgbClr val="F97316"/>
                 </a:solidFill>
-                <a:latin typeface="Calibri" pitchFamily="34" charset="0"/>
-                <a:ea typeface="Calibri" pitchFamily="34" charset="-122"/>
-                <a:cs typeface="Calibri" pitchFamily="34" charset="-120"/>
+                <a:latin typeface="Calibri"/>
               </a:rPr>
               <a:t>Farther: tan 31° = h / (d + 50)</a:t>
             </a:r>
-            <a:endParaRPr lang="en-US" sz="1300" dirty="0"/>
-          </a:p>
-          <a:p>
-            <a:pPr marL="0" indent="0">
-              <a:spcAft>
-                <a:spcPts val="100"/>
-              </a:spcAft>
-              <a:buNone/>
-            </a:pPr>
-            <a:endParaRPr lang="en-US" sz="1300" dirty="0"/>
-          </a:p>
-          <a:p>
-            <a:pPr marL="0" indent="0">
-              <a:spcAft>
-                <a:spcPts val="100"/>
-              </a:spcAft>
-              <a:buNone/>
-            </a:pPr>
-            <a:r>
-              <a:rPr lang="en-US" sz="1300" b="1" dirty="0">
+          </a:p>
+          <a:p/>
+          <a:p>
+            <a:r>
+              <a:rPr sz="1650" b="1">
                 <a:solidFill>
                   <a:srgbClr val="7C3AED"/>
                 </a:solidFill>
-                <a:latin typeface="Georgia" pitchFamily="34" charset="0"/>
-                <a:ea typeface="Georgia" pitchFamily="34" charset="-122"/>
-                <a:cs typeface="Georgia" pitchFamily="34" charset="-120"/>
+                <a:latin typeface="Calibri"/>
               </a:rPr>
               <a:t>Solve: h = d tan 53° = (d+50) tan 31°</a:t>
             </a:r>
-            <a:endParaRPr lang="en-US" sz="1300" dirty="0"/>
-          </a:p>
-          <a:p>
-            <a:pPr marL="0" indent="0">
-              <a:spcAft>
-                <a:spcPts val="100"/>
-              </a:spcAft>
-              <a:buNone/>
-            </a:pPr>
-            <a:r>
-              <a:rPr lang="en-US" sz="1300" dirty="0">
-                <a:solidFill>
-                  <a:srgbClr val="1E293B"/>
-                </a:solidFill>
-                <a:latin typeface="Calibri" pitchFamily="34" charset="0"/>
-                <a:ea typeface="Calibri" pitchFamily="34" charset="-122"/>
-                <a:cs typeface="Calibri" pitchFamily="34" charset="-120"/>
+          </a:p>
+          <a:p>
+            <a:r>
+              <a:rPr sz="1500">
+                <a:latin typeface="Calibri"/>
               </a:rPr>
               <a:t>d(1.327) = d(0.601) + 50(0.601)</a:t>
             </a:r>
-            <a:endParaRPr lang="en-US" sz="1300" dirty="0"/>
-          </a:p>
-          <a:p>
-            <a:pPr marL="0" indent="0">
-              <a:spcAft>
-                <a:spcPts val="100"/>
-              </a:spcAft>
-              <a:buNone/>
-            </a:pPr>
-            <a:r>
-              <a:rPr lang="en-US" sz="1300" dirty="0">
-                <a:solidFill>
-                  <a:srgbClr val="1E293B"/>
-                </a:solidFill>
-                <a:latin typeface="Calibri" pitchFamily="34" charset="0"/>
-                <a:ea typeface="Calibri" pitchFamily="34" charset="-122"/>
-                <a:cs typeface="Calibri" pitchFamily="34" charset="-120"/>
+          </a:p>
+          <a:p>
+            <a:r>
+              <a:rPr sz="1400" b="0">
+                <a:solidFill>
+                  <a:srgbClr val="64748B"/>
+                </a:solidFill>
+                <a:latin typeface="Calibri"/>
+              </a:rPr>
+              <a:t>d(1.327 − 0.601) = 50 × 0.601</a:t>
+            </a:r>
+          </a:p>
+          <a:p>
+            <a:r>
+              <a:rPr sz="1500">
+                <a:latin typeface="Calibri"/>
               </a:rPr>
               <a:t>d(0.726) = 30.04</a:t>
             </a:r>
-            <a:endParaRPr lang="en-US" sz="1300" dirty="0"/>
-          </a:p>
-          <a:p>
-            <a:pPr marL="0" indent="0">
-              <a:spcAft>
-                <a:spcPts val="100"/>
-              </a:spcAft>
-              <a:buNone/>
-            </a:pPr>
-            <a:r>
-              <a:rPr lang="en-US" sz="1400" b="1" dirty="0">
+          </a:p>
+          <a:p>
+            <a:r>
+              <a:rPr sz="1500">
+                <a:latin typeface="Calibri"/>
+              </a:rPr>
+              <a:t>d ≈ 41.4 ft</a:t>
+            </a:r>
+          </a:p>
+          <a:p/>
+          <a:p>
+            <a:r>
+              <a:rPr sz="1500" b="0">
                 <a:solidFill>
                   <a:srgbClr val="0891B2"/>
                 </a:solidFill>
-                <a:latin typeface="Calibri" pitchFamily="34" charset="0"/>
-                <a:ea typeface="Calibri" pitchFamily="34" charset="-122"/>
-                <a:cs typeface="Calibri" pitchFamily="34" charset="-120"/>
-              </a:rPr>
-              <a:t>d ≈ 41.4 ft</a:t>
-            </a:r>
-            <a:endParaRPr lang="en-US" sz="1300" dirty="0"/>
-          </a:p>
-          <a:p>
-            <a:pPr marL="0" indent="0">
-              <a:spcAft>
-                <a:spcPts val="100"/>
-              </a:spcAft>
-              <a:buNone/>
-            </a:pPr>
-            <a:endParaRPr lang="en-US" sz="1300" dirty="0"/>
-          </a:p>
-          <a:p>
-            <a:pPr marL="0" indent="0">
-              <a:spcAft>
-                <a:spcPts val="100"/>
-              </a:spcAft>
-              <a:buNone/>
-            </a:pPr>
-            <a:r>
-              <a:rPr lang="en-US" sz="1300" dirty="0">
-                <a:solidFill>
-                  <a:srgbClr val="1E293B"/>
-                </a:solidFill>
-                <a:latin typeface="Calibri" pitchFamily="34" charset="0"/>
-                <a:ea typeface="Calibri" pitchFamily="34" charset="-122"/>
-                <a:cs typeface="Calibri" pitchFamily="34" charset="-120"/>
+                <a:latin typeface="Calibri"/>
               </a:rPr>
               <a:t>h = 41.4 × tan 53° ≈ 41.4 × 1.327</a:t>
             </a:r>
-            <a:endParaRPr lang="en-US" sz="1300" dirty="0"/>
-          </a:p>
-          <a:p>
-            <a:pPr marL="0" indent="0">
-              <a:spcAft>
-                <a:spcPts val="100"/>
-              </a:spcAft>
-              <a:buNone/>
-            </a:pPr>
-            <a:r>
-              <a:rPr lang="en-US" sz="1700" b="1" dirty="0">
+          </a:p>
+          <a:p>
+            <a:r>
+              <a:rPr sz="1650" b="1">
                 <a:solidFill>
                   <a:srgbClr val="F97316"/>
                 </a:solidFill>
-                <a:latin typeface="Georgia" pitchFamily="34" charset="0"/>
-                <a:ea typeface="Georgia" pitchFamily="34" charset="-122"/>
-                <a:cs typeface="Georgia" pitchFamily="34" charset="-120"/>
+                <a:latin typeface="Calibri"/>
               </a:rPr>
               <a:t>h ≈ 54.9 ft</a:t>
             </a:r>
-            <a:endParaRPr lang="en-US" sz="1300" dirty="0"/>
           </a:p>
         </p:txBody>
       </p:sp>
@@ -5098,7 +5012,7 @@
             <a:r>
               <a:rPr lang="en-US" sz="1400" b="1" dirty="0">
                 <a:solidFill>
-                  <a:srgbClr val="F97316"/>
+                  <a:srgbClr val="059669"/>
                 </a:solidFill>
                 <a:latin typeface="Calibri" pitchFamily="34" charset="0"/>
                 <a:ea typeface="Calibri" pitchFamily="34" charset="-122"/>
@@ -5993,8 +5907,8 @@
         </p:nvSpPr>
         <p:spPr>
           <a:xfrm>
-            <a:off x="731520" y="4572000"/>
-            <a:ext cx="7315200" cy="365760"/>
+            <a:off x="731520" y="4407408"/>
+            <a:ext cx="7315200" cy="411480"/>
           </a:xfrm>
           <a:prstGeom prst="rect">
             <a:avLst/>
@@ -6010,9 +5924,9 @@
               <a:buNone/>
             </a:pPr>
             <a:r>
-              <a:rPr lang="en-US" sz="1300" i="1" dirty="0">
-                <a:solidFill>
-                  <a:srgbClr val="64748B"/>
+              <a:rPr lang="en-US" sz="1500" i="0" dirty="0" b="1">
+                <a:solidFill>
+                  <a:srgbClr val="0891B2"/>
                 </a:solidFill>
                 <a:latin typeface="Calibri" pitchFamily="34" charset="0"/>
                 <a:ea typeface="Calibri" pitchFamily="34" charset="-122"/>
@@ -6024,6 +5938,541 @@
           </a:p>
         </p:txBody>
       </p:sp>
+    </p:spTree>
+  </p:cSld>
+  <p:clrMapOvr>
+    <a:masterClrMapping/>
+  </p:clrMapOvr>
+</p:sld>
+</file>
+
+<file path=ppt/slides/slide18.xml><?xml version="1.0" encoding="utf-8"?>
+<p:sld xmlns:a="http://schemas.openxmlformats.org/drawingml/2006/main" xmlns:p="http://schemas.openxmlformats.org/presentationml/2006/main" xmlns:r="http://schemas.openxmlformats.org/officeDocument/2006/relationships">
+  <p:cSld>
+    <p:spTree>
+      <p:nvGrpSpPr>
+        <p:cNvPr id="1" name=""/>
+        <p:cNvGrpSpPr/>
+        <p:nvPr/>
+      </p:nvGrpSpPr>
+      <p:grpSpPr/>
+      <p:sp>
+        <p:nvSpPr>
+          <p:cNvPr id="2" name="Text 0"/>
+          <p:cNvSpPr/>
+          <p:nvPr/>
+        </p:nvSpPr>
+        <p:spPr>
+          <a:xfrm>
+            <a:off x="548640" y="274320"/>
+            <a:ext cx="8229600" cy="548640"/>
+          </a:xfrm>
+          <a:prstGeom prst="rect">
+            <a:avLst/>
+          </a:prstGeom>
+          <a:noFill/>
+          <a:ln/>
+        </p:spPr>
+        <p:txBody>
+          <a:bodyPr wrap="square" lIns="0" tIns="0" rIns="0" bIns="0" rtlCol="0" anchor="ctr"/>
+          <a:lstStyle/>
+          <a:p>
+            <a:pPr marL="0" indent="0">
+              <a:buNone/>
+            </a:pPr>
+            <a:r>
+              <a:rPr sz="3300" b="1">
+                <a:solidFill>
+                  <a:srgbClr val="1E3A5F"/>
+                </a:solidFill>
+                <a:latin typeface="Georgia"/>
+              </a:rPr>
+              <a:t>Word Problem — One Right Triangle</a:t>
+            </a:r>
+            <a:endParaRPr lang="en-US" sz="2800" dirty="0"/>
+          </a:p>
+        </p:txBody>
+      </p:sp>
+      <p:sp>
+        <p:nvSpPr>
+          <p:cNvPr id="3" name="Shape 1"/>
+          <p:cNvSpPr/>
+          <p:nvPr/>
+        </p:nvSpPr>
+        <p:spPr>
+          <a:xfrm>
+            <a:off x="457200" y="868680"/>
+            <a:ext cx="8229600" cy="502920"/>
+          </a:xfrm>
+          <a:prstGeom prst="rect">
+            <a:avLst/>
+          </a:prstGeom>
+          <a:solidFill>
+            <a:srgbClr val="0F2B46"/>
+          </a:solidFill>
+          <a:ln/>
+        </p:spPr>
+        <p:txBody>
+          <a:bodyPr/>
+          <a:lstStyle/>
+          <a:p>
+            <a:endParaRPr lang="en-US"/>
+          </a:p>
+        </p:txBody>
+      </p:sp>
+      <p:sp>
+        <p:nvSpPr>
+          <p:cNvPr id="4" name="Text 2"/>
+          <p:cNvSpPr/>
+          <p:nvPr/>
+        </p:nvSpPr>
+        <p:spPr>
+          <a:xfrm>
+            <a:off x="640080" y="868680"/>
+            <a:ext cx="7772400" cy="502920"/>
+          </a:xfrm>
+          <a:prstGeom prst="rect">
+            <a:avLst/>
+          </a:prstGeom>
+          <a:noFill/>
+          <a:ln/>
+        </p:spPr>
+        <p:txBody>
+          <a:bodyPr wrap="square" lIns="0" tIns="0" rIns="0" bIns="0" rtlCol="0" anchor="ctr"/>
+          <a:lstStyle/>
+          <a:p>
+            <a:pPr marL="0" indent="0">
+              <a:buNone/>
+            </a:pPr>
+            <a:r>
+              <a:rPr sz="1700" b="0">
+                <a:solidFill>
+                  <a:srgbClr val="FFFFFF"/>
+                </a:solidFill>
+                <a:latin typeface="Calibri"/>
+              </a:rPr>
+              <a:t>A 20 ft ladder leans against a wall at 65° from the ground. How high up the wall does it reach?</a:t>
+            </a:r>
+            <a:endParaRPr lang="en-US" sz="1500" dirty="0"/>
+          </a:p>
+        </p:txBody>
+      </p:sp>
+      <p:sp>
+        <p:nvSpPr>
+          <p:cNvPr id="6" name="Text 4"/>
+          <p:cNvSpPr/>
+          <p:nvPr/>
+        </p:nvSpPr>
+        <p:spPr>
+          <a:xfrm>
+            <a:off x="640080" y="1737360"/>
+            <a:ext cx="7680960" cy="2286000"/>
+          </a:xfrm>
+          <a:prstGeom prst="rect">
+            <a:avLst/>
+          </a:prstGeom>
+          <a:noFill/>
+          <a:ln/>
+        </p:spPr>
+        <p:txBody>
+          <a:bodyPr wrap="square" rtlCol="0" anchor="ctr"/>
+          <a:lstStyle/>
+          <a:p>
+            <a:pPr marL="0" indent="0">
+              <a:spcAft>
+                <a:spcPts val="300"/>
+              </a:spcAft>
+              <a:buNone/>
+            </a:pPr>
+            <a:r>
+              <a:rPr sz="1700" b="1">
+                <a:solidFill>
+                  <a:srgbClr val="0891B2"/>
+                </a:solidFill>
+                <a:latin typeface="Calibri"/>
+              </a:rPr>
+              <a:t>Step 1: Identify</a:t>
+            </a:r>
+            <a:endParaRPr lang="en-US" sz="1500" dirty="0"/>
+          </a:p>
+          <a:p>
+            <a:r>
+              <a:rPr sz="1600">
+                <a:latin typeface="Calibri"/>
+              </a:rPr>
+              <a:t>Hyp = 20 ft,  angle = 65°,  find opposite (wall height) → use sin (SOH)</a:t>
+            </a:r>
+          </a:p>
+          <a:p/>
+          <a:p>
+            <a:r>
+              <a:rPr sz="1700" b="1">
+                <a:solidFill>
+                  <a:srgbClr val="F97316"/>
+                </a:solidFill>
+                <a:latin typeface="Calibri"/>
+              </a:rPr>
+              <a:t>Step 2: Set up</a:t>
+            </a:r>
+          </a:p>
+          <a:p>
+            <a:r>
+              <a:rPr sz="1700">
+                <a:latin typeface="Calibri"/>
+              </a:rPr>
+              <a:t>sin 65° = h / 20</a:t>
+            </a:r>
+          </a:p>
+          <a:p/>
+          <a:p>
+            <a:r>
+              <a:rPr sz="1700" b="1">
+                <a:solidFill>
+                  <a:srgbClr val="7C3AED"/>
+                </a:solidFill>
+                <a:latin typeface="Calibri"/>
+              </a:rPr>
+              <a:t>Step 3: Solve</a:t>
+            </a:r>
+          </a:p>
+          <a:p>
+            <a:r>
+              <a:rPr sz="1700">
+                <a:latin typeface="Calibri"/>
+              </a:rPr>
+              <a:t>h = 20 × sin 65° = 20 × 0.9063 ≈ 18.1 ft</a:t>
+            </a:r>
+          </a:p>
+          <a:p/>
+          <a:p>
+            <a:r>
+              <a:rPr sz="1700" b="1">
+                <a:solidFill>
+                  <a:srgbClr val="059669"/>
+                </a:solidFill>
+                <a:latin typeface="Calibri"/>
+              </a:rPr>
+              <a:t>Check:</a:t>
+            </a:r>
+          </a:p>
+          <a:p>
+            <a:r>
+              <a:rPr sz="1500" b="0">
+                <a:latin typeface="Calibri"/>
+              </a:rPr>
+              <a:t>18.1 &lt; 20 ✓ (opposite &lt; hypotenuse)</a:t>
+            </a:r>
+          </a:p>
+        </p:txBody>
+      </p:sp>
+      <p:pic>
+        <p:nvPicPr>
+          <p:cNvPr id="7" name="Picture 6" descr="s_skill2_ladder.png"/>
+          <p:cNvPicPr>
+            <a:picLocks noChangeAspect="1"/>
+          </p:cNvPicPr>
+          <p:nvPr/>
+        </p:nvPicPr>
+        <p:blipFill>
+          <a:blip r:embed="rId2"/>
+          <a:stretch>
+            <a:fillRect/>
+          </a:stretch>
+        </p:blipFill>
+        <p:spPr>
+          <a:xfrm>
+            <a:off x="457200" y="1417321"/>
+            <a:ext cx="8229600" cy="3031308"/>
+          </a:xfrm>
+          <a:prstGeom prst="rect">
+            <a:avLst/>
+          </a:prstGeom>
+        </p:spPr>
+      </p:pic>
+    </p:spTree>
+  </p:cSld>
+  <p:clrMapOvr>
+    <a:masterClrMapping/>
+  </p:clrMapOvr>
+</p:sld>
+</file>
+
+<file path=ppt/slides/slide19.xml><?xml version="1.0" encoding="utf-8"?>
+<p:sld xmlns:a="http://schemas.openxmlformats.org/drawingml/2006/main" xmlns:p="http://schemas.openxmlformats.org/presentationml/2006/main" xmlns:r="http://schemas.openxmlformats.org/officeDocument/2006/relationships">
+  <p:cSld>
+    <p:spTree>
+      <p:nvGrpSpPr>
+        <p:cNvPr id="1" name=""/>
+        <p:cNvGrpSpPr/>
+        <p:nvPr/>
+      </p:nvGrpSpPr>
+      <p:grpSpPr/>
+      <p:sp>
+        <p:nvSpPr>
+          <p:cNvPr id="2" name="Text 0"/>
+          <p:cNvSpPr/>
+          <p:nvPr/>
+        </p:nvSpPr>
+        <p:spPr>
+          <a:xfrm>
+            <a:off x="548640" y="182880"/>
+            <a:ext cx="8229600" cy="548640"/>
+          </a:xfrm>
+          <a:prstGeom prst="rect">
+            <a:avLst/>
+          </a:prstGeom>
+          <a:noFill/>
+          <a:ln/>
+        </p:spPr>
+        <p:txBody>
+          <a:bodyPr wrap="square" lIns="0" tIns="0" rIns="0" bIns="0" rtlCol="0" anchor="ctr"/>
+          <a:lstStyle/>
+          <a:p>
+            <a:pPr marL="0" indent="0">
+              <a:buNone/>
+            </a:pPr>
+            <a:r>
+              <a:rPr sz="3600" b="1">
+                <a:solidFill>
+                  <a:srgbClr val="1E3A5F"/>
+                </a:solidFill>
+                <a:latin typeface="Georgia"/>
+              </a:rPr>
+              <a:t>You Try</a:t>
+            </a:r>
+            <a:endParaRPr lang="en-US" sz="2600" dirty="0"/>
+          </a:p>
+        </p:txBody>
+      </p:sp>
+      <p:sp>
+        <p:nvSpPr>
+          <p:cNvPr id="3" name="Shape 1"/>
+          <p:cNvSpPr/>
+          <p:nvPr/>
+        </p:nvSpPr>
+        <p:spPr>
+          <a:xfrm>
+            <a:off x="457200" y="731520"/>
+            <a:ext cx="8229600" cy="548640"/>
+          </a:xfrm>
+          <a:prstGeom prst="rect">
+            <a:avLst/>
+          </a:prstGeom>
+          <a:solidFill>
+            <a:srgbClr val="0F2B46"/>
+          </a:solidFill>
+          <a:ln/>
+        </p:spPr>
+        <p:txBody>
+          <a:bodyPr/>
+          <a:lstStyle/>
+          <a:p>
+            <a:endParaRPr lang="en-US"/>
+          </a:p>
+        </p:txBody>
+      </p:sp>
+      <p:sp>
+        <p:nvSpPr>
+          <p:cNvPr id="4" name="Text 2"/>
+          <p:cNvSpPr/>
+          <p:nvPr/>
+        </p:nvSpPr>
+        <p:spPr>
+          <a:xfrm>
+            <a:off x="640080" y="731520"/>
+            <a:ext cx="7772400" cy="548640"/>
+          </a:xfrm>
+          <a:prstGeom prst="rect">
+            <a:avLst/>
+          </a:prstGeom>
+          <a:noFill/>
+          <a:ln/>
+        </p:spPr>
+        <p:txBody>
+          <a:bodyPr wrap="square" lIns="0" tIns="0" rIns="0" bIns="0" rtlCol="0" anchor="ctr"/>
+          <a:lstStyle/>
+          <a:p>
+            <a:pPr marL="0" indent="0">
+              <a:buNone/>
+            </a:pPr>
+            <a:r>
+              <a:rPr sz="1600" b="0">
+                <a:solidFill>
+                  <a:srgbClr val="FFFFFF"/>
+                </a:solidFill>
+                <a:latin typeface="Calibri"/>
+              </a:rPr>
+              <a:t>A surveyor stands 80 ft from a building. The angle of elevation to the roof is 42°. Find the building height.</a:t>
+            </a:r>
+            <a:endParaRPr lang="en-US" sz="1300" dirty="0"/>
+          </a:p>
+        </p:txBody>
+      </p:sp>
+      <p:sp>
+        <p:nvSpPr>
+          <p:cNvPr id="6" name="Shape 3"/>
+          <p:cNvSpPr/>
+          <p:nvPr/>
+        </p:nvSpPr>
+        <p:spPr>
+          <a:xfrm>
+            <a:off x="274320" y="1417320"/>
+            <a:ext cx="4297680" cy="3291840"/>
+          </a:xfrm>
+          <a:prstGeom prst="rect">
+            <a:avLst/>
+          </a:prstGeom>
+          <a:solidFill>
+            <a:srgbClr val="FFFFFF"/>
+          </a:solidFill>
+          <a:ln/>
+          <a:effectLst>
+            <a:outerShdw blurRad="76200" dist="25400" dir="8100000" algn="bl" rotWithShape="0">
+              <a:srgbClr val="000000">
+                <a:alpha val="10000"/>
+              </a:srgbClr>
+            </a:outerShdw>
+          </a:effectLst>
+        </p:spPr>
+        <p:txBody>
+          <a:bodyPr/>
+          <a:lstStyle/>
+          <a:p>
+            <a:endParaRPr lang="en-US"/>
+          </a:p>
+        </p:txBody>
+      </p:sp>
+      <p:sp>
+        <p:nvSpPr>
+          <p:cNvPr id="7" name="Text 4"/>
+          <p:cNvSpPr/>
+          <p:nvPr/>
+        </p:nvSpPr>
+        <p:spPr>
+          <a:xfrm>
+            <a:off x="457200" y="1554480"/>
+            <a:ext cx="3931920" cy="3017520"/>
+          </a:xfrm>
+          <a:prstGeom prst="rect">
+            <a:avLst/>
+          </a:prstGeom>
+          <a:noFill/>
+          <a:ln/>
+        </p:spPr>
+        <p:txBody>
+          <a:bodyPr wrap="square" rtlCol="0" anchor="ctr"/>
+          <a:lstStyle/>
+          <a:p>
+            <a:pPr marL="0" indent="0">
+              <a:spcAft>
+                <a:spcPts val="100"/>
+              </a:spcAft>
+              <a:buNone/>
+            </a:pPr>
+            <a:r>
+              <a:rPr sz="1700" b="1">
+                <a:solidFill>
+                  <a:srgbClr val="0891B2"/>
+                </a:solidFill>
+                <a:latin typeface="Calibri"/>
+              </a:rPr>
+              <a:t>Set up:</a:t>
+            </a:r>
+            <a:endParaRPr lang="en-US" sz="1300" dirty="0"/>
+          </a:p>
+          <a:p>
+            <a:r>
+              <a:rPr sz="1700">
+                <a:latin typeface="Calibri"/>
+              </a:rPr>
+              <a:t>tan 42° = h / 80</a:t>
+            </a:r>
+          </a:p>
+          <a:p/>
+          <a:p>
+            <a:r>
+              <a:rPr sz="1700" b="1">
+                <a:solidFill>
+                  <a:srgbClr val="7C3AED"/>
+                </a:solidFill>
+                <a:latin typeface="Calibri"/>
+              </a:rPr>
+              <a:t>Solve:</a:t>
+            </a:r>
+          </a:p>
+          <a:p>
+            <a:r>
+              <a:rPr sz="1700">
+                <a:latin typeface="Calibri"/>
+              </a:rPr>
+              <a:t>h = 80 × tan 42°</a:t>
+            </a:r>
+          </a:p>
+          <a:p>
+            <a:r>
+              <a:rPr sz="1700">
+                <a:latin typeface="Calibri"/>
+              </a:rPr>
+              <a:t>h = 80 × 0.9004</a:t>
+            </a:r>
+          </a:p>
+          <a:p>
+            <a:r>
+              <a:rPr sz="1800" b="1">
+                <a:solidFill>
+                  <a:srgbClr val="F97316"/>
+                </a:solidFill>
+                <a:latin typeface="Calibri"/>
+              </a:rPr>
+              <a:t>h ≈ 72.0 ft</a:t>
+            </a:r>
+          </a:p>
+          <a:p/>
+          <a:p>
+            <a:r>
+              <a:rPr sz="1700" b="1">
+                <a:solidFill>
+                  <a:srgbClr val="059669"/>
+                </a:solidFill>
+                <a:latin typeface="Calibri"/>
+              </a:rPr>
+              <a:t>Check:</a:t>
+            </a:r>
+          </a:p>
+          <a:p>
+            <a:r>
+              <a:rPr sz="1400" b="0">
+                <a:latin typeface="Calibri"/>
+              </a:rPr>
+              <a:t>72.0 ft &lt; 80 ft  ✓  (height &lt; base distance for 42° &lt; 45°)</a:t>
+            </a:r>
+          </a:p>
+        </p:txBody>
+      </p:sp>
+      <p:pic>
+        <p:nvPicPr>
+          <p:cNvPr id="8" name="Picture 7" descr="s_you_try.png"/>
+          <p:cNvPicPr>
+            <a:picLocks noChangeAspect="1"/>
+          </p:cNvPicPr>
+          <p:nvPr/>
+        </p:nvPicPr>
+        <p:blipFill>
+          <a:blip r:embed="rId2"/>
+          <a:stretch>
+            <a:fillRect/>
+          </a:stretch>
+        </p:blipFill>
+        <p:spPr>
+          <a:xfrm>
+            <a:off x="4754880" y="1188720"/>
+            <a:ext cx="4206240" cy="3108960"/>
+          </a:xfrm>
+          <a:prstGeom prst="rect">
+            <a:avLst/>
+          </a:prstGeom>
+        </p:spPr>
+      </p:pic>
     </p:spTree>
   </p:cSld>
   <p:clrMapOvr>
@@ -8784,115 +9233,86 @@
               <a:buNone/>
             </a:pPr>
             <a:r>
-              <a:rPr lang="en-US" sz="1500" dirty="0">
-                <a:solidFill>
-                  <a:srgbClr val="1E293B"/>
-                </a:solidFill>
-                <a:latin typeface="Calibri" pitchFamily="34" charset="0"/>
-                <a:ea typeface="Calibri" pitchFamily="34" charset="-122"/>
-                <a:cs typeface="Calibri" pitchFamily="34" charset="-120"/>
+              <a:rPr sz="1800">
+                <a:latin typeface="Calibri"/>
               </a:rPr>
               <a:t>sin A = opp / hyp = 7 / 15 ≈ 0.4667</a:t>
             </a:r>
             <a:endParaRPr lang="en-US" sz="1500" dirty="0"/>
           </a:p>
-          <a:p>
-            <a:pPr marL="0" indent="0">
-              <a:spcAft>
-                <a:spcPts val="300"/>
-              </a:spcAft>
-              <a:buNone/>
-            </a:pPr>
-            <a:endParaRPr lang="en-US" sz="1500" dirty="0"/>
-          </a:p>
-          <a:p>
-            <a:pPr marL="0" indent="0">
-              <a:spcAft>
-                <a:spcPts val="300"/>
-              </a:spcAft>
-              <a:buNone/>
-            </a:pPr>
-            <a:r>
-              <a:rPr lang="en-US" sz="1600" dirty="0">
-                <a:solidFill>
-                  <a:srgbClr val="1E293B"/>
-                </a:solidFill>
-                <a:latin typeface="Calibri" pitchFamily="34" charset="0"/>
-                <a:ea typeface="Calibri" pitchFamily="34" charset="-122"/>
-                <a:cs typeface="Calibri" pitchFamily="34" charset="-120"/>
+          <a:p/>
+          <a:p>
+            <a:r>
+              <a:rPr sz="1800">
+                <a:latin typeface="Calibri"/>
               </a:rPr>
               <a:t>A = sin⁻¹(0.4667)</a:t>
             </a:r>
-            <a:endParaRPr lang="en-US" sz="1500" dirty="0"/>
-          </a:p>
-          <a:p>
-            <a:pPr marL="0" indent="0">
-              <a:spcAft>
-                <a:spcPts val="300"/>
-              </a:spcAft>
-              <a:buNone/>
-            </a:pPr>
-            <a:r>
-              <a:rPr lang="en-US" sz="2000" b="1" dirty="0">
+          </a:p>
+          <a:p>
+            <a:r>
+              <a:rPr sz="2000" b="1">
                 <a:solidFill>
                   <a:srgbClr val="F97316"/>
                 </a:solidFill>
-                <a:latin typeface="Georgia" pitchFamily="34" charset="0"/>
-                <a:ea typeface="Georgia" pitchFamily="34" charset="-122"/>
-                <a:cs typeface="Georgia" pitchFamily="34" charset="-120"/>
+                <a:latin typeface="Calibri"/>
               </a:rPr>
               <a:t>A ≈ 27.8°</a:t>
             </a:r>
-            <a:endParaRPr lang="en-US" sz="1500" dirty="0"/>
-          </a:p>
-          <a:p>
-            <a:pPr marL="0" indent="0">
-              <a:spcAft>
-                <a:spcPts val="300"/>
-              </a:spcAft>
-              <a:buNone/>
-            </a:pPr>
-            <a:endParaRPr lang="en-US" sz="1500" dirty="0"/>
-          </a:p>
-          <a:p>
-            <a:pPr marL="0" indent="0">
-              <a:spcAft>
-                <a:spcPts val="300"/>
-              </a:spcAft>
-              <a:buNone/>
-            </a:pPr>
-            <a:r>
-              <a:rPr lang="en-US" sz="1300" i="1" dirty="0">
+          </a:p>
+          <a:p/>
+          <a:p>
+            <a:r>
+              <a:rPr sz="1400" b="0">
                 <a:solidFill>
                   <a:srgbClr val="64748B"/>
                 </a:solidFill>
-                <a:latin typeface="Calibri" pitchFamily="34" charset="0"/>
-                <a:ea typeface="Calibri" pitchFamily="34" charset="-122"/>
-                <a:cs typeface="Calibri" pitchFamily="34" charset="-120"/>
+                <a:latin typeface="Calibri"/>
               </a:rPr>
               <a:t>Use sin⁻¹ (arcsin), cos⁻¹, or tan⁻¹ to find angles.</a:t>
             </a:r>
-            <a:endParaRPr lang="en-US" sz="1500" dirty="0"/>
-          </a:p>
-          <a:p>
-            <a:pPr marL="0" indent="0">
-              <a:spcAft>
-                <a:spcPts val="300"/>
-              </a:spcAft>
-              <a:buNone/>
-            </a:pPr>
-            <a:r>
-              <a:rPr lang="en-US" sz="1300" b="1" dirty="0">
+          </a:p>
+        </p:txBody>
+      </p:sp>
+      <p:sp>
+        <p:nvSpPr>
+          <p:cNvPr id="8" name="TextBox 7"/>
+          <p:cNvSpPr txBox="1"/>
+          <p:nvPr/>
+        </p:nvSpPr>
+        <p:spPr>
+          <a:xfrm>
+            <a:off x="640080" y="3520440"/>
+            <a:ext cx="4572000" cy="594360"/>
+          </a:xfrm>
+          <a:prstGeom prst="rect">
+            <a:avLst/>
+          </a:prstGeom>
+          <a:solidFill>
+            <a:srgbClr val="FFEDED"/>
+          </a:solidFill>
+          <a:ln w="19050">
+            <a:solidFill>
+              <a:srgbClr val="DC2626"/>
+            </a:solidFill>
+          </a:ln>
+        </p:spPr>
+        <p:txBody>
+          <a:bodyPr wrap="square">
+            <a:spAutoFit/>
+          </a:bodyPr>
+          <a:lstStyle/>
+          <a:p>
+            <a:pPr algn="ctr"/>
+            <a:r>
+              <a:rPr sz="1500" b="1">
                 <a:solidFill>
                   <a:srgbClr val="DC2626"/>
                 </a:solidFill>
-                <a:latin typeface="Calibri" pitchFamily="34" charset="0"/>
-                <a:ea typeface="Calibri" pitchFamily="34" charset="-122"/>
-                <a:cs typeface="Calibri" pitchFamily="34" charset="-120"/>
-              </a:rPr>
-              <a:t>Make sure calculator is in DEGREE mode!</a:t>
-            </a:r>
-            <a:endParaRPr lang="en-US" sz="1500" dirty="0"/>
+                <a:latin typeface="Calibri"/>
+              </a:rPr>
+              <a:t>⚠  Calculator must be in DEGREE mode when using inverse trig!</a:t>
+            </a:r>
           </a:p>
         </p:txBody>
       </p:sp>
@@ -9449,7 +9869,7 @@
             <a:r>
               <a:rPr lang="en-US" sz="1300" i="1" dirty="0">
                 <a:solidFill>
-                  <a:srgbClr val="64748B"/>
+                  <a:srgbClr val="0891B2"/>
                 </a:solidFill>
                 <a:latin typeface="Calibri" pitchFamily="34" charset="0"/>
                 <a:ea typeface="Calibri" pitchFamily="34" charset="-122"/>
@@ -10006,7 +10426,7 @@
             <a:r>
               <a:rPr lang="en-US" sz="1400" b="1" dirty="0">
                 <a:solidFill>
-                  <a:srgbClr val="7C3AED"/>
+                  <a:srgbClr val="0891B2"/>
                 </a:solidFill>
                 <a:latin typeface="Georgia" pitchFamily="34" charset="0"/>
                 <a:ea typeface="Georgia" pitchFamily="34" charset="-122"/>

--- a/slides/Math130Unit3C.pptx
+++ b/slides/Math130Unit3C.pptx
@@ -5,7 +5,7 @@
     <p:sldMasterId id="2147483648" r:id="rId1"/>
   </p:sldMasterIdLst>
   <p:notesMasterIdLst>
-    <p:notesMasterId r:id="rId19"/>
+    <p:notesMasterId r:id="rId21"/>
   </p:notesMasterIdLst>
   <p:sldIdLst>
     <p:sldId id="256" r:id="rId2"/>
@@ -13,20 +13,20 @@
     <p:sldId id="258" r:id="rId4"/>
     <p:sldId id="259" r:id="rId5"/>
     <p:sldId id="260" r:id="rId6"/>
-    <p:sldId id="273" r:id="rId26"/>
-    <p:sldId id="261" r:id="rId7"/>
-    <p:sldId id="262" r:id="rId8"/>
-    <p:sldId id="263" r:id="rId9"/>
-    <p:sldId id="264" r:id="rId10"/>
-    <p:sldId id="265" r:id="rId11"/>
-    <p:sldId id="266" r:id="rId12"/>
-    <p:sldId id="267" r:id="rId13"/>
-    <p:sldId id="268" r:id="rId14"/>
-    <p:sldId id="274" r:id="rId27"/>
-    <p:sldId id="269" r:id="rId15"/>
-    <p:sldId id="270" r:id="rId16"/>
-    <p:sldId id="271" r:id="rId17"/>
-    <p:sldId id="272" r:id="rId18"/>
+    <p:sldId id="273" r:id="rId7"/>
+    <p:sldId id="261" r:id="rId8"/>
+    <p:sldId id="262" r:id="rId9"/>
+    <p:sldId id="263" r:id="rId10"/>
+    <p:sldId id="264" r:id="rId11"/>
+    <p:sldId id="265" r:id="rId12"/>
+    <p:sldId id="266" r:id="rId13"/>
+    <p:sldId id="267" r:id="rId14"/>
+    <p:sldId id="268" r:id="rId15"/>
+    <p:sldId id="274" r:id="rId16"/>
+    <p:sldId id="269" r:id="rId17"/>
+    <p:sldId id="270" r:id="rId18"/>
+    <p:sldId id="271" r:id="rId19"/>
+    <p:sldId id="272" r:id="rId20"/>
   </p:sldIdLst>
   <p:sldSz cx="9144000" cy="5143500" type="screen16x9"/>
   <p:notesSz cx="5143500" cy="9144000"/>
@@ -130,20 +130,12 @@
 </p:presentation>
 </file>
 
-<file path=ppt/revisionInfo.xml><?xml version="1.0" encoding="utf-8"?>
-<p1510:revInfo xmlns:a="http://schemas.openxmlformats.org/drawingml/2006/main" xmlns:r="http://schemas.openxmlformats.org/officeDocument/2006/relationships" xmlns:p1510="http://schemas.microsoft.com/office/powerpoint/2015/10/main">
-  <p1510:revLst>
-    <p1510:client id="{C35CE9CF-3D04-4E3A-BFCC-DE1F19C2B57D}" v="2" dt="2026-04-15T19:10:35.220"/>
-  </p1510:revLst>
-</p1510:revInfo>
-</file>
-
 <file path=ppt/changesInfos/changesInfo1.xml><?xml version="1.0" encoding="utf-8"?>
 <pc:chgInfo xmlns:a="http://schemas.openxmlformats.org/drawingml/2006/main" xmlns:r="http://schemas.openxmlformats.org/officeDocument/2006/relationships" xmlns:ac="http://schemas.microsoft.com/office/drawing/2013/main/command" xmlns:pc="http://schemas.microsoft.com/office/powerpoint/2013/main/command">
   <pc:docChgLst>
     <pc:chgData name="Volk, Andrew Harrison (General Math and Science)" userId="d2898ccd-3028-4ee4-8f2f-5598df4c43dc" providerId="ADAL" clId="{D0EF2AF6-1D9C-4815-94DD-A346A16C3C87}"/>
     <pc:docChg chg="undo custSel modSld">
-      <pc:chgData name="Volk, Andrew Harrison (General Math and Science)" userId="d2898ccd-3028-4ee4-8f2f-5598df4c43dc" providerId="ADAL" clId="{D0EF2AF6-1D9C-4815-94DD-A346A16C3C87}" dt="2026-04-15T19:12:55.913" v="11" actId="1076"/>
+      <pc:chgData name="Volk, Andrew Harrison (General Math and Science)" userId="d2898ccd-3028-4ee4-8f2f-5598df4c43dc" providerId="ADAL" clId="{D0EF2AF6-1D9C-4815-94DD-A346A16C3C87}" dt="2026-04-20T19:10:18.570" v="27" actId="1076"/>
       <pc:docMkLst>
         <pc:docMk/>
       </pc:docMkLst>
@@ -186,6 +178,59 @@
         </pc:spChg>
       </pc:sldChg>
       <pc:sldChg chg="modSp mod">
+        <pc:chgData name="Volk, Andrew Harrison (General Math and Science)" userId="d2898ccd-3028-4ee4-8f2f-5598df4c43dc" providerId="ADAL" clId="{D0EF2AF6-1D9C-4815-94DD-A346A16C3C87}" dt="2026-04-20T19:09:42.522" v="18" actId="1076"/>
+        <pc:sldMkLst>
+          <pc:docMk/>
+          <pc:sldMk cId="0" sldId="261"/>
+        </pc:sldMkLst>
+        <pc:spChg chg="mod">
+          <ac:chgData name="Volk, Andrew Harrison (General Math and Science)" userId="d2898ccd-3028-4ee4-8f2f-5598df4c43dc" providerId="ADAL" clId="{D0EF2AF6-1D9C-4815-94DD-A346A16C3C87}" dt="2026-04-20T19:09:42.522" v="18" actId="1076"/>
+          <ac:spMkLst>
+            <pc:docMk/>
+            <pc:sldMk cId="0" sldId="261"/>
+            <ac:spMk id="8" creationId="{00000000-0000-0000-0000-000000000000}"/>
+          </ac:spMkLst>
+        </pc:spChg>
+        <pc:picChg chg="mod">
+          <ac:chgData name="Volk, Andrew Harrison (General Math and Science)" userId="d2898ccd-3028-4ee4-8f2f-5598df4c43dc" providerId="ADAL" clId="{D0EF2AF6-1D9C-4815-94DD-A346A16C3C87}" dt="2026-04-20T19:09:38.869" v="17" actId="1076"/>
+          <ac:picMkLst>
+            <pc:docMk/>
+            <pc:sldMk cId="0" sldId="261"/>
+            <ac:picMk id="5" creationId="{00000000-0000-0000-0000-000000000000}"/>
+          </ac:picMkLst>
+        </pc:picChg>
+      </pc:sldChg>
+      <pc:sldChg chg="modSp mod">
+        <pc:chgData name="Volk, Andrew Harrison (General Math and Science)" userId="d2898ccd-3028-4ee4-8f2f-5598df4c43dc" providerId="ADAL" clId="{D0EF2AF6-1D9C-4815-94DD-A346A16C3C87}" dt="2026-04-20T19:09:48.671" v="19" actId="1076"/>
+        <pc:sldMkLst>
+          <pc:docMk/>
+          <pc:sldMk cId="0" sldId="262"/>
+        </pc:sldMkLst>
+        <pc:picChg chg="mod">
+          <ac:chgData name="Volk, Andrew Harrison (General Math and Science)" userId="d2898ccd-3028-4ee4-8f2f-5598df4c43dc" providerId="ADAL" clId="{D0EF2AF6-1D9C-4815-94DD-A346A16C3C87}" dt="2026-04-20T19:09:48.671" v="19" actId="1076"/>
+          <ac:picMkLst>
+            <pc:docMk/>
+            <pc:sldMk cId="0" sldId="262"/>
+            <ac:picMk id="3" creationId="{00000000-0000-0000-0000-000000000000}"/>
+          </ac:picMkLst>
+        </pc:picChg>
+      </pc:sldChg>
+      <pc:sldChg chg="modSp mod">
+        <pc:chgData name="Volk, Andrew Harrison (General Math and Science)" userId="d2898ccd-3028-4ee4-8f2f-5598df4c43dc" providerId="ADAL" clId="{D0EF2AF6-1D9C-4815-94DD-A346A16C3C87}" dt="2026-04-20T19:10:08.092" v="24" actId="1076"/>
+        <pc:sldMkLst>
+          <pc:docMk/>
+          <pc:sldMk cId="0" sldId="264"/>
+        </pc:sldMkLst>
+        <pc:picChg chg="mod">
+          <ac:chgData name="Volk, Andrew Harrison (General Math and Science)" userId="d2898ccd-3028-4ee4-8f2f-5598df4c43dc" providerId="ADAL" clId="{D0EF2AF6-1D9C-4815-94DD-A346A16C3C87}" dt="2026-04-20T19:10:08.092" v="24" actId="1076"/>
+          <ac:picMkLst>
+            <pc:docMk/>
+            <pc:sldMk cId="0" sldId="264"/>
+            <ac:picMk id="3" creationId="{00000000-0000-0000-0000-000000000000}"/>
+          </ac:picMkLst>
+        </pc:picChg>
+      </pc:sldChg>
+      <pc:sldChg chg="modSp mod">
         <pc:chgData name="Volk, Andrew Harrison (General Math and Science)" userId="d2898ccd-3028-4ee4-8f2f-5598df4c43dc" providerId="ADAL" clId="{D0EF2AF6-1D9C-4815-94DD-A346A16C3C87}" dt="2026-04-15T19:11:39.954" v="9" actId="14100"/>
         <pc:sldMkLst>
           <pc:docMk/>
@@ -201,17 +246,32 @@
         </pc:picChg>
       </pc:sldChg>
       <pc:sldChg chg="modSp mod">
-        <pc:chgData name="Volk, Andrew Harrison (General Math and Science)" userId="d2898ccd-3028-4ee4-8f2f-5598df4c43dc" providerId="ADAL" clId="{D0EF2AF6-1D9C-4815-94DD-A346A16C3C87}" dt="2026-04-15T19:12:55.913" v="11" actId="1076"/>
+        <pc:chgData name="Volk, Andrew Harrison (General Math and Science)" userId="d2898ccd-3028-4ee4-8f2f-5598df4c43dc" providerId="ADAL" clId="{D0EF2AF6-1D9C-4815-94DD-A346A16C3C87}" dt="2026-04-20T19:10:18.570" v="27" actId="1076"/>
         <pc:sldMkLst>
           <pc:docMk/>
           <pc:sldMk cId="0" sldId="266"/>
         </pc:sldMkLst>
         <pc:picChg chg="mod">
-          <ac:chgData name="Volk, Andrew Harrison (General Math and Science)" userId="d2898ccd-3028-4ee4-8f2f-5598df4c43dc" providerId="ADAL" clId="{D0EF2AF6-1D9C-4815-94DD-A346A16C3C87}" dt="2026-04-15T19:12:55.913" v="11" actId="1076"/>
+          <ac:chgData name="Volk, Andrew Harrison (General Math and Science)" userId="d2898ccd-3028-4ee4-8f2f-5598df4c43dc" providerId="ADAL" clId="{D0EF2AF6-1D9C-4815-94DD-A346A16C3C87}" dt="2026-04-20T19:10:18.570" v="27" actId="1076"/>
           <ac:picMkLst>
             <pc:docMk/>
             <pc:sldMk cId="0" sldId="266"/>
             <ac:picMk id="5" creationId="{00000000-0000-0000-0000-000000000000}"/>
+          </ac:picMkLst>
+        </pc:picChg>
+      </pc:sldChg>
+      <pc:sldChg chg="modSp mod">
+        <pc:chgData name="Volk, Andrew Harrison (General Math and Science)" userId="d2898ccd-3028-4ee4-8f2f-5598df4c43dc" providerId="ADAL" clId="{D0EF2AF6-1D9C-4815-94DD-A346A16C3C87}" dt="2026-04-20T19:09:30.126" v="16" actId="1076"/>
+        <pc:sldMkLst>
+          <pc:docMk/>
+          <pc:sldMk cId="0" sldId="273"/>
+        </pc:sldMkLst>
+        <pc:picChg chg="mod">
+          <ac:chgData name="Volk, Andrew Harrison (General Math and Science)" userId="d2898ccd-3028-4ee4-8f2f-5598df4c43dc" providerId="ADAL" clId="{D0EF2AF6-1D9C-4815-94DD-A346A16C3C87}" dt="2026-04-20T19:09:30.126" v="16" actId="1076"/>
+          <ac:picMkLst>
+            <pc:docMk/>
+            <pc:sldMk cId="0" sldId="273"/>
+            <ac:picMk id="7" creationId="{00000000-0000-0000-0000-000000000000}"/>
           </ac:picMkLst>
         </pc:picChg>
       </pc:sldChg>
@@ -494,7 +554,7 @@
           <a:p>
             <a:fld id="{F7021451-1387-4CA6-816F-3879F97B5CBC}" type="slidenum">
               <a:rPr lang="en-US"/>
-              <a:t>10</a:t>
+              <a:t>11</a:t>
             </a:fld>
             <a:endParaRPr lang="en-US"/>
           </a:p>
@@ -578,7 +638,7 @@
           <a:p>
             <a:fld id="{F7021451-1387-4CA6-816F-3879F97B5CBC}" type="slidenum">
               <a:rPr lang="en-US"/>
-              <a:t>11</a:t>
+              <a:t>12</a:t>
             </a:fld>
             <a:endParaRPr lang="en-US"/>
           </a:p>
@@ -662,7 +722,7 @@
           <a:p>
             <a:fld id="{F7021451-1387-4CA6-816F-3879F97B5CBC}" type="slidenum">
               <a:rPr lang="en-US"/>
-              <a:t>12</a:t>
+              <a:t>13</a:t>
             </a:fld>
             <a:endParaRPr lang="en-US"/>
           </a:p>
@@ -746,7 +806,7 @@
           <a:p>
             <a:fld id="{F7021451-1387-4CA6-816F-3879F97B5CBC}" type="slidenum">
               <a:rPr lang="en-US"/>
-              <a:t>13</a:t>
+              <a:t>14</a:t>
             </a:fld>
             <a:endParaRPr lang="en-US"/>
           </a:p>
@@ -830,7 +890,7 @@
           <a:p>
             <a:fld id="{F7021451-1387-4CA6-816F-3879F97B5CBC}" type="slidenum">
               <a:rPr lang="en-US"/>
-              <a:t>14</a:t>
+              <a:t>16</a:t>
             </a:fld>
             <a:endParaRPr lang="en-US"/>
           </a:p>
@@ -914,7 +974,7 @@
           <a:p>
             <a:fld id="{F7021451-1387-4CA6-816F-3879F97B5CBC}" type="slidenum">
               <a:rPr lang="en-US"/>
-              <a:t>15</a:t>
+              <a:t>17</a:t>
             </a:fld>
             <a:endParaRPr lang="en-US"/>
           </a:p>
@@ -998,7 +1058,7 @@
           <a:p>
             <a:fld id="{F7021451-1387-4CA6-816F-3879F97B5CBC}" type="slidenum">
               <a:rPr lang="en-US"/>
-              <a:t>16</a:t>
+              <a:t>18</a:t>
             </a:fld>
             <a:endParaRPr lang="en-US"/>
           </a:p>
@@ -1082,7 +1142,7 @@
           <a:p>
             <a:fld id="{F7021451-1387-4CA6-816F-3879F97B5CBC}" type="slidenum">
               <a:rPr lang="en-US"/>
-              <a:t>17</a:t>
+              <a:t>19</a:t>
             </a:fld>
             <a:endParaRPr lang="en-US"/>
           </a:p>
@@ -1502,7 +1562,7 @@
           <a:p>
             <a:fld id="{F7021451-1387-4CA6-816F-3879F97B5CBC}" type="slidenum">
               <a:rPr lang="en-US"/>
-              <a:t>6</a:t>
+              <a:t>7</a:t>
             </a:fld>
             <a:endParaRPr lang="en-US"/>
           </a:p>
@@ -1586,7 +1646,7 @@
           <a:p>
             <a:fld id="{F7021451-1387-4CA6-816F-3879F97B5CBC}" type="slidenum">
               <a:rPr lang="en-US"/>
-              <a:t>7</a:t>
+              <a:t>8</a:t>
             </a:fld>
             <a:endParaRPr lang="en-US"/>
           </a:p>
@@ -1670,7 +1730,7 @@
           <a:p>
             <a:fld id="{F7021451-1387-4CA6-816F-3879F97B5CBC}" type="slidenum">
               <a:rPr lang="en-US"/>
-              <a:t>8</a:t>
+              <a:t>9</a:t>
             </a:fld>
             <a:endParaRPr lang="en-US"/>
           </a:p>
@@ -1754,7 +1814,7 @@
           <a:p>
             <a:fld id="{F7021451-1387-4CA6-816F-3879F97B5CBC}" type="slidenum">
               <a:rPr lang="en-US"/>
-              <a:t>9</a:t>
+              <a:t>10</a:t>
             </a:fld>
             <a:endParaRPr lang="en-US"/>
           </a:p>
@@ -2334,6 +2394,464 @@
 
 <file path=ppt/slides/slide10.xml><?xml version="1.0" encoding="utf-8"?>
 <p:sld xmlns:a="http://schemas.openxmlformats.org/drawingml/2006/main" xmlns:r="http://schemas.openxmlformats.org/officeDocument/2006/relationships" xmlns:p="http://schemas.openxmlformats.org/presentationml/2006/main">
+  <p:cSld name="Slide 9">
+    <p:bg>
+      <p:bgPr>
+        <a:solidFill>
+          <a:srgbClr val="F8FAFC"/>
+        </a:solidFill>
+        <a:effectLst/>
+      </p:bgPr>
+    </p:bg>
+    <p:spTree>
+      <p:nvGrpSpPr>
+        <p:cNvPr id="1" name=""/>
+        <p:cNvGrpSpPr/>
+        <p:nvPr/>
+      </p:nvGrpSpPr>
+      <p:grpSpPr>
+        <a:xfrm>
+          <a:off x="0" y="0"/>
+          <a:ext cx="0" cy="0"/>
+          <a:chOff x="0" y="0"/>
+          <a:chExt cx="0" cy="0"/>
+        </a:xfrm>
+      </p:grpSpPr>
+      <p:sp>
+        <p:nvSpPr>
+          <p:cNvPr id="2" name="Text 0"/>
+          <p:cNvSpPr/>
+          <p:nvPr/>
+        </p:nvSpPr>
+        <p:spPr>
+          <a:xfrm>
+            <a:off x="548640" y="274320"/>
+            <a:ext cx="8229600" cy="548640"/>
+          </a:xfrm>
+          <a:prstGeom prst="rect">
+            <a:avLst/>
+          </a:prstGeom>
+          <a:noFill/>
+          <a:ln/>
+        </p:spPr>
+        <p:txBody>
+          <a:bodyPr wrap="square" lIns="0" tIns="0" rIns="0" bIns="0" rtlCol="0" anchor="ctr"/>
+          <a:lstStyle/>
+          <a:p>
+            <a:pPr marL="0" indent="0">
+              <a:buNone/>
+            </a:pPr>
+            <a:r>
+              <a:rPr lang="en-US" sz="2800" b="1" dirty="0">
+                <a:solidFill>
+                  <a:srgbClr val="1E3A5F"/>
+                </a:solidFill>
+                <a:latin typeface="Georgia" pitchFamily="34" charset="0"/>
+                <a:ea typeface="Georgia" pitchFamily="34" charset="-122"/>
+                <a:cs typeface="Georgia" pitchFamily="34" charset="-120"/>
+              </a:rPr>
+              <a:t>Trig Functions and d = rt</a:t>
+            </a:r>
+            <a:endParaRPr lang="en-US" sz="2800" dirty="0"/>
+          </a:p>
+        </p:txBody>
+      </p:sp>
+      <p:pic>
+        <p:nvPicPr>
+          <p:cNvPr id="3" name="Image 0" descr="preencoded.png"/>
+          <p:cNvPicPr>
+            <a:picLocks noChangeAspect="1"/>
+          </p:cNvPicPr>
+          <p:nvPr/>
+        </p:nvPicPr>
+        <p:blipFill>
+          <a:blip r:embed="rId3"/>
+          <a:stretch>
+            <a:fillRect/>
+          </a:stretch>
+        </p:blipFill>
+        <p:spPr>
+          <a:xfrm>
+            <a:off x="5435917" y="983125"/>
+            <a:ext cx="3708083" cy="2825206"/>
+          </a:xfrm>
+          <a:prstGeom prst="rect">
+            <a:avLst/>
+          </a:prstGeom>
+        </p:spPr>
+      </p:pic>
+      <p:sp>
+        <p:nvSpPr>
+          <p:cNvPr id="4" name="Shape 1"/>
+          <p:cNvSpPr/>
+          <p:nvPr/>
+        </p:nvSpPr>
+        <p:spPr>
+          <a:xfrm>
+            <a:off x="457200" y="914400"/>
+            <a:ext cx="4389120" cy="914400"/>
+          </a:xfrm>
+          <a:prstGeom prst="rect">
+            <a:avLst/>
+          </a:prstGeom>
+          <a:solidFill>
+            <a:srgbClr val="0F2B46"/>
+          </a:solidFill>
+          <a:ln/>
+          <a:effectLst>
+            <a:outerShdw blurRad="76200" dist="25400" dir="8100000" algn="bl" rotWithShape="0">
+              <a:srgbClr val="000000">
+                <a:alpha val="10000"/>
+              </a:srgbClr>
+            </a:outerShdw>
+          </a:effectLst>
+        </p:spPr>
+        <p:txBody>
+          <a:bodyPr/>
+          <a:lstStyle/>
+          <a:p>
+            <a:endParaRPr lang="en-US"/>
+          </a:p>
+        </p:txBody>
+      </p:sp>
+      <p:sp>
+        <p:nvSpPr>
+          <p:cNvPr id="5" name="Text 2"/>
+          <p:cNvSpPr/>
+          <p:nvPr/>
+        </p:nvSpPr>
+        <p:spPr>
+          <a:xfrm>
+            <a:off x="640080" y="960120"/>
+            <a:ext cx="4023360" cy="822960"/>
+          </a:xfrm>
+          <a:prstGeom prst="rect">
+            <a:avLst/>
+          </a:prstGeom>
+          <a:noFill/>
+          <a:ln/>
+        </p:spPr>
+        <p:txBody>
+          <a:bodyPr wrap="square" rtlCol="0" anchor="ctr"/>
+          <a:lstStyle/>
+          <a:p>
+            <a:pPr marL="0" indent="0">
+              <a:buNone/>
+            </a:pPr>
+            <a:r>
+              <a:rPr lang="en-US" sz="1500" b="1" dirty="0">
+                <a:solidFill>
+                  <a:srgbClr val="F97316"/>
+                </a:solidFill>
+                <a:latin typeface="Georgia" pitchFamily="34" charset="0"/>
+                <a:ea typeface="Georgia" pitchFamily="34" charset="-122"/>
+                <a:cs typeface="Georgia" pitchFamily="34" charset="-120"/>
+              </a:rPr>
+              <a:t>d = rt  </a:t>
+            </a:r>
+            <a:r>
+              <a:rPr lang="en-US" sz="1300" dirty="0">
+                <a:solidFill>
+                  <a:srgbClr val="FFFFFF"/>
+                </a:solidFill>
+                <a:latin typeface="Calibri" pitchFamily="34" charset="0"/>
+                <a:ea typeface="Calibri" pitchFamily="34" charset="-122"/>
+                <a:cs typeface="Calibri" pitchFamily="34" charset="-120"/>
+              </a:rPr>
+              <a:t>combined with trig lets us resolve motion into horizontal and vertical components.</a:t>
+            </a:r>
+            <a:endParaRPr lang="en-US" sz="1500" dirty="0"/>
+          </a:p>
+        </p:txBody>
+      </p:sp>
+      <p:sp>
+        <p:nvSpPr>
+          <p:cNvPr id="6" name="Shape 3"/>
+          <p:cNvSpPr/>
+          <p:nvPr/>
+        </p:nvSpPr>
+        <p:spPr>
+          <a:xfrm>
+            <a:off x="457200" y="2103120"/>
+            <a:ext cx="4389120" cy="640080"/>
+          </a:xfrm>
+          <a:prstGeom prst="rect">
+            <a:avLst/>
+          </a:prstGeom>
+          <a:solidFill>
+            <a:srgbClr val="FFFFFF"/>
+          </a:solidFill>
+          <a:ln/>
+          <a:effectLst>
+            <a:outerShdw blurRad="76200" dist="25400" dir="8100000" algn="bl" rotWithShape="0">
+              <a:srgbClr val="000000">
+                <a:alpha val="10000"/>
+              </a:srgbClr>
+            </a:outerShdw>
+          </a:effectLst>
+        </p:spPr>
+        <p:txBody>
+          <a:bodyPr/>
+          <a:lstStyle/>
+          <a:p>
+            <a:endParaRPr lang="en-US"/>
+          </a:p>
+        </p:txBody>
+      </p:sp>
+      <p:sp>
+        <p:nvSpPr>
+          <p:cNvPr id="7" name="Shape 4"/>
+          <p:cNvSpPr/>
+          <p:nvPr/>
+        </p:nvSpPr>
+        <p:spPr>
+          <a:xfrm>
+            <a:off x="457200" y="2103120"/>
+            <a:ext cx="64008" cy="640080"/>
+          </a:xfrm>
+          <a:prstGeom prst="rect">
+            <a:avLst/>
+          </a:prstGeom>
+          <a:solidFill>
+            <a:srgbClr val="0891B2"/>
+          </a:solidFill>
+          <a:ln/>
+        </p:spPr>
+        <p:txBody>
+          <a:bodyPr/>
+          <a:lstStyle/>
+          <a:p>
+            <a:endParaRPr lang="en-US"/>
+          </a:p>
+        </p:txBody>
+      </p:sp>
+      <p:sp>
+        <p:nvSpPr>
+          <p:cNvPr id="8" name="Text 5"/>
+          <p:cNvSpPr/>
+          <p:nvPr/>
+        </p:nvSpPr>
+        <p:spPr>
+          <a:xfrm>
+            <a:off x="685800" y="2121408"/>
+            <a:ext cx="1371600" cy="274320"/>
+          </a:xfrm>
+          <a:prstGeom prst="rect">
+            <a:avLst/>
+          </a:prstGeom>
+          <a:noFill/>
+          <a:ln/>
+        </p:spPr>
+        <p:txBody>
+          <a:bodyPr wrap="square" lIns="0" tIns="0" rIns="0" bIns="0" rtlCol="0" anchor="ctr"/>
+          <a:lstStyle/>
+          <a:p>
+            <a:pPr marL="0" indent="0">
+              <a:buNone/>
+            </a:pPr>
+            <a:r>
+              <a:rPr lang="en-US" sz="1400" b="1" dirty="0">
+                <a:solidFill>
+                  <a:srgbClr val="0891B2"/>
+                </a:solidFill>
+                <a:latin typeface="Georgia" pitchFamily="34" charset="0"/>
+                <a:ea typeface="Georgia" pitchFamily="34" charset="-122"/>
+                <a:cs typeface="Georgia" pitchFamily="34" charset="-120"/>
+              </a:rPr>
+              <a:t>Horizontal</a:t>
+            </a:r>
+            <a:endParaRPr lang="en-US" sz="1400" dirty="0"/>
+          </a:p>
+        </p:txBody>
+      </p:sp>
+      <p:sp>
+        <p:nvSpPr>
+          <p:cNvPr id="9" name="Text 6"/>
+          <p:cNvSpPr/>
+          <p:nvPr/>
+        </p:nvSpPr>
+        <p:spPr>
+          <a:xfrm>
+            <a:off x="685800" y="2395728"/>
+            <a:ext cx="3657600" cy="274320"/>
+          </a:xfrm>
+          <a:prstGeom prst="rect">
+            <a:avLst/>
+          </a:prstGeom>
+          <a:noFill/>
+          <a:ln/>
+        </p:spPr>
+        <p:txBody>
+          <a:bodyPr wrap="square" lIns="0" tIns="0" rIns="0" bIns="0" rtlCol="0" anchor="ctr"/>
+          <a:lstStyle/>
+          <a:p>
+            <a:pPr marL="0" indent="0">
+              <a:buNone/>
+            </a:pPr>
+            <a:r>
+              <a:rPr lang="en-US" sz="1600" b="1" dirty="0">
+                <a:solidFill>
+                  <a:srgbClr val="1E3A5F"/>
+                </a:solidFill>
+                <a:latin typeface="Georgia" pitchFamily="34" charset="0"/>
+                <a:ea typeface="Georgia" pitchFamily="34" charset="-122"/>
+                <a:cs typeface="Georgia" pitchFamily="34" charset="-120"/>
+              </a:rPr>
+              <a:t>dₓ = v cos θ × t</a:t>
+            </a:r>
+            <a:endParaRPr lang="en-US" sz="1600" dirty="0"/>
+          </a:p>
+        </p:txBody>
+      </p:sp>
+      <p:sp>
+        <p:nvSpPr>
+          <p:cNvPr id="10" name="Shape 7"/>
+          <p:cNvSpPr/>
+          <p:nvPr/>
+        </p:nvSpPr>
+        <p:spPr>
+          <a:xfrm>
+            <a:off x="457200" y="2880360"/>
+            <a:ext cx="4389120" cy="640080"/>
+          </a:xfrm>
+          <a:prstGeom prst="rect">
+            <a:avLst/>
+          </a:prstGeom>
+          <a:solidFill>
+            <a:srgbClr val="FFFFFF"/>
+          </a:solidFill>
+          <a:ln/>
+          <a:effectLst>
+            <a:outerShdw blurRad="76200" dist="25400" dir="8100000" algn="bl" rotWithShape="0">
+              <a:srgbClr val="000000">
+                <a:alpha val="10000"/>
+              </a:srgbClr>
+            </a:outerShdw>
+          </a:effectLst>
+        </p:spPr>
+        <p:txBody>
+          <a:bodyPr/>
+          <a:lstStyle/>
+          <a:p>
+            <a:endParaRPr lang="en-US"/>
+          </a:p>
+        </p:txBody>
+      </p:sp>
+      <p:sp>
+        <p:nvSpPr>
+          <p:cNvPr id="11" name="Shape 8"/>
+          <p:cNvSpPr/>
+          <p:nvPr/>
+        </p:nvSpPr>
+        <p:spPr>
+          <a:xfrm>
+            <a:off x="457200" y="2880360"/>
+            <a:ext cx="64008" cy="640080"/>
+          </a:xfrm>
+          <a:prstGeom prst="rect">
+            <a:avLst/>
+          </a:prstGeom>
+          <a:solidFill>
+            <a:srgbClr val="7C3AED"/>
+          </a:solidFill>
+          <a:ln/>
+        </p:spPr>
+        <p:txBody>
+          <a:bodyPr/>
+          <a:lstStyle/>
+          <a:p>
+            <a:endParaRPr lang="en-US"/>
+          </a:p>
+        </p:txBody>
+      </p:sp>
+      <p:sp>
+        <p:nvSpPr>
+          <p:cNvPr id="12" name="Text 9"/>
+          <p:cNvSpPr/>
+          <p:nvPr/>
+        </p:nvSpPr>
+        <p:spPr>
+          <a:xfrm>
+            <a:off x="685800" y="2898648"/>
+            <a:ext cx="1371600" cy="274320"/>
+          </a:xfrm>
+          <a:prstGeom prst="rect">
+            <a:avLst/>
+          </a:prstGeom>
+          <a:noFill/>
+          <a:ln/>
+        </p:spPr>
+        <p:txBody>
+          <a:bodyPr wrap="square" lIns="0" tIns="0" rIns="0" bIns="0" rtlCol="0" anchor="ctr"/>
+          <a:lstStyle/>
+          <a:p>
+            <a:pPr marL="0" indent="0">
+              <a:buNone/>
+            </a:pPr>
+            <a:r>
+              <a:rPr lang="en-US" sz="1400" b="1" dirty="0">
+                <a:solidFill>
+                  <a:srgbClr val="0891B2"/>
+                </a:solidFill>
+                <a:latin typeface="Georgia" pitchFamily="34" charset="0"/>
+                <a:ea typeface="Georgia" pitchFamily="34" charset="-122"/>
+                <a:cs typeface="Georgia" pitchFamily="34" charset="-120"/>
+              </a:rPr>
+              <a:t>Vertical</a:t>
+            </a:r>
+            <a:endParaRPr lang="en-US" sz="1400" dirty="0"/>
+          </a:p>
+        </p:txBody>
+      </p:sp>
+      <p:sp>
+        <p:nvSpPr>
+          <p:cNvPr id="13" name="Text 10"/>
+          <p:cNvSpPr/>
+          <p:nvPr/>
+        </p:nvSpPr>
+        <p:spPr>
+          <a:xfrm>
+            <a:off x="685800" y="3172968"/>
+            <a:ext cx="3657600" cy="274320"/>
+          </a:xfrm>
+          <a:prstGeom prst="rect">
+            <a:avLst/>
+          </a:prstGeom>
+          <a:noFill/>
+          <a:ln/>
+        </p:spPr>
+        <p:txBody>
+          <a:bodyPr wrap="square" lIns="0" tIns="0" rIns="0" bIns="0" rtlCol="0" anchor="ctr"/>
+          <a:lstStyle/>
+          <a:p>
+            <a:pPr marL="0" indent="0">
+              <a:buNone/>
+            </a:pPr>
+            <a:r>
+              <a:rPr lang="en-US" sz="1600" b="1" dirty="0">
+                <a:solidFill>
+                  <a:srgbClr val="1E3A5F"/>
+                </a:solidFill>
+                <a:latin typeface="Georgia" pitchFamily="34" charset="0"/>
+                <a:ea typeface="Georgia" pitchFamily="34" charset="-122"/>
+                <a:cs typeface="Georgia" pitchFamily="34" charset="-120"/>
+              </a:rPr>
+              <a:t>dᵧ = v sin θ × t</a:t>
+            </a:r>
+            <a:endParaRPr lang="en-US" sz="1600" dirty="0"/>
+          </a:p>
+        </p:txBody>
+      </p:sp>
+    </p:spTree>
+  </p:cSld>
+  <p:clrMapOvr>
+    <a:masterClrMapping/>
+  </p:clrMapOvr>
+</p:sld>
+</file>
+
+<file path=ppt/slides/slide11.xml><?xml version="1.0" encoding="utf-8"?>
+<p:sld xmlns:a="http://schemas.openxmlformats.org/drawingml/2006/main" xmlns:r="http://schemas.openxmlformats.org/officeDocument/2006/relationships" xmlns:p="http://schemas.openxmlformats.org/presentationml/2006/main">
   <p:cSld name="Slide 10">
     <p:bg>
       <p:bgPr>
@@ -2717,7 +3235,7 @@
 </p:sld>
 </file>
 
-<file path=ppt/slides/slide11.xml><?xml version="1.0" encoding="utf-8"?>
+<file path=ppt/slides/slide12.xml><?xml version="1.0" encoding="utf-8"?>
 <p:sld xmlns:a="http://schemas.openxmlformats.org/drawingml/2006/main" xmlns:r="http://schemas.openxmlformats.org/officeDocument/2006/relationships" xmlns:p="http://schemas.openxmlformats.org/presentationml/2006/main">
   <p:cSld name="Slide 11">
     <p:bg>
@@ -2881,8 +3399,8 @@
         </p:blipFill>
         <p:spPr>
           <a:xfrm>
-            <a:off x="5303520" y="816138"/>
-            <a:ext cx="3474720" cy="2926080"/>
+            <a:off x="4433996" y="217061"/>
+            <a:ext cx="4710004" cy="3966319"/>
           </a:xfrm>
           <a:prstGeom prst="rect">
             <a:avLst/>
@@ -3212,7 +3730,7 @@
 </p:sld>
 </file>
 
-<file path=ppt/slides/slide12.xml><?xml version="1.0" encoding="utf-8"?>
+<file path=ppt/slides/slide13.xml><?xml version="1.0" encoding="utf-8"?>
 <p:sld xmlns:a="http://schemas.openxmlformats.org/drawingml/2006/main" xmlns:r="http://schemas.openxmlformats.org/officeDocument/2006/relationships" xmlns:p="http://schemas.openxmlformats.org/presentationml/2006/main">
   <p:cSld name="Slide 12">
     <p:bg>
@@ -3639,7 +4157,7 @@
 </p:sld>
 </file>
 
-<file path=ppt/slides/slide13.xml><?xml version="1.0" encoding="utf-8"?>
+<file path=ppt/slides/slide14.xml><?xml version="1.0" encoding="utf-8"?>
 <p:sld xmlns:a="http://schemas.openxmlformats.org/drawingml/2006/main" xmlns:r="http://schemas.openxmlformats.org/officeDocument/2006/relationships" xmlns:p="http://schemas.openxmlformats.org/presentationml/2006/main">
   <p:cSld name="Slide 13">
     <p:bg>
@@ -3887,7 +4405,14 @@
               <a:t>Farther: tan 31° = h / (d + 50)</a:t>
             </a:r>
           </a:p>
-          <a:p/>
+          <a:p>
+            <a:endParaRPr sz="1650" b="0">
+              <a:solidFill>
+                <a:srgbClr val="F97316"/>
+              </a:solidFill>
+              <a:latin typeface="Calibri"/>
+            </a:endParaRPr>
+          </a:p>
           <a:p>
             <a:r>
               <a:rPr sz="1650" b="1">
@@ -3934,7 +4459,11 @@
               <a:t>d ≈ 41.4 ft</a:t>
             </a:r>
           </a:p>
-          <a:p/>
+          <a:p>
+            <a:endParaRPr sz="1500">
+              <a:latin typeface="Calibri"/>
+            </a:endParaRPr>
+          </a:p>
           <a:p>
             <a:r>
               <a:rPr sz="1500" b="0">
@@ -3967,7 +4496,309 @@
 </p:sld>
 </file>
 
-<file path=ppt/slides/slide14.xml><?xml version="1.0" encoding="utf-8"?>
+<file path=ppt/slides/slide15.xml><?xml version="1.0" encoding="utf-8"?>
+<p:sld xmlns:a="http://schemas.openxmlformats.org/drawingml/2006/main" xmlns:r="http://schemas.openxmlformats.org/officeDocument/2006/relationships" xmlns:p="http://schemas.openxmlformats.org/presentationml/2006/main">
+  <p:cSld>
+    <p:spTree>
+      <p:nvGrpSpPr>
+        <p:cNvPr id="1" name=""/>
+        <p:cNvGrpSpPr/>
+        <p:nvPr/>
+      </p:nvGrpSpPr>
+      <p:grpSpPr>
+        <a:xfrm>
+          <a:off x="0" y="0"/>
+          <a:ext cx="0" cy="0"/>
+          <a:chOff x="0" y="0"/>
+          <a:chExt cx="0" cy="0"/>
+        </a:xfrm>
+      </p:grpSpPr>
+      <p:sp>
+        <p:nvSpPr>
+          <p:cNvPr id="2" name="Text 0"/>
+          <p:cNvSpPr/>
+          <p:nvPr/>
+        </p:nvSpPr>
+        <p:spPr>
+          <a:xfrm>
+            <a:off x="548640" y="182880"/>
+            <a:ext cx="8229600" cy="548640"/>
+          </a:xfrm>
+          <a:prstGeom prst="rect">
+            <a:avLst/>
+          </a:prstGeom>
+          <a:noFill/>
+          <a:ln/>
+        </p:spPr>
+        <p:txBody>
+          <a:bodyPr wrap="square" lIns="0" tIns="0" rIns="0" bIns="0" rtlCol="0" anchor="ctr"/>
+          <a:lstStyle/>
+          <a:p>
+            <a:pPr marL="0" indent="0">
+              <a:buNone/>
+            </a:pPr>
+            <a:r>
+              <a:rPr sz="3600" b="1">
+                <a:solidFill>
+                  <a:srgbClr val="1E3A5F"/>
+                </a:solidFill>
+                <a:latin typeface="Georgia"/>
+              </a:rPr>
+              <a:t>You Try</a:t>
+            </a:r>
+            <a:endParaRPr lang="en-US" sz="2600" dirty="0"/>
+          </a:p>
+        </p:txBody>
+      </p:sp>
+      <p:sp>
+        <p:nvSpPr>
+          <p:cNvPr id="3" name="Shape 1"/>
+          <p:cNvSpPr/>
+          <p:nvPr/>
+        </p:nvSpPr>
+        <p:spPr>
+          <a:xfrm>
+            <a:off x="457200" y="731520"/>
+            <a:ext cx="8229600" cy="548640"/>
+          </a:xfrm>
+          <a:prstGeom prst="rect">
+            <a:avLst/>
+          </a:prstGeom>
+          <a:solidFill>
+            <a:srgbClr val="0F2B46"/>
+          </a:solidFill>
+          <a:ln/>
+        </p:spPr>
+        <p:txBody>
+          <a:bodyPr/>
+          <a:lstStyle/>
+          <a:p>
+            <a:endParaRPr lang="en-US"/>
+          </a:p>
+        </p:txBody>
+      </p:sp>
+      <p:sp>
+        <p:nvSpPr>
+          <p:cNvPr id="4" name="Text 2"/>
+          <p:cNvSpPr/>
+          <p:nvPr/>
+        </p:nvSpPr>
+        <p:spPr>
+          <a:xfrm>
+            <a:off x="640080" y="731520"/>
+            <a:ext cx="7772400" cy="548640"/>
+          </a:xfrm>
+          <a:prstGeom prst="rect">
+            <a:avLst/>
+          </a:prstGeom>
+          <a:noFill/>
+          <a:ln/>
+        </p:spPr>
+        <p:txBody>
+          <a:bodyPr wrap="square" lIns="0" tIns="0" rIns="0" bIns="0" rtlCol="0" anchor="ctr"/>
+          <a:lstStyle/>
+          <a:p>
+            <a:pPr marL="0" indent="0">
+              <a:buNone/>
+            </a:pPr>
+            <a:r>
+              <a:rPr sz="1600" b="0">
+                <a:solidFill>
+                  <a:srgbClr val="FFFFFF"/>
+                </a:solidFill>
+                <a:latin typeface="Calibri"/>
+              </a:rPr>
+              <a:t>A surveyor stands 80 ft from a building. The angle of elevation to the roof is 42°. Find the building height.</a:t>
+            </a:r>
+            <a:endParaRPr lang="en-US" sz="1300" dirty="0"/>
+          </a:p>
+        </p:txBody>
+      </p:sp>
+      <p:sp>
+        <p:nvSpPr>
+          <p:cNvPr id="6" name="Shape 3"/>
+          <p:cNvSpPr/>
+          <p:nvPr/>
+        </p:nvSpPr>
+        <p:spPr>
+          <a:xfrm>
+            <a:off x="274320" y="1417320"/>
+            <a:ext cx="4297680" cy="3291840"/>
+          </a:xfrm>
+          <a:prstGeom prst="rect">
+            <a:avLst/>
+          </a:prstGeom>
+          <a:solidFill>
+            <a:srgbClr val="FFFFFF"/>
+          </a:solidFill>
+          <a:ln/>
+          <a:effectLst>
+            <a:outerShdw blurRad="76200" dist="25400" dir="8100000" algn="bl" rotWithShape="0">
+              <a:srgbClr val="000000">
+                <a:alpha val="10000"/>
+              </a:srgbClr>
+            </a:outerShdw>
+          </a:effectLst>
+        </p:spPr>
+        <p:txBody>
+          <a:bodyPr/>
+          <a:lstStyle/>
+          <a:p>
+            <a:endParaRPr lang="en-US"/>
+          </a:p>
+        </p:txBody>
+      </p:sp>
+      <p:sp>
+        <p:nvSpPr>
+          <p:cNvPr id="7" name="Text 4"/>
+          <p:cNvSpPr/>
+          <p:nvPr/>
+        </p:nvSpPr>
+        <p:spPr>
+          <a:xfrm>
+            <a:off x="457200" y="1554480"/>
+            <a:ext cx="3931920" cy="3017520"/>
+          </a:xfrm>
+          <a:prstGeom prst="rect">
+            <a:avLst/>
+          </a:prstGeom>
+          <a:noFill/>
+          <a:ln/>
+        </p:spPr>
+        <p:txBody>
+          <a:bodyPr wrap="square" rtlCol="0" anchor="ctr"/>
+          <a:lstStyle/>
+          <a:p>
+            <a:pPr marL="0" indent="0">
+              <a:spcAft>
+                <a:spcPts val="100"/>
+              </a:spcAft>
+              <a:buNone/>
+            </a:pPr>
+            <a:r>
+              <a:rPr sz="1700" b="1">
+                <a:solidFill>
+                  <a:srgbClr val="0891B2"/>
+                </a:solidFill>
+                <a:latin typeface="Calibri"/>
+              </a:rPr>
+              <a:t>Set up:</a:t>
+            </a:r>
+            <a:endParaRPr lang="en-US" sz="1300" dirty="0"/>
+          </a:p>
+          <a:p>
+            <a:r>
+              <a:rPr sz="1700">
+                <a:latin typeface="Calibri"/>
+              </a:rPr>
+              <a:t>tan 42° = h / 80</a:t>
+            </a:r>
+          </a:p>
+          <a:p>
+            <a:endParaRPr sz="1700">
+              <a:latin typeface="Calibri"/>
+            </a:endParaRPr>
+          </a:p>
+          <a:p>
+            <a:r>
+              <a:rPr sz="1700" b="1">
+                <a:solidFill>
+                  <a:srgbClr val="7C3AED"/>
+                </a:solidFill>
+                <a:latin typeface="Calibri"/>
+              </a:rPr>
+              <a:t>Solve:</a:t>
+            </a:r>
+          </a:p>
+          <a:p>
+            <a:r>
+              <a:rPr sz="1700">
+                <a:latin typeface="Calibri"/>
+              </a:rPr>
+              <a:t>h = 80 × tan 42°</a:t>
+            </a:r>
+          </a:p>
+          <a:p>
+            <a:r>
+              <a:rPr sz="1700">
+                <a:latin typeface="Calibri"/>
+              </a:rPr>
+              <a:t>h = 80 × 0.9004</a:t>
+            </a:r>
+          </a:p>
+          <a:p>
+            <a:r>
+              <a:rPr sz="1800" b="1">
+                <a:solidFill>
+                  <a:srgbClr val="F97316"/>
+                </a:solidFill>
+                <a:latin typeface="Calibri"/>
+              </a:rPr>
+              <a:t>h ≈ 72.0 ft</a:t>
+            </a:r>
+          </a:p>
+          <a:p>
+            <a:endParaRPr sz="1800" b="1">
+              <a:solidFill>
+                <a:srgbClr val="F97316"/>
+              </a:solidFill>
+              <a:latin typeface="Calibri"/>
+            </a:endParaRPr>
+          </a:p>
+          <a:p>
+            <a:r>
+              <a:rPr sz="1700" b="1">
+                <a:solidFill>
+                  <a:srgbClr val="059669"/>
+                </a:solidFill>
+                <a:latin typeface="Calibri"/>
+              </a:rPr>
+              <a:t>Check:</a:t>
+            </a:r>
+          </a:p>
+          <a:p>
+            <a:r>
+              <a:rPr sz="1400" b="0">
+                <a:latin typeface="Calibri"/>
+              </a:rPr>
+              <a:t>72.0 ft &lt; 80 ft  ✓  (height &lt; base distance for 42° &lt; 45°)</a:t>
+            </a:r>
+          </a:p>
+        </p:txBody>
+      </p:sp>
+      <p:pic>
+        <p:nvPicPr>
+          <p:cNvPr id="8" name="Picture 7" descr="s_you_try.png"/>
+          <p:cNvPicPr>
+            <a:picLocks noChangeAspect="1"/>
+          </p:cNvPicPr>
+          <p:nvPr/>
+        </p:nvPicPr>
+        <p:blipFill>
+          <a:blip r:embed="rId2"/>
+          <a:stretch>
+            <a:fillRect/>
+          </a:stretch>
+        </p:blipFill>
+        <p:spPr>
+          <a:xfrm>
+            <a:off x="4754880" y="1188720"/>
+            <a:ext cx="4206240" cy="3108960"/>
+          </a:xfrm>
+          <a:prstGeom prst="rect">
+            <a:avLst/>
+          </a:prstGeom>
+        </p:spPr>
+      </p:pic>
+    </p:spTree>
+  </p:cSld>
+  <p:clrMapOvr>
+    <a:masterClrMapping/>
+  </p:clrMapOvr>
+</p:sld>
+</file>
+
+<file path=ppt/slides/slide16.xml><?xml version="1.0" encoding="utf-8"?>
 <p:sld xmlns:a="http://schemas.openxmlformats.org/drawingml/2006/main" xmlns:r="http://schemas.openxmlformats.org/officeDocument/2006/relationships" xmlns:p="http://schemas.openxmlformats.org/presentationml/2006/main">
   <p:cSld name="Slide 14">
     <p:bg>
@@ -4638,7 +5469,7 @@
 </p:sld>
 </file>
 
-<file path=ppt/slides/slide15.xml><?xml version="1.0" encoding="utf-8"?>
+<file path=ppt/slides/slide17.xml><?xml version="1.0" encoding="utf-8"?>
 <p:sld xmlns:a="http://schemas.openxmlformats.org/drawingml/2006/main" xmlns:r="http://schemas.openxmlformats.org/officeDocument/2006/relationships" xmlns:p="http://schemas.openxmlformats.org/presentationml/2006/main">
   <p:cSld name="Slide 15">
     <p:bg>
@@ -5032,7 +5863,7 @@
 </p:sld>
 </file>
 
-<file path=ppt/slides/slide16.xml><?xml version="1.0" encoding="utf-8"?>
+<file path=ppt/slides/slide18.xml><?xml version="1.0" encoding="utf-8"?>
 <p:sld xmlns:a="http://schemas.openxmlformats.org/drawingml/2006/main" xmlns:r="http://schemas.openxmlformats.org/officeDocument/2006/relationships" xmlns:p="http://schemas.openxmlformats.org/presentationml/2006/main">
   <p:cSld name="Slide 16">
     <p:bg>
@@ -5417,7 +6248,7 @@
 </p:sld>
 </file>
 
-<file path=ppt/slides/slide17.xml><?xml version="1.0" encoding="utf-8"?>
+<file path=ppt/slides/slide19.xml><?xml version="1.0" encoding="utf-8"?>
 <p:sld xmlns:a="http://schemas.openxmlformats.org/drawingml/2006/main" xmlns:r="http://schemas.openxmlformats.org/officeDocument/2006/relationships" xmlns:p="http://schemas.openxmlformats.org/presentationml/2006/main">
   <p:cSld name="Slide 17">
     <p:bg>
@@ -5924,7 +6755,7 @@
               <a:buNone/>
             </a:pPr>
             <a:r>
-              <a:rPr lang="en-US" sz="1500" i="0" dirty="0" b="1">
+              <a:rPr lang="en-US" sz="1500" b="1" i="0" dirty="0">
                 <a:solidFill>
                   <a:srgbClr val="0891B2"/>
                 </a:solidFill>
@@ -5938,541 +6769,6 @@
           </a:p>
         </p:txBody>
       </p:sp>
-    </p:spTree>
-  </p:cSld>
-  <p:clrMapOvr>
-    <a:masterClrMapping/>
-  </p:clrMapOvr>
-</p:sld>
-</file>
-
-<file path=ppt/slides/slide18.xml><?xml version="1.0" encoding="utf-8"?>
-<p:sld xmlns:a="http://schemas.openxmlformats.org/drawingml/2006/main" xmlns:p="http://schemas.openxmlformats.org/presentationml/2006/main" xmlns:r="http://schemas.openxmlformats.org/officeDocument/2006/relationships">
-  <p:cSld>
-    <p:spTree>
-      <p:nvGrpSpPr>
-        <p:cNvPr id="1" name=""/>
-        <p:cNvGrpSpPr/>
-        <p:nvPr/>
-      </p:nvGrpSpPr>
-      <p:grpSpPr/>
-      <p:sp>
-        <p:nvSpPr>
-          <p:cNvPr id="2" name="Text 0"/>
-          <p:cNvSpPr/>
-          <p:nvPr/>
-        </p:nvSpPr>
-        <p:spPr>
-          <a:xfrm>
-            <a:off x="548640" y="274320"/>
-            <a:ext cx="8229600" cy="548640"/>
-          </a:xfrm>
-          <a:prstGeom prst="rect">
-            <a:avLst/>
-          </a:prstGeom>
-          <a:noFill/>
-          <a:ln/>
-        </p:spPr>
-        <p:txBody>
-          <a:bodyPr wrap="square" lIns="0" tIns="0" rIns="0" bIns="0" rtlCol="0" anchor="ctr"/>
-          <a:lstStyle/>
-          <a:p>
-            <a:pPr marL="0" indent="0">
-              <a:buNone/>
-            </a:pPr>
-            <a:r>
-              <a:rPr sz="3300" b="1">
-                <a:solidFill>
-                  <a:srgbClr val="1E3A5F"/>
-                </a:solidFill>
-                <a:latin typeface="Georgia"/>
-              </a:rPr>
-              <a:t>Word Problem — One Right Triangle</a:t>
-            </a:r>
-            <a:endParaRPr lang="en-US" sz="2800" dirty="0"/>
-          </a:p>
-        </p:txBody>
-      </p:sp>
-      <p:sp>
-        <p:nvSpPr>
-          <p:cNvPr id="3" name="Shape 1"/>
-          <p:cNvSpPr/>
-          <p:nvPr/>
-        </p:nvSpPr>
-        <p:spPr>
-          <a:xfrm>
-            <a:off x="457200" y="868680"/>
-            <a:ext cx="8229600" cy="502920"/>
-          </a:xfrm>
-          <a:prstGeom prst="rect">
-            <a:avLst/>
-          </a:prstGeom>
-          <a:solidFill>
-            <a:srgbClr val="0F2B46"/>
-          </a:solidFill>
-          <a:ln/>
-        </p:spPr>
-        <p:txBody>
-          <a:bodyPr/>
-          <a:lstStyle/>
-          <a:p>
-            <a:endParaRPr lang="en-US"/>
-          </a:p>
-        </p:txBody>
-      </p:sp>
-      <p:sp>
-        <p:nvSpPr>
-          <p:cNvPr id="4" name="Text 2"/>
-          <p:cNvSpPr/>
-          <p:nvPr/>
-        </p:nvSpPr>
-        <p:spPr>
-          <a:xfrm>
-            <a:off x="640080" y="868680"/>
-            <a:ext cx="7772400" cy="502920"/>
-          </a:xfrm>
-          <a:prstGeom prst="rect">
-            <a:avLst/>
-          </a:prstGeom>
-          <a:noFill/>
-          <a:ln/>
-        </p:spPr>
-        <p:txBody>
-          <a:bodyPr wrap="square" lIns="0" tIns="0" rIns="0" bIns="0" rtlCol="0" anchor="ctr"/>
-          <a:lstStyle/>
-          <a:p>
-            <a:pPr marL="0" indent="0">
-              <a:buNone/>
-            </a:pPr>
-            <a:r>
-              <a:rPr sz="1700" b="0">
-                <a:solidFill>
-                  <a:srgbClr val="FFFFFF"/>
-                </a:solidFill>
-                <a:latin typeface="Calibri"/>
-              </a:rPr>
-              <a:t>A 20 ft ladder leans against a wall at 65° from the ground. How high up the wall does it reach?</a:t>
-            </a:r>
-            <a:endParaRPr lang="en-US" sz="1500" dirty="0"/>
-          </a:p>
-        </p:txBody>
-      </p:sp>
-      <p:sp>
-        <p:nvSpPr>
-          <p:cNvPr id="6" name="Text 4"/>
-          <p:cNvSpPr/>
-          <p:nvPr/>
-        </p:nvSpPr>
-        <p:spPr>
-          <a:xfrm>
-            <a:off x="640080" y="1737360"/>
-            <a:ext cx="7680960" cy="2286000"/>
-          </a:xfrm>
-          <a:prstGeom prst="rect">
-            <a:avLst/>
-          </a:prstGeom>
-          <a:noFill/>
-          <a:ln/>
-        </p:spPr>
-        <p:txBody>
-          <a:bodyPr wrap="square" rtlCol="0" anchor="ctr"/>
-          <a:lstStyle/>
-          <a:p>
-            <a:pPr marL="0" indent="0">
-              <a:spcAft>
-                <a:spcPts val="300"/>
-              </a:spcAft>
-              <a:buNone/>
-            </a:pPr>
-            <a:r>
-              <a:rPr sz="1700" b="1">
-                <a:solidFill>
-                  <a:srgbClr val="0891B2"/>
-                </a:solidFill>
-                <a:latin typeface="Calibri"/>
-              </a:rPr>
-              <a:t>Step 1: Identify</a:t>
-            </a:r>
-            <a:endParaRPr lang="en-US" sz="1500" dirty="0"/>
-          </a:p>
-          <a:p>
-            <a:r>
-              <a:rPr sz="1600">
-                <a:latin typeface="Calibri"/>
-              </a:rPr>
-              <a:t>Hyp = 20 ft,  angle = 65°,  find opposite (wall height) → use sin (SOH)</a:t>
-            </a:r>
-          </a:p>
-          <a:p/>
-          <a:p>
-            <a:r>
-              <a:rPr sz="1700" b="1">
-                <a:solidFill>
-                  <a:srgbClr val="F97316"/>
-                </a:solidFill>
-                <a:latin typeface="Calibri"/>
-              </a:rPr>
-              <a:t>Step 2: Set up</a:t>
-            </a:r>
-          </a:p>
-          <a:p>
-            <a:r>
-              <a:rPr sz="1700">
-                <a:latin typeface="Calibri"/>
-              </a:rPr>
-              <a:t>sin 65° = h / 20</a:t>
-            </a:r>
-          </a:p>
-          <a:p/>
-          <a:p>
-            <a:r>
-              <a:rPr sz="1700" b="1">
-                <a:solidFill>
-                  <a:srgbClr val="7C3AED"/>
-                </a:solidFill>
-                <a:latin typeface="Calibri"/>
-              </a:rPr>
-              <a:t>Step 3: Solve</a:t>
-            </a:r>
-          </a:p>
-          <a:p>
-            <a:r>
-              <a:rPr sz="1700">
-                <a:latin typeface="Calibri"/>
-              </a:rPr>
-              <a:t>h = 20 × sin 65° = 20 × 0.9063 ≈ 18.1 ft</a:t>
-            </a:r>
-          </a:p>
-          <a:p/>
-          <a:p>
-            <a:r>
-              <a:rPr sz="1700" b="1">
-                <a:solidFill>
-                  <a:srgbClr val="059669"/>
-                </a:solidFill>
-                <a:latin typeface="Calibri"/>
-              </a:rPr>
-              <a:t>Check:</a:t>
-            </a:r>
-          </a:p>
-          <a:p>
-            <a:r>
-              <a:rPr sz="1500" b="0">
-                <a:latin typeface="Calibri"/>
-              </a:rPr>
-              <a:t>18.1 &lt; 20 ✓ (opposite &lt; hypotenuse)</a:t>
-            </a:r>
-          </a:p>
-        </p:txBody>
-      </p:sp>
-      <p:pic>
-        <p:nvPicPr>
-          <p:cNvPr id="7" name="Picture 6" descr="s_skill2_ladder.png"/>
-          <p:cNvPicPr>
-            <a:picLocks noChangeAspect="1"/>
-          </p:cNvPicPr>
-          <p:nvPr/>
-        </p:nvPicPr>
-        <p:blipFill>
-          <a:blip r:embed="rId2"/>
-          <a:stretch>
-            <a:fillRect/>
-          </a:stretch>
-        </p:blipFill>
-        <p:spPr>
-          <a:xfrm>
-            <a:off x="457200" y="1417321"/>
-            <a:ext cx="8229600" cy="3031308"/>
-          </a:xfrm>
-          <a:prstGeom prst="rect">
-            <a:avLst/>
-          </a:prstGeom>
-        </p:spPr>
-      </p:pic>
-    </p:spTree>
-  </p:cSld>
-  <p:clrMapOvr>
-    <a:masterClrMapping/>
-  </p:clrMapOvr>
-</p:sld>
-</file>
-
-<file path=ppt/slides/slide19.xml><?xml version="1.0" encoding="utf-8"?>
-<p:sld xmlns:a="http://schemas.openxmlformats.org/drawingml/2006/main" xmlns:p="http://schemas.openxmlformats.org/presentationml/2006/main" xmlns:r="http://schemas.openxmlformats.org/officeDocument/2006/relationships">
-  <p:cSld>
-    <p:spTree>
-      <p:nvGrpSpPr>
-        <p:cNvPr id="1" name=""/>
-        <p:cNvGrpSpPr/>
-        <p:nvPr/>
-      </p:nvGrpSpPr>
-      <p:grpSpPr/>
-      <p:sp>
-        <p:nvSpPr>
-          <p:cNvPr id="2" name="Text 0"/>
-          <p:cNvSpPr/>
-          <p:nvPr/>
-        </p:nvSpPr>
-        <p:spPr>
-          <a:xfrm>
-            <a:off x="548640" y="182880"/>
-            <a:ext cx="8229600" cy="548640"/>
-          </a:xfrm>
-          <a:prstGeom prst="rect">
-            <a:avLst/>
-          </a:prstGeom>
-          <a:noFill/>
-          <a:ln/>
-        </p:spPr>
-        <p:txBody>
-          <a:bodyPr wrap="square" lIns="0" tIns="0" rIns="0" bIns="0" rtlCol="0" anchor="ctr"/>
-          <a:lstStyle/>
-          <a:p>
-            <a:pPr marL="0" indent="0">
-              <a:buNone/>
-            </a:pPr>
-            <a:r>
-              <a:rPr sz="3600" b="1">
-                <a:solidFill>
-                  <a:srgbClr val="1E3A5F"/>
-                </a:solidFill>
-                <a:latin typeface="Georgia"/>
-              </a:rPr>
-              <a:t>You Try</a:t>
-            </a:r>
-            <a:endParaRPr lang="en-US" sz="2600" dirty="0"/>
-          </a:p>
-        </p:txBody>
-      </p:sp>
-      <p:sp>
-        <p:nvSpPr>
-          <p:cNvPr id="3" name="Shape 1"/>
-          <p:cNvSpPr/>
-          <p:nvPr/>
-        </p:nvSpPr>
-        <p:spPr>
-          <a:xfrm>
-            <a:off x="457200" y="731520"/>
-            <a:ext cx="8229600" cy="548640"/>
-          </a:xfrm>
-          <a:prstGeom prst="rect">
-            <a:avLst/>
-          </a:prstGeom>
-          <a:solidFill>
-            <a:srgbClr val="0F2B46"/>
-          </a:solidFill>
-          <a:ln/>
-        </p:spPr>
-        <p:txBody>
-          <a:bodyPr/>
-          <a:lstStyle/>
-          <a:p>
-            <a:endParaRPr lang="en-US"/>
-          </a:p>
-        </p:txBody>
-      </p:sp>
-      <p:sp>
-        <p:nvSpPr>
-          <p:cNvPr id="4" name="Text 2"/>
-          <p:cNvSpPr/>
-          <p:nvPr/>
-        </p:nvSpPr>
-        <p:spPr>
-          <a:xfrm>
-            <a:off x="640080" y="731520"/>
-            <a:ext cx="7772400" cy="548640"/>
-          </a:xfrm>
-          <a:prstGeom prst="rect">
-            <a:avLst/>
-          </a:prstGeom>
-          <a:noFill/>
-          <a:ln/>
-        </p:spPr>
-        <p:txBody>
-          <a:bodyPr wrap="square" lIns="0" tIns="0" rIns="0" bIns="0" rtlCol="0" anchor="ctr"/>
-          <a:lstStyle/>
-          <a:p>
-            <a:pPr marL="0" indent="0">
-              <a:buNone/>
-            </a:pPr>
-            <a:r>
-              <a:rPr sz="1600" b="0">
-                <a:solidFill>
-                  <a:srgbClr val="FFFFFF"/>
-                </a:solidFill>
-                <a:latin typeface="Calibri"/>
-              </a:rPr>
-              <a:t>A surveyor stands 80 ft from a building. The angle of elevation to the roof is 42°. Find the building height.</a:t>
-            </a:r>
-            <a:endParaRPr lang="en-US" sz="1300" dirty="0"/>
-          </a:p>
-        </p:txBody>
-      </p:sp>
-      <p:sp>
-        <p:nvSpPr>
-          <p:cNvPr id="6" name="Shape 3"/>
-          <p:cNvSpPr/>
-          <p:nvPr/>
-        </p:nvSpPr>
-        <p:spPr>
-          <a:xfrm>
-            <a:off x="274320" y="1417320"/>
-            <a:ext cx="4297680" cy="3291840"/>
-          </a:xfrm>
-          <a:prstGeom prst="rect">
-            <a:avLst/>
-          </a:prstGeom>
-          <a:solidFill>
-            <a:srgbClr val="FFFFFF"/>
-          </a:solidFill>
-          <a:ln/>
-          <a:effectLst>
-            <a:outerShdw blurRad="76200" dist="25400" dir="8100000" algn="bl" rotWithShape="0">
-              <a:srgbClr val="000000">
-                <a:alpha val="10000"/>
-              </a:srgbClr>
-            </a:outerShdw>
-          </a:effectLst>
-        </p:spPr>
-        <p:txBody>
-          <a:bodyPr/>
-          <a:lstStyle/>
-          <a:p>
-            <a:endParaRPr lang="en-US"/>
-          </a:p>
-        </p:txBody>
-      </p:sp>
-      <p:sp>
-        <p:nvSpPr>
-          <p:cNvPr id="7" name="Text 4"/>
-          <p:cNvSpPr/>
-          <p:nvPr/>
-        </p:nvSpPr>
-        <p:spPr>
-          <a:xfrm>
-            <a:off x="457200" y="1554480"/>
-            <a:ext cx="3931920" cy="3017520"/>
-          </a:xfrm>
-          <a:prstGeom prst="rect">
-            <a:avLst/>
-          </a:prstGeom>
-          <a:noFill/>
-          <a:ln/>
-        </p:spPr>
-        <p:txBody>
-          <a:bodyPr wrap="square" rtlCol="0" anchor="ctr"/>
-          <a:lstStyle/>
-          <a:p>
-            <a:pPr marL="0" indent="0">
-              <a:spcAft>
-                <a:spcPts val="100"/>
-              </a:spcAft>
-              <a:buNone/>
-            </a:pPr>
-            <a:r>
-              <a:rPr sz="1700" b="1">
-                <a:solidFill>
-                  <a:srgbClr val="0891B2"/>
-                </a:solidFill>
-                <a:latin typeface="Calibri"/>
-              </a:rPr>
-              <a:t>Set up:</a:t>
-            </a:r>
-            <a:endParaRPr lang="en-US" sz="1300" dirty="0"/>
-          </a:p>
-          <a:p>
-            <a:r>
-              <a:rPr sz="1700">
-                <a:latin typeface="Calibri"/>
-              </a:rPr>
-              <a:t>tan 42° = h / 80</a:t>
-            </a:r>
-          </a:p>
-          <a:p/>
-          <a:p>
-            <a:r>
-              <a:rPr sz="1700" b="1">
-                <a:solidFill>
-                  <a:srgbClr val="7C3AED"/>
-                </a:solidFill>
-                <a:latin typeface="Calibri"/>
-              </a:rPr>
-              <a:t>Solve:</a:t>
-            </a:r>
-          </a:p>
-          <a:p>
-            <a:r>
-              <a:rPr sz="1700">
-                <a:latin typeface="Calibri"/>
-              </a:rPr>
-              <a:t>h = 80 × tan 42°</a:t>
-            </a:r>
-          </a:p>
-          <a:p>
-            <a:r>
-              <a:rPr sz="1700">
-                <a:latin typeface="Calibri"/>
-              </a:rPr>
-              <a:t>h = 80 × 0.9004</a:t>
-            </a:r>
-          </a:p>
-          <a:p>
-            <a:r>
-              <a:rPr sz="1800" b="1">
-                <a:solidFill>
-                  <a:srgbClr val="F97316"/>
-                </a:solidFill>
-                <a:latin typeface="Calibri"/>
-              </a:rPr>
-              <a:t>h ≈ 72.0 ft</a:t>
-            </a:r>
-          </a:p>
-          <a:p/>
-          <a:p>
-            <a:r>
-              <a:rPr sz="1700" b="1">
-                <a:solidFill>
-                  <a:srgbClr val="059669"/>
-                </a:solidFill>
-                <a:latin typeface="Calibri"/>
-              </a:rPr>
-              <a:t>Check:</a:t>
-            </a:r>
-          </a:p>
-          <a:p>
-            <a:r>
-              <a:rPr sz="1400" b="0">
-                <a:latin typeface="Calibri"/>
-              </a:rPr>
-              <a:t>72.0 ft &lt; 80 ft  ✓  (height &lt; base distance for 42° &lt; 45°)</a:t>
-            </a:r>
-          </a:p>
-        </p:txBody>
-      </p:sp>
-      <p:pic>
-        <p:nvPicPr>
-          <p:cNvPr id="8" name="Picture 7" descr="s_you_try.png"/>
-          <p:cNvPicPr>
-            <a:picLocks noChangeAspect="1"/>
-          </p:cNvPicPr>
-          <p:nvPr/>
-        </p:nvPicPr>
-        <p:blipFill>
-          <a:blip r:embed="rId2"/>
-          <a:stretch>
-            <a:fillRect/>
-          </a:stretch>
-        </p:blipFill>
-        <p:spPr>
-          <a:xfrm>
-            <a:off x="4754880" y="1188720"/>
-            <a:ext cx="4206240" cy="3108960"/>
-          </a:xfrm>
-          <a:prstGeom prst="rect">
-            <a:avLst/>
-          </a:prstGeom>
-        </p:spPr>
-      </p:pic>
     </p:spTree>
   </p:cSld>
   <p:clrMapOvr>
@@ -9019,6 +9315,282 @@
 
 <file path=ppt/slides/slide6.xml><?xml version="1.0" encoding="utf-8"?>
 <p:sld xmlns:a="http://schemas.openxmlformats.org/drawingml/2006/main" xmlns:r="http://schemas.openxmlformats.org/officeDocument/2006/relationships" xmlns:p="http://schemas.openxmlformats.org/presentationml/2006/main">
+  <p:cSld>
+    <p:spTree>
+      <p:nvGrpSpPr>
+        <p:cNvPr id="1" name=""/>
+        <p:cNvGrpSpPr/>
+        <p:nvPr/>
+      </p:nvGrpSpPr>
+      <p:grpSpPr>
+        <a:xfrm>
+          <a:off x="0" y="0"/>
+          <a:ext cx="0" cy="0"/>
+          <a:chOff x="0" y="0"/>
+          <a:chExt cx="0" cy="0"/>
+        </a:xfrm>
+      </p:grpSpPr>
+      <p:sp>
+        <p:nvSpPr>
+          <p:cNvPr id="2" name="Text 0"/>
+          <p:cNvSpPr/>
+          <p:nvPr/>
+        </p:nvSpPr>
+        <p:spPr>
+          <a:xfrm>
+            <a:off x="548640" y="274320"/>
+            <a:ext cx="8229600" cy="548640"/>
+          </a:xfrm>
+          <a:prstGeom prst="rect">
+            <a:avLst/>
+          </a:prstGeom>
+          <a:noFill/>
+          <a:ln/>
+        </p:spPr>
+        <p:txBody>
+          <a:bodyPr wrap="square" lIns="0" tIns="0" rIns="0" bIns="0" rtlCol="0" anchor="ctr"/>
+          <a:lstStyle/>
+          <a:p>
+            <a:pPr marL="0" indent="0">
+              <a:buNone/>
+            </a:pPr>
+            <a:r>
+              <a:rPr sz="3300" b="1">
+                <a:solidFill>
+                  <a:srgbClr val="1E3A5F"/>
+                </a:solidFill>
+                <a:latin typeface="Georgia"/>
+              </a:rPr>
+              <a:t>Word Problem — One Right Triangle</a:t>
+            </a:r>
+            <a:endParaRPr lang="en-US" sz="2800" dirty="0"/>
+          </a:p>
+        </p:txBody>
+      </p:sp>
+      <p:sp>
+        <p:nvSpPr>
+          <p:cNvPr id="3" name="Shape 1"/>
+          <p:cNvSpPr/>
+          <p:nvPr/>
+        </p:nvSpPr>
+        <p:spPr>
+          <a:xfrm>
+            <a:off x="457200" y="868680"/>
+            <a:ext cx="8229600" cy="502920"/>
+          </a:xfrm>
+          <a:prstGeom prst="rect">
+            <a:avLst/>
+          </a:prstGeom>
+          <a:solidFill>
+            <a:srgbClr val="0F2B46"/>
+          </a:solidFill>
+          <a:ln/>
+        </p:spPr>
+        <p:txBody>
+          <a:bodyPr/>
+          <a:lstStyle/>
+          <a:p>
+            <a:endParaRPr lang="en-US"/>
+          </a:p>
+        </p:txBody>
+      </p:sp>
+      <p:sp>
+        <p:nvSpPr>
+          <p:cNvPr id="4" name="Text 2"/>
+          <p:cNvSpPr/>
+          <p:nvPr/>
+        </p:nvSpPr>
+        <p:spPr>
+          <a:xfrm>
+            <a:off x="640080" y="868680"/>
+            <a:ext cx="7772400" cy="502920"/>
+          </a:xfrm>
+          <a:prstGeom prst="rect">
+            <a:avLst/>
+          </a:prstGeom>
+          <a:noFill/>
+          <a:ln/>
+        </p:spPr>
+        <p:txBody>
+          <a:bodyPr wrap="square" lIns="0" tIns="0" rIns="0" bIns="0" rtlCol="0" anchor="ctr"/>
+          <a:lstStyle/>
+          <a:p>
+            <a:pPr marL="0" indent="0">
+              <a:buNone/>
+            </a:pPr>
+            <a:r>
+              <a:rPr sz="1700" b="0">
+                <a:solidFill>
+                  <a:srgbClr val="FFFFFF"/>
+                </a:solidFill>
+                <a:latin typeface="Calibri"/>
+              </a:rPr>
+              <a:t>A 20 ft ladder leans against a wall at 65° from the ground. How high up the wall does it reach?</a:t>
+            </a:r>
+            <a:endParaRPr lang="en-US" sz="1500" dirty="0"/>
+          </a:p>
+        </p:txBody>
+      </p:sp>
+      <p:sp>
+        <p:nvSpPr>
+          <p:cNvPr id="6" name="Text 4"/>
+          <p:cNvSpPr/>
+          <p:nvPr/>
+        </p:nvSpPr>
+        <p:spPr>
+          <a:xfrm>
+            <a:off x="640080" y="1737360"/>
+            <a:ext cx="7680960" cy="2286000"/>
+          </a:xfrm>
+          <a:prstGeom prst="rect">
+            <a:avLst/>
+          </a:prstGeom>
+          <a:noFill/>
+          <a:ln/>
+        </p:spPr>
+        <p:txBody>
+          <a:bodyPr wrap="square" rtlCol="0" anchor="ctr"/>
+          <a:lstStyle/>
+          <a:p>
+            <a:pPr marL="0" indent="0">
+              <a:spcAft>
+                <a:spcPts val="300"/>
+              </a:spcAft>
+              <a:buNone/>
+            </a:pPr>
+            <a:r>
+              <a:rPr sz="1700" b="1" dirty="0">
+                <a:solidFill>
+                  <a:srgbClr val="0891B2"/>
+                </a:solidFill>
+                <a:latin typeface="Calibri"/>
+              </a:rPr>
+              <a:t>Step 1: Identify</a:t>
+            </a:r>
+            <a:endParaRPr lang="en-US" sz="1500" dirty="0"/>
+          </a:p>
+          <a:p>
+            <a:r>
+              <a:rPr sz="1600" dirty="0" err="1">
+                <a:latin typeface="Calibri"/>
+              </a:rPr>
+              <a:t>Hyp</a:t>
+            </a:r>
+            <a:r>
+              <a:rPr sz="1600" dirty="0">
+                <a:latin typeface="Calibri"/>
+              </a:rPr>
+              <a:t> = 20 ft,  angle = 65°,  find opposite (wall height) → use sin (SOH)</a:t>
+            </a:r>
+          </a:p>
+          <a:p>
+            <a:endParaRPr sz="1600" dirty="0">
+              <a:latin typeface="Calibri"/>
+            </a:endParaRPr>
+          </a:p>
+          <a:p>
+            <a:r>
+              <a:rPr sz="1700" b="1" dirty="0">
+                <a:solidFill>
+                  <a:srgbClr val="F97316"/>
+                </a:solidFill>
+                <a:latin typeface="Calibri"/>
+              </a:rPr>
+              <a:t>Step 2: Set up</a:t>
+            </a:r>
+          </a:p>
+          <a:p>
+            <a:r>
+              <a:rPr sz="1700" dirty="0">
+                <a:latin typeface="Calibri"/>
+              </a:rPr>
+              <a:t>sin 65° = h / 20</a:t>
+            </a:r>
+          </a:p>
+          <a:p>
+            <a:endParaRPr sz="1700" dirty="0">
+              <a:latin typeface="Calibri"/>
+            </a:endParaRPr>
+          </a:p>
+          <a:p>
+            <a:r>
+              <a:rPr sz="1700" b="1" dirty="0">
+                <a:solidFill>
+                  <a:srgbClr val="7C3AED"/>
+                </a:solidFill>
+                <a:latin typeface="Calibri"/>
+              </a:rPr>
+              <a:t>Step 3: Solve</a:t>
+            </a:r>
+          </a:p>
+          <a:p>
+            <a:r>
+              <a:rPr sz="1700" dirty="0">
+                <a:latin typeface="Calibri"/>
+              </a:rPr>
+              <a:t>h = 20 × sin 65° = 20 × 0.9063 ≈ 18.1 ft</a:t>
+            </a:r>
+          </a:p>
+          <a:p>
+            <a:endParaRPr sz="1700" dirty="0">
+              <a:latin typeface="Calibri"/>
+            </a:endParaRPr>
+          </a:p>
+          <a:p>
+            <a:r>
+              <a:rPr sz="1700" b="1" dirty="0">
+                <a:solidFill>
+                  <a:srgbClr val="059669"/>
+                </a:solidFill>
+                <a:latin typeface="Calibri"/>
+              </a:rPr>
+              <a:t>Check:</a:t>
+            </a:r>
+          </a:p>
+          <a:p>
+            <a:r>
+              <a:rPr sz="1500" b="0" dirty="0">
+                <a:latin typeface="Calibri"/>
+              </a:rPr>
+              <a:t>18.1 &lt; 20 ✓ (opposite &lt; hypotenuse)</a:t>
+            </a:r>
+          </a:p>
+        </p:txBody>
+      </p:sp>
+      <p:pic>
+        <p:nvPicPr>
+          <p:cNvPr id="7" name="Picture 6" descr="s_skill2_ladder.png"/>
+          <p:cNvPicPr>
+            <a:picLocks noChangeAspect="1"/>
+          </p:cNvPicPr>
+          <p:nvPr/>
+        </p:nvPicPr>
+        <p:blipFill>
+          <a:blip r:embed="rId2"/>
+          <a:stretch>
+            <a:fillRect/>
+          </a:stretch>
+        </p:blipFill>
+        <p:spPr>
+          <a:xfrm>
+            <a:off x="4863736" y="1176383"/>
+            <a:ext cx="4405087" cy="3582488"/>
+          </a:xfrm>
+          <a:prstGeom prst="rect">
+            <a:avLst/>
+          </a:prstGeom>
+        </p:spPr>
+      </p:pic>
+    </p:spTree>
+  </p:cSld>
+  <p:clrMapOvr>
+    <a:masterClrMapping/>
+  </p:clrMapOvr>
+</p:sld>
+</file>
+
+<file path=ppt/slides/slide7.xml><?xml version="1.0" encoding="utf-8"?>
+<p:sld xmlns:a="http://schemas.openxmlformats.org/drawingml/2006/main" xmlns:r="http://schemas.openxmlformats.org/officeDocument/2006/relationships" xmlns:p="http://schemas.openxmlformats.org/presentationml/2006/main">
   <p:cSld name="Slide 6">
     <p:bg>
       <p:bgPr>
@@ -9163,7 +9735,7 @@
         </p:blipFill>
         <p:spPr>
           <a:xfrm>
-            <a:off x="5669280" y="640080"/>
+            <a:off x="5669280" y="1508760"/>
             <a:ext cx="3200400" cy="2560320"/>
           </a:xfrm>
           <a:prstGeom prst="rect">
@@ -9240,7 +9812,9 @@
             </a:r>
             <a:endParaRPr lang="en-US" sz="1500" dirty="0"/>
           </a:p>
-          <a:p/>
+          <a:p>
+            <a:endParaRPr lang="en-US" sz="1500" dirty="0"/>
+          </a:p>
           <a:p>
             <a:r>
               <a:rPr sz="1800">
@@ -9260,7 +9834,14 @@
               <a:t>A ≈ 27.8°</a:t>
             </a:r>
           </a:p>
-          <a:p/>
+          <a:p>
+            <a:endParaRPr sz="2000" b="1">
+              <a:solidFill>
+                <a:srgbClr val="F97316"/>
+              </a:solidFill>
+              <a:latin typeface="Calibri"/>
+            </a:endParaRPr>
+          </a:p>
           <a:p>
             <a:r>
               <a:rPr sz="1400" b="0">
@@ -9282,7 +9863,7 @@
         </p:nvSpPr>
         <p:spPr>
           <a:xfrm>
-            <a:off x="640080" y="3520440"/>
+            <a:off x="640080" y="4220754"/>
             <a:ext cx="4572000" cy="594360"/>
           </a:xfrm>
           <a:prstGeom prst="rect">
@@ -9305,7 +9886,7 @@
           <a:p>
             <a:pPr algn="ctr"/>
             <a:r>
-              <a:rPr sz="1500" b="1">
+              <a:rPr sz="1500" b="1" dirty="0">
                 <a:solidFill>
                   <a:srgbClr val="DC2626"/>
                 </a:solidFill>
@@ -9324,7 +9905,7 @@
 </p:sld>
 </file>
 
-<file path=ppt/slides/slide7.xml><?xml version="1.0" encoding="utf-8"?>
+<file path=ppt/slides/slide8.xml><?xml version="1.0" encoding="utf-8"?>
 <p:sld xmlns:a="http://schemas.openxmlformats.org/drawingml/2006/main" xmlns:r="http://schemas.openxmlformats.org/officeDocument/2006/relationships" xmlns:p="http://schemas.openxmlformats.org/presentationml/2006/main">
   <p:cSld name="Slide 7">
     <p:bg>
@@ -9404,7 +9985,7 @@
         </p:blipFill>
         <p:spPr>
           <a:xfrm>
-            <a:off x="274320" y="640080"/>
+            <a:off x="274320" y="822960"/>
             <a:ext cx="5029200" cy="3657600"/>
           </a:xfrm>
           <a:prstGeom prst="rect">
@@ -9651,7 +10232,7 @@
 </p:sld>
 </file>
 
-<file path=ppt/slides/slide8.xml><?xml version="1.0" encoding="utf-8"?>
+<file path=ppt/slides/slide9.xml><?xml version="1.0" encoding="utf-8"?>
 <p:sld xmlns:a="http://schemas.openxmlformats.org/drawingml/2006/main" xmlns:r="http://schemas.openxmlformats.org/officeDocument/2006/relationships" xmlns:p="http://schemas.openxmlformats.org/presentationml/2006/main">
   <p:cSld name="Slide 8">
     <p:bg>
@@ -10016,464 +10597,6 @@
               <a:t>d ≈ 447.9 ft</a:t>
             </a:r>
             <a:endParaRPr lang="en-US" sz="1300" dirty="0"/>
-          </a:p>
-        </p:txBody>
-      </p:sp>
-    </p:spTree>
-  </p:cSld>
-  <p:clrMapOvr>
-    <a:masterClrMapping/>
-  </p:clrMapOvr>
-</p:sld>
-</file>
-
-<file path=ppt/slides/slide9.xml><?xml version="1.0" encoding="utf-8"?>
-<p:sld xmlns:a="http://schemas.openxmlformats.org/drawingml/2006/main" xmlns:r="http://schemas.openxmlformats.org/officeDocument/2006/relationships" xmlns:p="http://schemas.openxmlformats.org/presentationml/2006/main">
-  <p:cSld name="Slide 9">
-    <p:bg>
-      <p:bgPr>
-        <a:solidFill>
-          <a:srgbClr val="F8FAFC"/>
-        </a:solidFill>
-        <a:effectLst/>
-      </p:bgPr>
-    </p:bg>
-    <p:spTree>
-      <p:nvGrpSpPr>
-        <p:cNvPr id="1" name=""/>
-        <p:cNvGrpSpPr/>
-        <p:nvPr/>
-      </p:nvGrpSpPr>
-      <p:grpSpPr>
-        <a:xfrm>
-          <a:off x="0" y="0"/>
-          <a:ext cx="0" cy="0"/>
-          <a:chOff x="0" y="0"/>
-          <a:chExt cx="0" cy="0"/>
-        </a:xfrm>
-      </p:grpSpPr>
-      <p:sp>
-        <p:nvSpPr>
-          <p:cNvPr id="2" name="Text 0"/>
-          <p:cNvSpPr/>
-          <p:nvPr/>
-        </p:nvSpPr>
-        <p:spPr>
-          <a:xfrm>
-            <a:off x="548640" y="274320"/>
-            <a:ext cx="8229600" cy="548640"/>
-          </a:xfrm>
-          <a:prstGeom prst="rect">
-            <a:avLst/>
-          </a:prstGeom>
-          <a:noFill/>
-          <a:ln/>
-        </p:spPr>
-        <p:txBody>
-          <a:bodyPr wrap="square" lIns="0" tIns="0" rIns="0" bIns="0" rtlCol="0" anchor="ctr"/>
-          <a:lstStyle/>
-          <a:p>
-            <a:pPr marL="0" indent="0">
-              <a:buNone/>
-            </a:pPr>
-            <a:r>
-              <a:rPr lang="en-US" sz="2800" b="1" dirty="0">
-                <a:solidFill>
-                  <a:srgbClr val="1E3A5F"/>
-                </a:solidFill>
-                <a:latin typeface="Georgia" pitchFamily="34" charset="0"/>
-                <a:ea typeface="Georgia" pitchFamily="34" charset="-122"/>
-                <a:cs typeface="Georgia" pitchFamily="34" charset="-120"/>
-              </a:rPr>
-              <a:t>Trig Functions and d = rt</a:t>
-            </a:r>
-            <a:endParaRPr lang="en-US" sz="2800" dirty="0"/>
-          </a:p>
-        </p:txBody>
-      </p:sp>
-      <p:pic>
-        <p:nvPicPr>
-          <p:cNvPr id="3" name="Image 0" descr="preencoded.png"/>
-          <p:cNvPicPr>
-            <a:picLocks noChangeAspect="1"/>
-          </p:cNvPicPr>
-          <p:nvPr/>
-        </p:nvPicPr>
-        <p:blipFill>
-          <a:blip r:embed="rId3"/>
-          <a:stretch>
-            <a:fillRect/>
-          </a:stretch>
-        </p:blipFill>
-        <p:spPr>
-          <a:xfrm>
-            <a:off x="5029200" y="731520"/>
-            <a:ext cx="3840480" cy="2926080"/>
-          </a:xfrm>
-          <a:prstGeom prst="rect">
-            <a:avLst/>
-          </a:prstGeom>
-        </p:spPr>
-      </p:pic>
-      <p:sp>
-        <p:nvSpPr>
-          <p:cNvPr id="4" name="Shape 1"/>
-          <p:cNvSpPr/>
-          <p:nvPr/>
-        </p:nvSpPr>
-        <p:spPr>
-          <a:xfrm>
-            <a:off x="457200" y="914400"/>
-            <a:ext cx="4389120" cy="914400"/>
-          </a:xfrm>
-          <a:prstGeom prst="rect">
-            <a:avLst/>
-          </a:prstGeom>
-          <a:solidFill>
-            <a:srgbClr val="0F2B46"/>
-          </a:solidFill>
-          <a:ln/>
-          <a:effectLst>
-            <a:outerShdw blurRad="76200" dist="25400" dir="8100000" algn="bl" rotWithShape="0">
-              <a:srgbClr val="000000">
-                <a:alpha val="10000"/>
-              </a:srgbClr>
-            </a:outerShdw>
-          </a:effectLst>
-        </p:spPr>
-        <p:txBody>
-          <a:bodyPr/>
-          <a:lstStyle/>
-          <a:p>
-            <a:endParaRPr lang="en-US"/>
-          </a:p>
-        </p:txBody>
-      </p:sp>
-      <p:sp>
-        <p:nvSpPr>
-          <p:cNvPr id="5" name="Text 2"/>
-          <p:cNvSpPr/>
-          <p:nvPr/>
-        </p:nvSpPr>
-        <p:spPr>
-          <a:xfrm>
-            <a:off x="640080" y="960120"/>
-            <a:ext cx="4023360" cy="822960"/>
-          </a:xfrm>
-          <a:prstGeom prst="rect">
-            <a:avLst/>
-          </a:prstGeom>
-          <a:noFill/>
-          <a:ln/>
-        </p:spPr>
-        <p:txBody>
-          <a:bodyPr wrap="square" rtlCol="0" anchor="ctr"/>
-          <a:lstStyle/>
-          <a:p>
-            <a:pPr marL="0" indent="0">
-              <a:buNone/>
-            </a:pPr>
-            <a:r>
-              <a:rPr lang="en-US" sz="1500" b="1" dirty="0">
-                <a:solidFill>
-                  <a:srgbClr val="F97316"/>
-                </a:solidFill>
-                <a:latin typeface="Georgia" pitchFamily="34" charset="0"/>
-                <a:ea typeface="Georgia" pitchFamily="34" charset="-122"/>
-                <a:cs typeface="Georgia" pitchFamily="34" charset="-120"/>
-              </a:rPr>
-              <a:t>d = rt  </a:t>
-            </a:r>
-            <a:r>
-              <a:rPr lang="en-US" sz="1300" dirty="0">
-                <a:solidFill>
-                  <a:srgbClr val="FFFFFF"/>
-                </a:solidFill>
-                <a:latin typeface="Calibri" pitchFamily="34" charset="0"/>
-                <a:ea typeface="Calibri" pitchFamily="34" charset="-122"/>
-                <a:cs typeface="Calibri" pitchFamily="34" charset="-120"/>
-              </a:rPr>
-              <a:t>combined with trig lets us resolve motion into horizontal and vertical components.</a:t>
-            </a:r>
-            <a:endParaRPr lang="en-US" sz="1500" dirty="0"/>
-          </a:p>
-        </p:txBody>
-      </p:sp>
-      <p:sp>
-        <p:nvSpPr>
-          <p:cNvPr id="6" name="Shape 3"/>
-          <p:cNvSpPr/>
-          <p:nvPr/>
-        </p:nvSpPr>
-        <p:spPr>
-          <a:xfrm>
-            <a:off x="457200" y="2103120"/>
-            <a:ext cx="4389120" cy="640080"/>
-          </a:xfrm>
-          <a:prstGeom prst="rect">
-            <a:avLst/>
-          </a:prstGeom>
-          <a:solidFill>
-            <a:srgbClr val="FFFFFF"/>
-          </a:solidFill>
-          <a:ln/>
-          <a:effectLst>
-            <a:outerShdw blurRad="76200" dist="25400" dir="8100000" algn="bl" rotWithShape="0">
-              <a:srgbClr val="000000">
-                <a:alpha val="10000"/>
-              </a:srgbClr>
-            </a:outerShdw>
-          </a:effectLst>
-        </p:spPr>
-        <p:txBody>
-          <a:bodyPr/>
-          <a:lstStyle/>
-          <a:p>
-            <a:endParaRPr lang="en-US"/>
-          </a:p>
-        </p:txBody>
-      </p:sp>
-      <p:sp>
-        <p:nvSpPr>
-          <p:cNvPr id="7" name="Shape 4"/>
-          <p:cNvSpPr/>
-          <p:nvPr/>
-        </p:nvSpPr>
-        <p:spPr>
-          <a:xfrm>
-            <a:off x="457200" y="2103120"/>
-            <a:ext cx="64008" cy="640080"/>
-          </a:xfrm>
-          <a:prstGeom prst="rect">
-            <a:avLst/>
-          </a:prstGeom>
-          <a:solidFill>
-            <a:srgbClr val="0891B2"/>
-          </a:solidFill>
-          <a:ln/>
-        </p:spPr>
-        <p:txBody>
-          <a:bodyPr/>
-          <a:lstStyle/>
-          <a:p>
-            <a:endParaRPr lang="en-US"/>
-          </a:p>
-        </p:txBody>
-      </p:sp>
-      <p:sp>
-        <p:nvSpPr>
-          <p:cNvPr id="8" name="Text 5"/>
-          <p:cNvSpPr/>
-          <p:nvPr/>
-        </p:nvSpPr>
-        <p:spPr>
-          <a:xfrm>
-            <a:off x="685800" y="2121408"/>
-            <a:ext cx="1371600" cy="274320"/>
-          </a:xfrm>
-          <a:prstGeom prst="rect">
-            <a:avLst/>
-          </a:prstGeom>
-          <a:noFill/>
-          <a:ln/>
-        </p:spPr>
-        <p:txBody>
-          <a:bodyPr wrap="square" lIns="0" tIns="0" rIns="0" bIns="0" rtlCol="0" anchor="ctr"/>
-          <a:lstStyle/>
-          <a:p>
-            <a:pPr marL="0" indent="0">
-              <a:buNone/>
-            </a:pPr>
-            <a:r>
-              <a:rPr lang="en-US" sz="1400" b="1" dirty="0">
-                <a:solidFill>
-                  <a:srgbClr val="0891B2"/>
-                </a:solidFill>
-                <a:latin typeface="Georgia" pitchFamily="34" charset="0"/>
-                <a:ea typeface="Georgia" pitchFamily="34" charset="-122"/>
-                <a:cs typeface="Georgia" pitchFamily="34" charset="-120"/>
-              </a:rPr>
-              <a:t>Horizontal</a:t>
-            </a:r>
-            <a:endParaRPr lang="en-US" sz="1400" dirty="0"/>
-          </a:p>
-        </p:txBody>
-      </p:sp>
-      <p:sp>
-        <p:nvSpPr>
-          <p:cNvPr id="9" name="Text 6"/>
-          <p:cNvSpPr/>
-          <p:nvPr/>
-        </p:nvSpPr>
-        <p:spPr>
-          <a:xfrm>
-            <a:off x="685800" y="2395728"/>
-            <a:ext cx="3657600" cy="274320"/>
-          </a:xfrm>
-          <a:prstGeom prst="rect">
-            <a:avLst/>
-          </a:prstGeom>
-          <a:noFill/>
-          <a:ln/>
-        </p:spPr>
-        <p:txBody>
-          <a:bodyPr wrap="square" lIns="0" tIns="0" rIns="0" bIns="0" rtlCol="0" anchor="ctr"/>
-          <a:lstStyle/>
-          <a:p>
-            <a:pPr marL="0" indent="0">
-              <a:buNone/>
-            </a:pPr>
-            <a:r>
-              <a:rPr lang="en-US" sz="1600" b="1" dirty="0">
-                <a:solidFill>
-                  <a:srgbClr val="1E3A5F"/>
-                </a:solidFill>
-                <a:latin typeface="Georgia" pitchFamily="34" charset="0"/>
-                <a:ea typeface="Georgia" pitchFamily="34" charset="-122"/>
-                <a:cs typeface="Georgia" pitchFamily="34" charset="-120"/>
-              </a:rPr>
-              <a:t>dₓ = v cos θ × t</a:t>
-            </a:r>
-            <a:endParaRPr lang="en-US" sz="1600" dirty="0"/>
-          </a:p>
-        </p:txBody>
-      </p:sp>
-      <p:sp>
-        <p:nvSpPr>
-          <p:cNvPr id="10" name="Shape 7"/>
-          <p:cNvSpPr/>
-          <p:nvPr/>
-        </p:nvSpPr>
-        <p:spPr>
-          <a:xfrm>
-            <a:off x="457200" y="2880360"/>
-            <a:ext cx="4389120" cy="640080"/>
-          </a:xfrm>
-          <a:prstGeom prst="rect">
-            <a:avLst/>
-          </a:prstGeom>
-          <a:solidFill>
-            <a:srgbClr val="FFFFFF"/>
-          </a:solidFill>
-          <a:ln/>
-          <a:effectLst>
-            <a:outerShdw blurRad="76200" dist="25400" dir="8100000" algn="bl" rotWithShape="0">
-              <a:srgbClr val="000000">
-                <a:alpha val="10000"/>
-              </a:srgbClr>
-            </a:outerShdw>
-          </a:effectLst>
-        </p:spPr>
-        <p:txBody>
-          <a:bodyPr/>
-          <a:lstStyle/>
-          <a:p>
-            <a:endParaRPr lang="en-US"/>
-          </a:p>
-        </p:txBody>
-      </p:sp>
-      <p:sp>
-        <p:nvSpPr>
-          <p:cNvPr id="11" name="Shape 8"/>
-          <p:cNvSpPr/>
-          <p:nvPr/>
-        </p:nvSpPr>
-        <p:spPr>
-          <a:xfrm>
-            <a:off x="457200" y="2880360"/>
-            <a:ext cx="64008" cy="640080"/>
-          </a:xfrm>
-          <a:prstGeom prst="rect">
-            <a:avLst/>
-          </a:prstGeom>
-          <a:solidFill>
-            <a:srgbClr val="7C3AED"/>
-          </a:solidFill>
-          <a:ln/>
-        </p:spPr>
-        <p:txBody>
-          <a:bodyPr/>
-          <a:lstStyle/>
-          <a:p>
-            <a:endParaRPr lang="en-US"/>
-          </a:p>
-        </p:txBody>
-      </p:sp>
-      <p:sp>
-        <p:nvSpPr>
-          <p:cNvPr id="12" name="Text 9"/>
-          <p:cNvSpPr/>
-          <p:nvPr/>
-        </p:nvSpPr>
-        <p:spPr>
-          <a:xfrm>
-            <a:off x="685800" y="2898648"/>
-            <a:ext cx="1371600" cy="274320"/>
-          </a:xfrm>
-          <a:prstGeom prst="rect">
-            <a:avLst/>
-          </a:prstGeom>
-          <a:noFill/>
-          <a:ln/>
-        </p:spPr>
-        <p:txBody>
-          <a:bodyPr wrap="square" lIns="0" tIns="0" rIns="0" bIns="0" rtlCol="0" anchor="ctr"/>
-          <a:lstStyle/>
-          <a:p>
-            <a:pPr marL="0" indent="0">
-              <a:buNone/>
-            </a:pPr>
-            <a:r>
-              <a:rPr lang="en-US" sz="1400" b="1" dirty="0">
-                <a:solidFill>
-                  <a:srgbClr val="0891B2"/>
-                </a:solidFill>
-                <a:latin typeface="Georgia" pitchFamily="34" charset="0"/>
-                <a:ea typeface="Georgia" pitchFamily="34" charset="-122"/>
-                <a:cs typeface="Georgia" pitchFamily="34" charset="-120"/>
-              </a:rPr>
-              <a:t>Vertical</a:t>
-            </a:r>
-            <a:endParaRPr lang="en-US" sz="1400" dirty="0"/>
-          </a:p>
-        </p:txBody>
-      </p:sp>
-      <p:sp>
-        <p:nvSpPr>
-          <p:cNvPr id="13" name="Text 10"/>
-          <p:cNvSpPr/>
-          <p:nvPr/>
-        </p:nvSpPr>
-        <p:spPr>
-          <a:xfrm>
-            <a:off x="685800" y="3172968"/>
-            <a:ext cx="3657600" cy="274320"/>
-          </a:xfrm>
-          <a:prstGeom prst="rect">
-            <a:avLst/>
-          </a:prstGeom>
-          <a:noFill/>
-          <a:ln/>
-        </p:spPr>
-        <p:txBody>
-          <a:bodyPr wrap="square" lIns="0" tIns="0" rIns="0" bIns="0" rtlCol="0" anchor="ctr"/>
-          <a:lstStyle/>
-          <a:p>
-            <a:pPr marL="0" indent="0">
-              <a:buNone/>
-            </a:pPr>
-            <a:r>
-              <a:rPr lang="en-US" sz="1600" b="1" dirty="0">
-                <a:solidFill>
-                  <a:srgbClr val="1E3A5F"/>
-                </a:solidFill>
-                <a:latin typeface="Georgia" pitchFamily="34" charset="0"/>
-                <a:ea typeface="Georgia" pitchFamily="34" charset="-122"/>
-                <a:cs typeface="Georgia" pitchFamily="34" charset="-120"/>
-              </a:rPr>
-              <a:t>dᵧ = v sin θ × t</a:t>
-            </a:r>
-            <a:endParaRPr lang="en-US" sz="1600" dirty="0"/>
           </a:p>
         </p:txBody>
       </p:sp>
